--- a/IOCL_Honeywell_PWO_Presentation/IOCL_Honeywell_PWO_Executive.pptx
+++ b/IOCL_Honeywell_PWO_Presentation/IOCL_Honeywell_PWO_Executive.pptx
@@ -11,6 +11,17 @@
     <p:sldId id="259" r:id="rId10"/>
     <p:sldId id="260" r:id="rId11"/>
     <p:sldId id="261" r:id="rId12"/>
+    <p:sldId id="262" r:id="rId13"/>
+    <p:sldId id="263" r:id="rId14"/>
+    <p:sldId id="264" r:id="rId15"/>
+    <p:sldId id="265" r:id="rId16"/>
+    <p:sldId id="266" r:id="rId17"/>
+    <p:sldId id="267" r:id="rId18"/>
+    <p:sldId id="268" r:id="rId19"/>
+    <p:sldId id="269" r:id="rId20"/>
+    <p:sldId id="270" r:id="rId21"/>
+    <p:sldId id="271" r:id="rId22"/>
+    <p:sldId id="272" r:id="rId23"/>
   </p:sldIdLst>
   <p:sldSz cx="12191695" cy="6858000" type="screen4x3"/>
   <p:notesSz cx="6858000" cy="9144000"/>
@@ -3144,8 +3155,8 @@
         </p:nvSpPr>
         <p:spPr>
           <a:xfrm>
-            <a:off x="731520" y="2011680"/>
-            <a:ext cx="10515600" cy="1828800"/>
+            <a:off x="731520" y="548640"/>
+            <a:ext cx="3657600" cy="365760"/>
           </a:xfrm>
           <a:prstGeom prst="rect">
             <a:avLst/>
@@ -3153,32 +3164,4016 @@
           <a:noFill/>
         </p:spPr>
         <p:txBody>
-          <a:bodyPr wrap="none">
+          <a:bodyPr wrap="square">
             <a:spAutoFit/>
           </a:bodyPr>
           <a:lstStyle/>
           <a:p>
+            <a:pPr algn="l">
+              <a:defRPr sz="1000" b="1">
+                <a:solidFill>
+                  <a:srgbClr val="F47920"/>
+                </a:solidFill>
+              </a:defRPr>
+            </a:pPr>
+            <a:r>
+              <a:t>EXECUTIVE BRIEFING · CONFIDENTIAL</a:t>
+            </a:r>
+          </a:p>
+        </p:txBody>
+      </p:sp>
+      <p:sp>
+        <p:nvSpPr>
+          <p:cNvPr id="4" name="TextBox 3"/>
+          <p:cNvSpPr txBox="1"/>
+          <p:nvPr/>
+        </p:nvSpPr>
+        <p:spPr>
+          <a:xfrm>
+            <a:off x="731520" y="1280160"/>
+            <a:ext cx="10515600" cy="1645920"/>
+          </a:xfrm>
+          <a:prstGeom prst="rect">
+            <a:avLst/>
+          </a:prstGeom>
+          <a:noFill/>
+        </p:spPr>
+        <p:txBody>
+          <a:bodyPr wrap="square">
+            <a:spAutoFit/>
+          </a:bodyPr>
+          <a:lstStyle/>
+          <a:p>
+            <a:pPr algn="l">
+              <a:defRPr sz="4000" b="1">
+                <a:solidFill>
+                  <a:srgbClr val="FFFFFF"/>
+                </a:solidFill>
+              </a:defRPr>
+            </a:pPr>
+            <a:r>
+              <a:t>From Local RTO Silos to</a:t>
+            </a:r>
+            <a:br/>
+            <a:r>
+              <a:t>Plantwide Dynamic Optimization</a:t>
+            </a:r>
+          </a:p>
+        </p:txBody>
+      </p:sp>
+      <p:sp>
+        <p:nvSpPr>
+          <p:cNvPr id="5" name="TextBox 4"/>
+          <p:cNvSpPr txBox="1"/>
+          <p:nvPr/>
+        </p:nvSpPr>
+        <p:spPr>
+          <a:xfrm>
+            <a:off x="731520" y="3017520"/>
+            <a:ext cx="10058400" cy="731520"/>
+          </a:xfrm>
+          <a:prstGeom prst="rect">
+            <a:avLst/>
+          </a:prstGeom>
+          <a:noFill/>
+        </p:spPr>
+        <p:txBody>
+          <a:bodyPr wrap="square">
+            <a:spAutoFit/>
+          </a:bodyPr>
+          <a:lstStyle/>
+          <a:p>
+            <a:pPr algn="l">
+              <a:defRPr sz="2000" b="0">
+                <a:solidFill>
+                  <a:srgbClr val="B4C3D2"/>
+                </a:solidFill>
+              </a:defRPr>
+            </a:pPr>
+            <a:r>
+              <a:t>Why Honeywell PWO + HPDT belong in every IOCL Honeywell Template</a:t>
+            </a:r>
+          </a:p>
+        </p:txBody>
+      </p:sp>
+      <p:sp>
+        <p:nvSpPr>
+          <p:cNvPr id="6" name="TextBox 5"/>
+          <p:cNvSpPr txBox="1"/>
+          <p:nvPr/>
+        </p:nvSpPr>
+        <p:spPr>
+          <a:xfrm>
+            <a:off x="731520" y="4114800"/>
+            <a:ext cx="10058400" cy="457200"/>
+          </a:xfrm>
+          <a:prstGeom prst="rect">
+            <a:avLst/>
+          </a:prstGeom>
+          <a:noFill/>
+        </p:spPr>
+        <p:txBody>
+          <a:bodyPr wrap="square">
+            <a:spAutoFit/>
+          </a:bodyPr>
+          <a:lstStyle/>
+          <a:p>
+            <a:pPr algn="l">
+              <a:defRPr sz="2200" b="1">
+                <a:solidFill>
+                  <a:srgbClr val="FFFFFF"/>
+                </a:solidFill>
+              </a:defRPr>
+            </a:pPr>
+            <a:r>
+              <a:t>INDIAN OIL  ×  HONEYWELL FORGE</a:t>
+            </a:r>
+          </a:p>
+        </p:txBody>
+      </p:sp>
+      <p:sp>
+        <p:nvSpPr>
+          <p:cNvPr id="7" name="TextBox 6"/>
+          <p:cNvSpPr txBox="1"/>
+          <p:nvPr/>
+        </p:nvSpPr>
+        <p:spPr>
+          <a:xfrm>
+            <a:off x="731520" y="4663440"/>
+            <a:ext cx="10058400" cy="365760"/>
+          </a:xfrm>
+          <a:prstGeom prst="rect">
+            <a:avLst/>
+          </a:prstGeom>
+          <a:noFill/>
+        </p:spPr>
+        <p:txBody>
+          <a:bodyPr wrap="square">
+            <a:spAutoFit/>
+          </a:bodyPr>
+          <a:lstStyle/>
+          <a:p>
+            <a:pPr algn="l">
+              <a:defRPr sz="1200" b="0">
+                <a:solidFill>
+                  <a:srgbClr val="64748B"/>
+                </a:solidFill>
+              </a:defRPr>
+            </a:pPr>
+            <a:r>
+              <a:t>Refining &amp; Petrochemicals · Digital Optimization Strategy</a:t>
+            </a:r>
+          </a:p>
+        </p:txBody>
+      </p:sp>
+    </p:spTree>
+  </p:cSld>
+  <p:clrMapOvr>
+    <a:masterClrMapping/>
+  </p:clrMapOvr>
+</p:sld>
+</file>
+
+<file path=ppt/slides/slide10.xml><?xml version="1.0" encoding="utf-8"?>
+<p:sld xmlns:a="http://schemas.openxmlformats.org/drawingml/2006/main" xmlns:p="http://schemas.openxmlformats.org/presentationml/2006/main" xmlns:r="http://schemas.openxmlformats.org/officeDocument/2006/relationships">
+  <p:cSld>
+    <p:spTree>
+      <p:nvGrpSpPr>
+        <p:cNvPr id="1" name=""/>
+        <p:cNvGrpSpPr/>
+        <p:nvPr/>
+      </p:nvGrpSpPr>
+      <p:grpSpPr/>
+      <p:sp>
+        <p:nvSpPr>
+          <p:cNvPr id="2" name="Rectangle 1"/>
+          <p:cNvSpPr/>
+          <p:nvPr/>
+        </p:nvSpPr>
+        <p:spPr>
+          <a:xfrm>
+            <a:off x="0" y="0"/>
+            <a:ext cx="12191695" cy="6858000"/>
+          </a:xfrm>
+          <a:prstGeom prst="rect">
+            <a:avLst/>
+          </a:prstGeom>
+          <a:solidFill>
+            <a:srgbClr val="F8FAFC"/>
+          </a:solidFill>
+          <a:ln>
+            <a:noFill/>
+          </a:ln>
+        </p:spPr>
+        <p:style>
+          <a:lnRef idx="1">
+            <a:schemeClr val="accent1"/>
+          </a:lnRef>
+          <a:fillRef idx="3">
+            <a:schemeClr val="accent1"/>
+          </a:fillRef>
+          <a:effectRef idx="2">
+            <a:schemeClr val="accent1"/>
+          </a:effectRef>
+          <a:fontRef idx="minor">
+            <a:schemeClr val="lt1"/>
+          </a:fontRef>
+        </p:style>
+        <p:txBody>
+          <a:bodyPr rtlCol="0" anchor="ctr"/>
+          <a:lstStyle/>
+          <a:p>
+            <a:pPr algn="ctr"/>
+          </a:p>
+        </p:txBody>
+      </p:sp>
+      <p:sp>
+        <p:nvSpPr>
+          <p:cNvPr id="3" name="TextBox 2"/>
+          <p:cNvSpPr txBox="1"/>
+          <p:nvPr/>
+        </p:nvSpPr>
+        <p:spPr>
+          <a:xfrm>
+            <a:off x="502920" y="320040"/>
+            <a:ext cx="10972800" cy="822960"/>
+          </a:xfrm>
+          <a:prstGeom prst="rect">
+            <a:avLst/>
+          </a:prstGeom>
+          <a:noFill/>
+        </p:spPr>
+        <p:txBody>
+          <a:bodyPr wrap="square">
+            <a:spAutoFit/>
+          </a:bodyPr>
+          <a:lstStyle/>
+          <a:p>
+            <a:pPr algn="l">
+              <a:defRPr sz="3200" b="1">
+                <a:solidFill>
+                  <a:srgbClr val="003DA5"/>
+                </a:solidFill>
+              </a:defRPr>
+            </a:pPr>
+            <a:r>
+              <a:t>Patented proxy limits — feasibility without model bloat</a:t>
+            </a:r>
+          </a:p>
+        </p:txBody>
+      </p:sp>
+      <p:sp>
+        <p:nvSpPr>
+          <p:cNvPr id="4" name="Rectangle 3"/>
+          <p:cNvSpPr/>
+          <p:nvPr/>
+        </p:nvSpPr>
+        <p:spPr>
+          <a:xfrm>
+            <a:off x="502920" y="1051560"/>
+            <a:ext cx="1097280" cy="54864"/>
+          </a:xfrm>
+          <a:prstGeom prst="rect">
+            <a:avLst/>
+          </a:prstGeom>
+          <a:solidFill>
+            <a:srgbClr val="F47920"/>
+          </a:solidFill>
+          <a:ln>
+            <a:noFill/>
+          </a:ln>
+        </p:spPr>
+        <p:style>
+          <a:lnRef idx="1">
+            <a:schemeClr val="accent1"/>
+          </a:lnRef>
+          <a:fillRef idx="3">
+            <a:schemeClr val="accent1"/>
+          </a:fillRef>
+          <a:effectRef idx="2">
+            <a:schemeClr val="accent1"/>
+          </a:effectRef>
+          <a:fontRef idx="minor">
+            <a:schemeClr val="lt1"/>
+          </a:fontRef>
+        </p:style>
+        <p:txBody>
+          <a:bodyPr rtlCol="0" anchor="ctr"/>
+          <a:lstStyle/>
+          <a:p>
+            <a:pPr algn="ctr"/>
+          </a:p>
+        </p:txBody>
+      </p:sp>
+      <p:sp>
+        <p:nvSpPr>
+          <p:cNvPr id="5" name="TextBox 4"/>
+          <p:cNvSpPr txBox="1"/>
+          <p:nvPr/>
+        </p:nvSpPr>
+        <p:spPr>
+          <a:xfrm>
+            <a:off x="502920" y="1600200"/>
+            <a:ext cx="5943600" cy="4114800"/>
+          </a:xfrm>
+          <a:prstGeom prst="rect">
+            <a:avLst/>
+          </a:prstGeom>
+          <a:noFill/>
+        </p:spPr>
+        <p:txBody>
+          <a:bodyPr wrap="square">
+            <a:spAutoFit/>
+          </a:bodyPr>
+          <a:lstStyle/>
+          <a:p>
             <a:pPr>
-              <a:defRPr sz="3600" b="1">
+              <a:spcAft>
+                <a:spcPts val="800"/>
+              </a:spcAft>
+              <a:defRPr sz="1600">
+                <a:solidFill>
+                  <a:srgbClr val="1E293B"/>
+                </a:solidFill>
+              </a:defRPr>
+            </a:pPr>
+            <a:r>
+              <a:t>APC calculates feasible envelope on demand</a:t>
+            </a:r>
+          </a:p>
+          <a:p>
+            <a:pPr>
+              <a:spcAft>
+                <a:spcPts val="800"/>
+              </a:spcAft>
+              <a:defRPr sz="1600">
+                <a:solidFill>
+                  <a:srgbClr val="1E293B"/>
+                </a:solidFill>
+              </a:defRPr>
+            </a:pPr>
+            <a:r>
+              <a:t>PWO sees aggregated limits — not thousands of inner constraints</a:t>
+            </a:r>
+          </a:p>
+          <a:p>
+            <a:pPr>
+              <a:spcAft>
+                <a:spcPts val="800"/>
+              </a:spcAft>
+              <a:defRPr sz="1600">
+                <a:solidFill>
+                  <a:srgbClr val="1E293B"/>
+                </a:solidFill>
+              </a:defRPr>
+            </a:pPr>
+            <a:r>
+              <a:t>APC model updates automatically flow to optimization</a:t>
+            </a:r>
+          </a:p>
+          <a:p>
+            <a:pPr>
+              <a:spcAft>
+                <a:spcPts val="800"/>
+              </a:spcAft>
+              <a:defRPr sz="1600">
+                <a:solidFill>
+                  <a:srgbClr val="1E293B"/>
+                </a:solidFill>
+              </a:defRPr>
+            </a:pPr>
+            <a:r>
+              <a:t>Smaller problem → faster solve → operator-trusted moves</a:t>
+            </a:r>
+          </a:p>
+        </p:txBody>
+      </p:sp>
+      <p:sp>
+        <p:nvSpPr>
+          <p:cNvPr id="6" name="Rounded Rectangle 5"/>
+          <p:cNvSpPr/>
+          <p:nvPr/>
+        </p:nvSpPr>
+        <p:spPr>
+          <a:xfrm>
+            <a:off x="8412480" y="2560320"/>
+            <a:ext cx="2011680" cy="1097280"/>
+          </a:xfrm>
+          <a:prstGeom prst="roundRect">
+            <a:avLst/>
+          </a:prstGeom>
+          <a:solidFill>
+            <a:srgbClr val="003DA5"/>
+          </a:solidFill>
+          <a:ln>
+            <a:solidFill>
+              <a:srgbClr val="C8C8D2"/>
+            </a:solidFill>
+          </a:ln>
+        </p:spPr>
+        <p:style>
+          <a:lnRef idx="1">
+            <a:schemeClr val="accent1"/>
+          </a:lnRef>
+          <a:fillRef idx="3">
+            <a:schemeClr val="accent1"/>
+          </a:fillRef>
+          <a:effectRef idx="2">
+            <a:schemeClr val="accent1"/>
+          </a:effectRef>
+          <a:fontRef idx="minor">
+            <a:schemeClr val="lt1"/>
+          </a:fontRef>
+        </p:style>
+        <p:txBody>
+          <a:bodyPr rtlCol="0" anchor="ctr"/>
+          <a:lstStyle/>
+          <a:p>
+            <a:pPr algn="ctr">
+              <a:defRPr sz="1400" b="1">
                 <a:solidFill>
                   <a:srgbClr val="FFFFFF"/>
                 </a:solidFill>
               </a:defRPr>
             </a:pPr>
             <a:r>
-              <a:t>Plantwide Dynamic RTO for IOCL</a:t>
-            </a:r>
-          </a:p>
+              <a:t>PWO</a:t>
+            </a:r>
+          </a:p>
+          <a:p>
+            <a:pPr algn="ctr">
+              <a:defRPr sz="900">
+                <a:solidFill>
+                  <a:srgbClr val="DCE6F0"/>
+                </a:solidFill>
+              </a:defRPr>
+            </a:pPr>
+            <a:r>
+              <a:t>Site objective</a:t>
+            </a:r>
+          </a:p>
+        </p:txBody>
+      </p:sp>
+      <p:sp>
+        <p:nvSpPr>
+          <p:cNvPr id="7" name="Oval 6"/>
+          <p:cNvSpPr/>
+          <p:nvPr/>
+        </p:nvSpPr>
+        <p:spPr>
+          <a:xfrm>
+            <a:off x="9052560" y="1737360"/>
+            <a:ext cx="822960" cy="822960"/>
+          </a:xfrm>
+          <a:prstGeom prst="ellipse">
+            <a:avLst/>
+          </a:prstGeom>
+          <a:solidFill>
+            <a:srgbClr val="C8FFEB"/>
+          </a:solidFill>
+          <a:ln>
+            <a:solidFill>
+              <a:srgbClr val="00C896"/>
+            </a:solidFill>
+          </a:ln>
+        </p:spPr>
+        <p:style>
+          <a:lnRef idx="1">
+            <a:schemeClr val="accent1"/>
+          </a:lnRef>
+          <a:fillRef idx="3">
+            <a:schemeClr val="accent1"/>
+          </a:fillRef>
+          <a:effectRef idx="2">
+            <a:schemeClr val="accent1"/>
+          </a:effectRef>
+          <a:fontRef idx="minor">
+            <a:schemeClr val="lt1"/>
+          </a:fontRef>
+        </p:style>
+        <p:txBody>
+          <a:bodyPr rtlCol="0" anchor="ctr"/>
+          <a:lstStyle/>
+          <a:p>
+            <a:pPr algn="ctr">
+              <a:defRPr sz="1000"/>
+            </a:pPr>
+            <a:r>
+              <a:t>APC</a:t>
+            </a:r>
+          </a:p>
+        </p:txBody>
+      </p:sp>
+      <p:sp>
+        <p:nvSpPr>
+          <p:cNvPr id="8" name="Oval 7"/>
+          <p:cNvSpPr/>
+          <p:nvPr/>
+        </p:nvSpPr>
+        <p:spPr>
+          <a:xfrm>
+            <a:off x="7498079" y="4114800"/>
+            <a:ext cx="822960" cy="822960"/>
+          </a:xfrm>
+          <a:prstGeom prst="ellipse">
+            <a:avLst/>
+          </a:prstGeom>
+          <a:solidFill>
+            <a:srgbClr val="C8FFEB"/>
+          </a:solidFill>
+          <a:ln>
+            <a:solidFill>
+              <a:srgbClr val="00C896"/>
+            </a:solidFill>
+          </a:ln>
+        </p:spPr>
+        <p:style>
+          <a:lnRef idx="1">
+            <a:schemeClr val="accent1"/>
+          </a:lnRef>
+          <a:fillRef idx="3">
+            <a:schemeClr val="accent1"/>
+          </a:fillRef>
+          <a:effectRef idx="2">
+            <a:schemeClr val="accent1"/>
+          </a:effectRef>
+          <a:fontRef idx="minor">
+            <a:schemeClr val="lt1"/>
+          </a:fontRef>
+        </p:style>
+        <p:txBody>
+          <a:bodyPr rtlCol="0" anchor="ctr"/>
+          <a:lstStyle/>
+          <a:p>
+            <a:pPr algn="ctr">
+              <a:defRPr sz="1000"/>
+            </a:pPr>
+            <a:r>
+              <a:t>APC</a:t>
+            </a:r>
+          </a:p>
+        </p:txBody>
+      </p:sp>
+      <p:sp>
+        <p:nvSpPr>
+          <p:cNvPr id="9" name="Oval 8"/>
+          <p:cNvSpPr/>
+          <p:nvPr/>
+        </p:nvSpPr>
+        <p:spPr>
+          <a:xfrm>
+            <a:off x="9692640" y="4114800"/>
+            <a:ext cx="822960" cy="822960"/>
+          </a:xfrm>
+          <a:prstGeom prst="ellipse">
+            <a:avLst/>
+          </a:prstGeom>
+          <a:solidFill>
+            <a:srgbClr val="C8FFEB"/>
+          </a:solidFill>
+          <a:ln>
+            <a:solidFill>
+              <a:srgbClr val="00C896"/>
+            </a:solidFill>
+          </a:ln>
+        </p:spPr>
+        <p:style>
+          <a:lnRef idx="1">
+            <a:schemeClr val="accent1"/>
+          </a:lnRef>
+          <a:fillRef idx="3">
+            <a:schemeClr val="accent1"/>
+          </a:fillRef>
+          <a:effectRef idx="2">
+            <a:schemeClr val="accent1"/>
+          </a:effectRef>
+          <a:fontRef idx="minor">
+            <a:schemeClr val="lt1"/>
+          </a:fontRef>
+        </p:style>
+        <p:txBody>
+          <a:bodyPr rtlCol="0" anchor="ctr"/>
+          <a:lstStyle/>
+          <a:p>
+            <a:pPr algn="ctr">
+              <a:defRPr sz="1000"/>
+            </a:pPr>
+            <a:r>
+              <a:t>APC</a:t>
+            </a:r>
+          </a:p>
+        </p:txBody>
+      </p:sp>
+    </p:spTree>
+  </p:cSld>
+  <p:clrMapOvr>
+    <a:masterClrMapping/>
+  </p:clrMapOvr>
+</p:sld>
+</file>
+
+<file path=ppt/slides/slide11.xml><?xml version="1.0" encoding="utf-8"?>
+<p:sld xmlns:a="http://schemas.openxmlformats.org/drawingml/2006/main" xmlns:p="http://schemas.openxmlformats.org/presentationml/2006/main" xmlns:r="http://schemas.openxmlformats.org/officeDocument/2006/relationships">
+  <p:cSld>
+    <p:spTree>
+      <p:nvGrpSpPr>
+        <p:cNvPr id="1" name=""/>
+        <p:cNvGrpSpPr/>
+        <p:nvPr/>
+      </p:nvGrpSpPr>
+      <p:grpSpPr/>
+      <p:sp>
+        <p:nvSpPr>
+          <p:cNvPr id="2" name="Rectangle 1"/>
+          <p:cNvSpPr/>
+          <p:nvPr/>
+        </p:nvSpPr>
+        <p:spPr>
+          <a:xfrm>
+            <a:off x="0" y="0"/>
+            <a:ext cx="12191695" cy="6858000"/>
+          </a:xfrm>
+          <a:prstGeom prst="rect">
+            <a:avLst/>
+          </a:prstGeom>
+          <a:solidFill>
+            <a:srgbClr val="0F2744"/>
+          </a:solidFill>
+          <a:ln>
+            <a:noFill/>
+          </a:ln>
+        </p:spPr>
+        <p:style>
+          <a:lnRef idx="1">
+            <a:schemeClr val="accent1"/>
+          </a:lnRef>
+          <a:fillRef idx="3">
+            <a:schemeClr val="accent1"/>
+          </a:fillRef>
+          <a:effectRef idx="2">
+            <a:schemeClr val="accent1"/>
+          </a:effectRef>
+          <a:fontRef idx="minor">
+            <a:schemeClr val="lt1"/>
+          </a:fontRef>
+        </p:style>
+        <p:txBody>
+          <a:bodyPr rtlCol="0" anchor="ctr"/>
+          <a:lstStyle/>
+          <a:p>
+            <a:pPr algn="ctr"/>
+          </a:p>
+        </p:txBody>
+      </p:sp>
+      <p:sp>
+        <p:nvSpPr>
+          <p:cNvPr id="3" name="TextBox 2"/>
+          <p:cNvSpPr txBox="1"/>
+          <p:nvPr/>
+        </p:nvSpPr>
+        <p:spPr>
+          <a:xfrm>
+            <a:off x="502920" y="320040"/>
+            <a:ext cx="10972800" cy="822960"/>
+          </a:xfrm>
+          <a:prstGeom prst="rect">
+            <a:avLst/>
+          </a:prstGeom>
+          <a:noFill/>
+        </p:spPr>
+        <p:txBody>
+          <a:bodyPr wrap="square">
+            <a:spAutoFit/>
+          </a:bodyPr>
+          <a:lstStyle/>
+          <a:p>
+            <a:pPr algn="l">
+              <a:defRPr sz="3200" b="1">
+                <a:solidFill>
+                  <a:srgbClr val="FFFFFF"/>
+                </a:solidFill>
+              </a:defRPr>
+            </a:pPr>
+            <a:r>
+              <a:t>Honeywell Process Digital Twin (HPDT)</a:t>
+            </a:r>
+          </a:p>
+        </p:txBody>
+      </p:sp>
+      <p:sp>
+        <p:nvSpPr>
+          <p:cNvPr id="4" name="TextBox 3"/>
+          <p:cNvSpPr txBox="1"/>
+          <p:nvPr/>
+        </p:nvSpPr>
+        <p:spPr>
+          <a:xfrm>
+            <a:off x="502920" y="960120"/>
+            <a:ext cx="10972800" cy="457200"/>
+          </a:xfrm>
+          <a:prstGeom prst="rect">
+            <a:avLst/>
+          </a:prstGeom>
+          <a:noFill/>
+        </p:spPr>
+        <p:txBody>
+          <a:bodyPr wrap="square">
+            <a:spAutoFit/>
+          </a:bodyPr>
+          <a:lstStyle/>
+          <a:p>
+            <a:pPr algn="l">
+              <a:defRPr sz="1400" b="0">
+                <a:solidFill>
+                  <a:srgbClr val="B4BEC8"/>
+                </a:solidFill>
+              </a:defRPr>
+            </a:pPr>
+            <a:r>
+              <a:t>Keeps planning, optimization, and reality aligned</a:t>
+            </a:r>
+          </a:p>
+        </p:txBody>
+      </p:sp>
+      <p:sp>
+        <p:nvSpPr>
+          <p:cNvPr id="5" name="Rectangle 4"/>
+          <p:cNvSpPr/>
+          <p:nvPr/>
+        </p:nvSpPr>
+        <p:spPr>
+          <a:xfrm>
+            <a:off x="502920" y="1325880"/>
+            <a:ext cx="1097280" cy="54864"/>
+          </a:xfrm>
+          <a:prstGeom prst="rect">
+            <a:avLst/>
+          </a:prstGeom>
+          <a:solidFill>
+            <a:srgbClr val="F47920"/>
+          </a:solidFill>
+          <a:ln>
+            <a:noFill/>
+          </a:ln>
+        </p:spPr>
+        <p:style>
+          <a:lnRef idx="1">
+            <a:schemeClr val="accent1"/>
+          </a:lnRef>
+          <a:fillRef idx="3">
+            <a:schemeClr val="accent1"/>
+          </a:fillRef>
+          <a:effectRef idx="2">
+            <a:schemeClr val="accent1"/>
+          </a:effectRef>
+          <a:fontRef idx="minor">
+            <a:schemeClr val="lt1"/>
+          </a:fontRef>
+        </p:style>
+        <p:txBody>
+          <a:bodyPr rtlCol="0" anchor="ctr"/>
+          <a:lstStyle/>
+          <a:p>
+            <a:pPr algn="ctr"/>
+          </a:p>
+        </p:txBody>
+      </p:sp>
+      <p:sp>
+        <p:nvSpPr>
+          <p:cNvPr id="6" name="TextBox 5"/>
+          <p:cNvSpPr txBox="1"/>
+          <p:nvPr/>
+        </p:nvSpPr>
+        <p:spPr>
+          <a:xfrm>
+            <a:off x="502920" y="1691640"/>
+            <a:ext cx="6217920" cy="4114800"/>
+          </a:xfrm>
+          <a:prstGeom prst="rect">
+            <a:avLst/>
+          </a:prstGeom>
+          <a:noFill/>
+        </p:spPr>
+        <p:txBody>
+          <a:bodyPr wrap="square">
+            <a:spAutoFit/>
+          </a:bodyPr>
+          <a:lstStyle/>
           <a:p>
             <a:pPr>
-              <a:defRPr sz="2000">
+              <a:spcAft>
+                <a:spcPts val="800"/>
+              </a:spcAft>
+              <a:defRPr sz="1600">
+                <a:solidFill>
+                  <a:srgbClr val="E6EBF5"/>
+                </a:solidFill>
+              </a:defRPr>
+            </a:pPr>
+            <a:r>
+              <a:t>Online simulation &amp; scenarios tied to live plant data</a:t>
+            </a:r>
+          </a:p>
+          <a:p>
+            <a:pPr>
+              <a:spcAft>
+                <a:spcPts val="800"/>
+              </a:spcAft>
+              <a:defRPr sz="1600">
+                <a:solidFill>
+                  <a:srgbClr val="E6EBF5"/>
+                </a:solidFill>
+              </a:defRPr>
+            </a:pPr>
+            <a:r>
+              <a:t>Validates yield vectors before they enter PWO</a:t>
+            </a:r>
+          </a:p>
+          <a:p>
+            <a:pPr>
+              <a:spcAft>
+                <a:spcPts val="800"/>
+              </a:spcAft>
+              <a:defRPr sz="1600">
+                <a:solidFill>
+                  <a:srgbClr val="E6EBF5"/>
+                </a:solidFill>
+              </a:defRPr>
+            </a:pPr>
+            <a:r>
+              <a:t>Supports APC lifecycle (what-if, debottleneck, training)</a:t>
+            </a:r>
+          </a:p>
+          <a:p>
+            <a:pPr>
+              <a:spcAft>
+                <a:spcPts val="800"/>
+              </a:spcAft>
+              <a:defRPr sz="1600">
+                <a:solidFill>
+                  <a:srgbClr val="E6EBF5"/>
+                </a:solidFill>
+              </a:defRPr>
+            </a:pPr>
+            <a:r>
+              <a:t>Closes the loop: LP assumptions ↔ actual unit capability</a:t>
+            </a:r>
+          </a:p>
+        </p:txBody>
+      </p:sp>
+      <p:sp>
+        <p:nvSpPr>
+          <p:cNvPr id="7" name="Rounded Rectangle 6"/>
+          <p:cNvSpPr/>
+          <p:nvPr/>
+        </p:nvSpPr>
+        <p:spPr>
+          <a:xfrm>
+            <a:off x="6858000" y="2103120"/>
+            <a:ext cx="4754880" cy="2560320"/>
+          </a:xfrm>
+          <a:prstGeom prst="roundRect">
+            <a:avLst/>
+          </a:prstGeom>
+          <a:solidFill>
+            <a:srgbClr val="143246"/>
+          </a:solidFill>
+          <a:ln w="19050">
+            <a:solidFill>
+              <a:srgbClr val="00C896"/>
+            </a:solidFill>
+          </a:ln>
+        </p:spPr>
+        <p:style>
+          <a:lnRef idx="1">
+            <a:schemeClr val="accent1"/>
+          </a:lnRef>
+          <a:fillRef idx="3">
+            <a:schemeClr val="accent1"/>
+          </a:fillRef>
+          <a:effectRef idx="2">
+            <a:schemeClr val="accent1"/>
+          </a:effectRef>
+          <a:fontRef idx="minor">
+            <a:schemeClr val="lt1"/>
+          </a:fontRef>
+        </p:style>
+        <p:txBody>
+          <a:bodyPr rtlCol="0" anchor="ctr" lIns="137160" tIns="109728"/>
+          <a:lstStyle/>
+          <a:p>
+            <a:pPr algn="ctr">
+              <a:defRPr sz="1400" b="1">
+                <a:solidFill>
+                  <a:srgbClr val="00C896"/>
+                </a:solidFill>
+              </a:defRPr>
+            </a:pPr>
+            <a:r>
+              <a:t>HPDT + PWO</a:t>
+            </a:r>
+          </a:p>
+          <a:p>
+            <a:pPr>
+              <a:spcBef>
+                <a:spcPts val="600"/>
+              </a:spcBef>
+              <a:defRPr sz="1200">
+                <a:solidFill>
+                  <a:srgbClr val="1E293B"/>
+                </a:solidFill>
+              </a:defRPr>
+            </a:pPr>
+            <a:r>
+              <a:t>Digital twin = trusted model estate</a:t>
+            </a:r>
+            <a:br/>
+            <a:r>
+              <a:t>PWO = continuous profit execution</a:t>
+            </a:r>
+            <a:br/>
+            <a:r>
+              <a:t>Together: replace ad-hoc RTO rebuilds every turnaround.</a:t>
+            </a:r>
+          </a:p>
+        </p:txBody>
+      </p:sp>
+    </p:spTree>
+  </p:cSld>
+  <p:clrMapOvr>
+    <a:masterClrMapping/>
+  </p:clrMapOvr>
+</p:sld>
+</file>
+
+<file path=ppt/slides/slide12.xml><?xml version="1.0" encoding="utf-8"?>
+<p:sld xmlns:a="http://schemas.openxmlformats.org/drawingml/2006/main" xmlns:p="http://schemas.openxmlformats.org/presentationml/2006/main" xmlns:r="http://schemas.openxmlformats.org/officeDocument/2006/relationships">
+  <p:cSld>
+    <p:spTree>
+      <p:nvGrpSpPr>
+        <p:cNvPr id="1" name=""/>
+        <p:cNvGrpSpPr/>
+        <p:nvPr/>
+      </p:nvGrpSpPr>
+      <p:grpSpPr/>
+      <p:sp>
+        <p:nvSpPr>
+          <p:cNvPr id="2" name="Rectangle 1"/>
+          <p:cNvSpPr/>
+          <p:nvPr/>
+        </p:nvSpPr>
+        <p:spPr>
+          <a:xfrm>
+            <a:off x="0" y="0"/>
+            <a:ext cx="12191695" cy="6858000"/>
+          </a:xfrm>
+          <a:prstGeom prst="rect">
+            <a:avLst/>
+          </a:prstGeom>
+          <a:solidFill>
+            <a:srgbClr val="F8FAFC"/>
+          </a:solidFill>
+          <a:ln>
+            <a:noFill/>
+          </a:ln>
+        </p:spPr>
+        <p:style>
+          <a:lnRef idx="1">
+            <a:schemeClr val="accent1"/>
+          </a:lnRef>
+          <a:fillRef idx="3">
+            <a:schemeClr val="accent1"/>
+          </a:fillRef>
+          <a:effectRef idx="2">
+            <a:schemeClr val="accent1"/>
+          </a:effectRef>
+          <a:fontRef idx="minor">
+            <a:schemeClr val="lt1"/>
+          </a:fontRef>
+        </p:style>
+        <p:txBody>
+          <a:bodyPr rtlCol="0" anchor="ctr"/>
+          <a:lstStyle/>
+          <a:p>
+            <a:pPr algn="ctr"/>
+          </a:p>
+        </p:txBody>
+      </p:sp>
+      <p:sp>
+        <p:nvSpPr>
+          <p:cNvPr id="3" name="TextBox 2"/>
+          <p:cNvSpPr txBox="1"/>
+          <p:nvPr/>
+        </p:nvSpPr>
+        <p:spPr>
+          <a:xfrm>
+            <a:off x="502920" y="320040"/>
+            <a:ext cx="10972800" cy="822960"/>
+          </a:xfrm>
+          <a:prstGeom prst="rect">
+            <a:avLst/>
+          </a:prstGeom>
+          <a:noFill/>
+        </p:spPr>
+        <p:txBody>
+          <a:bodyPr wrap="square">
+            <a:spAutoFit/>
+          </a:bodyPr>
+          <a:lstStyle/>
+          <a:p>
+            <a:pPr algn="l">
+              <a:defRPr sz="3200" b="1">
+                <a:solidFill>
+                  <a:srgbClr val="003DA5"/>
+                </a:solidFill>
+              </a:defRPr>
+            </a:pPr>
+            <a:r>
+              <a:t>Must-have in the Honeywell Template for IOCL</a:t>
+            </a:r>
+          </a:p>
+        </p:txBody>
+      </p:sp>
+      <p:sp>
+        <p:nvSpPr>
+          <p:cNvPr id="4" name="TextBox 3"/>
+          <p:cNvSpPr txBox="1"/>
+          <p:nvPr/>
+        </p:nvSpPr>
+        <p:spPr>
+          <a:xfrm>
+            <a:off x="502920" y="960120"/>
+            <a:ext cx="10972800" cy="457200"/>
+          </a:xfrm>
+          <a:prstGeom prst="rect">
+            <a:avLst/>
+          </a:prstGeom>
+          <a:noFill/>
+        </p:spPr>
+        <p:txBody>
+          <a:bodyPr wrap="square">
+            <a:spAutoFit/>
+          </a:bodyPr>
+          <a:lstStyle/>
+          <a:p>
+            <a:pPr algn="l">
+              <a:defRPr sz="1400" b="0">
+                <a:solidFill>
+                  <a:srgbClr val="64748B"/>
+                </a:solidFill>
+              </a:defRPr>
+            </a:pPr>
+            <a:r>
+              <a:t>Standardize the full stack — not à la carte APC projects</a:t>
+            </a:r>
+          </a:p>
+        </p:txBody>
+      </p:sp>
+      <p:sp>
+        <p:nvSpPr>
+          <p:cNvPr id="5" name="Rectangle 4"/>
+          <p:cNvSpPr/>
+          <p:nvPr/>
+        </p:nvSpPr>
+        <p:spPr>
+          <a:xfrm>
+            <a:off x="502920" y="1325880"/>
+            <a:ext cx="1097280" cy="54864"/>
+          </a:xfrm>
+          <a:prstGeom prst="rect">
+            <a:avLst/>
+          </a:prstGeom>
+          <a:solidFill>
+            <a:srgbClr val="F47920"/>
+          </a:solidFill>
+          <a:ln>
+            <a:noFill/>
+          </a:ln>
+        </p:spPr>
+        <p:style>
+          <a:lnRef idx="1">
+            <a:schemeClr val="accent1"/>
+          </a:lnRef>
+          <a:fillRef idx="3">
+            <a:schemeClr val="accent1"/>
+          </a:fillRef>
+          <a:effectRef idx="2">
+            <a:schemeClr val="accent1"/>
+          </a:effectRef>
+          <a:fontRef idx="minor">
+            <a:schemeClr val="lt1"/>
+          </a:fontRef>
+        </p:style>
+        <p:txBody>
+          <a:bodyPr rtlCol="0" anchor="ctr"/>
+          <a:lstStyle/>
+          <a:p>
+            <a:pPr algn="ctr"/>
+          </a:p>
+        </p:txBody>
+      </p:sp>
+      <p:sp>
+        <p:nvSpPr>
+          <p:cNvPr id="6" name="Rounded Rectangle 5"/>
+          <p:cNvSpPr/>
+          <p:nvPr/>
+        </p:nvSpPr>
+        <p:spPr>
+          <a:xfrm>
+            <a:off x="457200" y="1600200"/>
+            <a:ext cx="1691640" cy="640080"/>
+          </a:xfrm>
+          <a:prstGeom prst="roundRect">
+            <a:avLst/>
+          </a:prstGeom>
+          <a:solidFill>
+            <a:srgbClr val="003DA5"/>
+          </a:solidFill>
+          <a:ln>
+            <a:solidFill>
+              <a:srgbClr val="C8C8D2"/>
+            </a:solidFill>
+          </a:ln>
+        </p:spPr>
+        <p:style>
+          <a:lnRef idx="1">
+            <a:schemeClr val="accent1"/>
+          </a:lnRef>
+          <a:fillRef idx="3">
+            <a:schemeClr val="accent1"/>
+          </a:fillRef>
+          <a:effectRef idx="2">
+            <a:schemeClr val="accent1"/>
+          </a:effectRef>
+          <a:fontRef idx="minor">
+            <a:schemeClr val="lt1"/>
+          </a:fontRef>
+        </p:style>
+        <p:txBody>
+          <a:bodyPr rtlCol="0" anchor="ctr"/>
+          <a:lstStyle/>
+          <a:p>
+            <a:pPr algn="ctr">
+              <a:defRPr sz="1000" b="1">
+                <a:solidFill>
+                  <a:srgbClr val="FFFFFF"/>
+                </a:solidFill>
+              </a:defRPr>
+            </a:pPr>
+            <a:r>
+              <a:t>Experion/DCS</a:t>
+            </a:r>
+          </a:p>
+        </p:txBody>
+      </p:sp>
+      <p:sp>
+        <p:nvSpPr>
+          <p:cNvPr id="7" name="Rounded Rectangle 6"/>
+          <p:cNvSpPr/>
+          <p:nvPr/>
+        </p:nvSpPr>
+        <p:spPr>
+          <a:xfrm>
+            <a:off x="2331720" y="1600200"/>
+            <a:ext cx="1691640" cy="640080"/>
+          </a:xfrm>
+          <a:prstGeom prst="roundRect">
+            <a:avLst/>
+          </a:prstGeom>
+          <a:solidFill>
+            <a:srgbClr val="003DA5"/>
+          </a:solidFill>
+          <a:ln>
+            <a:solidFill>
+              <a:srgbClr val="C8C8D2"/>
+            </a:solidFill>
+          </a:ln>
+        </p:spPr>
+        <p:style>
+          <a:lnRef idx="1">
+            <a:schemeClr val="accent1"/>
+          </a:lnRef>
+          <a:fillRef idx="3">
+            <a:schemeClr val="accent1"/>
+          </a:fillRef>
+          <a:effectRef idx="2">
+            <a:schemeClr val="accent1"/>
+          </a:effectRef>
+          <a:fontRef idx="minor">
+            <a:schemeClr val="lt1"/>
+          </a:fontRef>
+        </p:style>
+        <p:txBody>
+          <a:bodyPr rtlCol="0" anchor="ctr"/>
+          <a:lstStyle/>
+          <a:p>
+            <a:pPr algn="ctr">
+              <a:defRPr sz="1000" b="1">
+                <a:solidFill>
+                  <a:srgbClr val="FFFFFF"/>
+                </a:solidFill>
+              </a:defRPr>
+            </a:pPr>
+            <a:r>
+              <a:t>Forge APC</a:t>
+            </a:r>
+          </a:p>
+        </p:txBody>
+      </p:sp>
+      <p:sp>
+        <p:nvSpPr>
+          <p:cNvPr id="8" name="Rounded Rectangle 7"/>
+          <p:cNvSpPr/>
+          <p:nvPr/>
+        </p:nvSpPr>
+        <p:spPr>
+          <a:xfrm>
+            <a:off x="4206240" y="1600200"/>
+            <a:ext cx="1691640" cy="640080"/>
+          </a:xfrm>
+          <a:prstGeom prst="roundRect">
+            <a:avLst/>
+          </a:prstGeom>
+          <a:solidFill>
+            <a:srgbClr val="E60028"/>
+          </a:solidFill>
+          <a:ln>
+            <a:solidFill>
+              <a:srgbClr val="C8C8D2"/>
+            </a:solidFill>
+          </a:ln>
+        </p:spPr>
+        <p:style>
+          <a:lnRef idx="1">
+            <a:schemeClr val="accent1"/>
+          </a:lnRef>
+          <a:fillRef idx="3">
+            <a:schemeClr val="accent1"/>
+          </a:fillRef>
+          <a:effectRef idx="2">
+            <a:schemeClr val="accent1"/>
+          </a:effectRef>
+          <a:fontRef idx="minor">
+            <a:schemeClr val="lt1"/>
+          </a:fontRef>
+        </p:style>
+        <p:txBody>
+          <a:bodyPr rtlCol="0" anchor="ctr"/>
+          <a:lstStyle/>
+          <a:p>
+            <a:pPr algn="ctr">
+              <a:defRPr sz="1000" b="1">
+                <a:solidFill>
+                  <a:srgbClr val="FFFFFF"/>
+                </a:solidFill>
+              </a:defRPr>
+            </a:pPr>
+            <a:r>
+              <a:t>PWO</a:t>
+            </a:r>
+          </a:p>
+        </p:txBody>
+      </p:sp>
+      <p:sp>
+        <p:nvSpPr>
+          <p:cNvPr id="9" name="Rounded Rectangle 8"/>
+          <p:cNvSpPr/>
+          <p:nvPr/>
+        </p:nvSpPr>
+        <p:spPr>
+          <a:xfrm>
+            <a:off x="6080759" y="1600200"/>
+            <a:ext cx="1691640" cy="640080"/>
+          </a:xfrm>
+          <a:prstGeom prst="roundRect">
+            <a:avLst/>
+          </a:prstGeom>
+          <a:solidFill>
+            <a:srgbClr val="00C896"/>
+          </a:solidFill>
+          <a:ln>
+            <a:solidFill>
+              <a:srgbClr val="C8C8D2"/>
+            </a:solidFill>
+          </a:ln>
+        </p:spPr>
+        <p:style>
+          <a:lnRef idx="1">
+            <a:schemeClr val="accent1"/>
+          </a:lnRef>
+          <a:fillRef idx="3">
+            <a:schemeClr val="accent1"/>
+          </a:fillRef>
+          <a:effectRef idx="2">
+            <a:schemeClr val="accent1"/>
+          </a:effectRef>
+          <a:fontRef idx="minor">
+            <a:schemeClr val="lt1"/>
+          </a:fontRef>
+        </p:style>
+        <p:txBody>
+          <a:bodyPr rtlCol="0" anchor="ctr"/>
+          <a:lstStyle/>
+          <a:p>
+            <a:pPr algn="ctr">
+              <a:defRPr sz="1000" b="1">
+                <a:solidFill>
+                  <a:srgbClr val="FFFFFF"/>
+                </a:solidFill>
+              </a:defRPr>
+            </a:pPr>
+            <a:r>
+              <a:t>HPDT</a:t>
+            </a:r>
+          </a:p>
+        </p:txBody>
+      </p:sp>
+      <p:sp>
+        <p:nvSpPr>
+          <p:cNvPr id="10" name="Rounded Rectangle 9"/>
+          <p:cNvSpPr/>
+          <p:nvPr/>
+        </p:nvSpPr>
+        <p:spPr>
+          <a:xfrm>
+            <a:off x="7955279" y="1600200"/>
+            <a:ext cx="1691640" cy="640080"/>
+          </a:xfrm>
+          <a:prstGeom prst="roundRect">
+            <a:avLst/>
+          </a:prstGeom>
+          <a:solidFill>
+            <a:srgbClr val="003DA5"/>
+          </a:solidFill>
+          <a:ln>
+            <a:solidFill>
+              <a:srgbClr val="C8C8D2"/>
+            </a:solidFill>
+          </a:ln>
+        </p:spPr>
+        <p:style>
+          <a:lnRef idx="1">
+            <a:schemeClr val="accent1"/>
+          </a:lnRef>
+          <a:fillRef idx="3">
+            <a:schemeClr val="accent1"/>
+          </a:fillRef>
+          <a:effectRef idx="2">
+            <a:schemeClr val="accent1"/>
+          </a:effectRef>
+          <a:fontRef idx="minor">
+            <a:schemeClr val="lt1"/>
+          </a:fontRef>
+        </p:style>
+        <p:txBody>
+          <a:bodyPr rtlCol="0" anchor="ctr"/>
+          <a:lstStyle/>
+          <a:p>
+            <a:pPr algn="ctr">
+              <a:defRPr sz="1000" b="1">
+                <a:solidFill>
+                  <a:srgbClr val="FFFFFF"/>
+                </a:solidFill>
+              </a:defRPr>
+            </a:pPr>
+            <a:r>
+              <a:t>Blend Opt</a:t>
+            </a:r>
+          </a:p>
+        </p:txBody>
+      </p:sp>
+      <p:sp>
+        <p:nvSpPr>
+          <p:cNvPr id="11" name="Rounded Rectangle 10"/>
+          <p:cNvSpPr/>
+          <p:nvPr/>
+        </p:nvSpPr>
+        <p:spPr>
+          <a:xfrm>
+            <a:off x="9829800" y="1600200"/>
+            <a:ext cx="1691640" cy="640080"/>
+          </a:xfrm>
+          <a:prstGeom prst="roundRect">
+            <a:avLst/>
+          </a:prstGeom>
+          <a:solidFill>
+            <a:srgbClr val="003DA5"/>
+          </a:solidFill>
+          <a:ln>
+            <a:solidFill>
+              <a:srgbClr val="C8C8D2"/>
+            </a:solidFill>
+          </a:ln>
+        </p:spPr>
+        <p:style>
+          <a:lnRef idx="1">
+            <a:schemeClr val="accent1"/>
+          </a:lnRef>
+          <a:fillRef idx="3">
+            <a:schemeClr val="accent1"/>
+          </a:fillRef>
+          <a:effectRef idx="2">
+            <a:schemeClr val="accent1"/>
+          </a:effectRef>
+          <a:fontRef idx="minor">
+            <a:schemeClr val="lt1"/>
+          </a:fontRef>
+        </p:style>
+        <p:txBody>
+          <a:bodyPr rtlCol="0" anchor="ctr"/>
+          <a:lstStyle/>
+          <a:p>
+            <a:pPr algn="ctr">
+              <a:defRPr sz="1000" b="1">
+                <a:solidFill>
+                  <a:srgbClr val="FFFFFF"/>
+                </a:solidFill>
+              </a:defRPr>
+            </a:pPr>
+            <a:r>
+              <a:t>CPA-U</a:t>
+            </a:r>
+          </a:p>
+        </p:txBody>
+      </p:sp>
+      <p:graphicFrame>
+        <p:nvGraphicFramePr>
+          <p:cNvPr id="12" name="Table 11"/>
+          <p:cNvGraphicFramePr>
+            <a:graphicFrameLocks noGrp="1"/>
+          </p:cNvGraphicFramePr>
+          <p:nvPr/>
+        </p:nvGraphicFramePr>
+        <p:xfrm>
+          <a:off x="457200" y="2468880"/>
+          <a:ext cx="11247120" cy="1600200"/>
+        </p:xfrm>
+        <a:graphic>
+          <a:graphicData uri="http://schemas.openxmlformats.org/drawingml/2006/table">
+            <a:tbl>
+              <a:tblPr firstRow="1" bandRow="1">
+                <a:tableStyleId>{5C22544A-7EE6-4342-B048-85BDC9FD1C3A}</a:tableStyleId>
+              </a:tblPr>
+              <a:tblGrid>
+                <a:gridCol w="2560320"/>
+                <a:gridCol w="4114800"/>
+                <a:gridCol w="4572000"/>
+              </a:tblGrid>
+              <a:tr h="320040">
+                <a:tc>
+                  <a:txBody>
+                    <a:bodyPr/>
+                    <a:lstStyle/>
+                    <a:p>
+                      <a:pPr>
+                        <a:defRPr sz="1200" b="1">
+                          <a:solidFill>
+                            <a:srgbClr val="FFFFFF"/>
+                          </a:solidFill>
+                        </a:defRPr>
+                      </a:pPr>
+                      <a:r>
+                        <a:t>Component</a:t>
+                      </a:r>
+                    </a:p>
+                  </a:txBody>
+                  <a:tcPr>
+                    <a:solidFill>
+                      <a:srgbClr val="003DA5"/>
+                    </a:solidFill>
+                  </a:tcPr>
+                </a:tc>
+                <a:tc>
+                  <a:txBody>
+                    <a:bodyPr/>
+                    <a:lstStyle/>
+                    <a:p>
+                      <a:pPr>
+                        <a:defRPr sz="1200" b="1">
+                          <a:solidFill>
+                            <a:srgbClr val="FFFFFF"/>
+                          </a:solidFill>
+                        </a:defRPr>
+                      </a:pPr>
+                      <a:r>
+                        <a:t>Role</a:t>
+                      </a:r>
+                    </a:p>
+                  </a:txBody>
+                  <a:tcPr>
+                    <a:solidFill>
+                      <a:srgbClr val="003DA5"/>
+                    </a:solidFill>
+                  </a:tcPr>
+                </a:tc>
+                <a:tc>
+                  <a:txBody>
+                    <a:bodyPr/>
+                    <a:lstStyle/>
+                    <a:p>
+                      <a:pPr>
+                        <a:defRPr sz="1200" b="1">
+                          <a:solidFill>
+                            <a:srgbClr val="FFFFFF"/>
+                          </a:solidFill>
+                        </a:defRPr>
+                      </a:pPr>
+                      <a:r>
+                        <a:t>Without it</a:t>
+                      </a:r>
+                    </a:p>
+                  </a:txBody>
+                  <a:tcPr>
+                    <a:solidFill>
+                      <a:srgbClr val="003DA5"/>
+                    </a:solidFill>
+                  </a:tcPr>
+                </a:tc>
+              </a:tr>
+              <a:tr h="320040">
+                <a:tc>
+                  <a:txBody>
+                    <a:bodyPr/>
+                    <a:lstStyle/>
+                    <a:p>
+                      <a:pPr>
+                        <a:defRPr sz="1100" b="0">
+                          <a:solidFill>
+                            <a:srgbClr val="1E293B"/>
+                          </a:solidFill>
+                        </a:defRPr>
+                      </a:pPr>
+                      <a:r>
+                        <a:t>Unit APC (Forge)</a:t>
+                      </a:r>
+                    </a:p>
+                  </a:txBody>
+                  <a:tcPr/>
+                </a:tc>
+                <a:tc>
+                  <a:txBody>
+                    <a:bodyPr/>
+                    <a:lstStyle/>
+                    <a:p>
+                      <a:pPr>
+                        <a:defRPr sz="1100" b="0">
+                          <a:solidFill>
+                            <a:srgbClr val="1E293B"/>
+                          </a:solidFill>
+                        </a:defRPr>
+                      </a:pPr>
+                      <a:r>
+                        <a:t>Constraint control &amp; dynamic models</a:t>
+                      </a:r>
+                    </a:p>
+                  </a:txBody>
+                  <a:tcPr/>
+                </a:tc>
+                <a:tc>
+                  <a:txBody>
+                    <a:bodyPr/>
+                    <a:lstStyle/>
+                    <a:p>
+                      <a:pPr>
+                        <a:defRPr sz="1100" b="0">
+                          <a:solidFill>
+                            <a:srgbClr val="1E293B"/>
+                          </a:solidFill>
+                        </a:defRPr>
+                      </a:pPr>
+                      <a:r>
+                        <a:t>PWO has nothing to coordinate</a:t>
+                      </a:r>
+                    </a:p>
+                  </a:txBody>
+                  <a:tcPr/>
+                </a:tc>
+              </a:tr>
+              <a:tr h="320040">
+                <a:tc>
+                  <a:txBody>
+                    <a:bodyPr/>
+                    <a:lstStyle/>
+                    <a:p>
+                      <a:pPr>
+                        <a:defRPr sz="1100" b="0">
+                          <a:solidFill>
+                            <a:srgbClr val="1E293B"/>
+                          </a:solidFill>
+                        </a:defRPr>
+                      </a:pPr>
+                      <a:r>
+                        <a:t>PWO</a:t>
+                      </a:r>
+                    </a:p>
+                  </a:txBody>
+                  <a:tcPr/>
+                </a:tc>
+                <a:tc>
+                  <a:txBody>
+                    <a:bodyPr/>
+                    <a:lstStyle/>
+                    <a:p>
+                      <a:pPr>
+                        <a:defRPr sz="1100" b="0">
+                          <a:solidFill>
+                            <a:srgbClr val="1E293B"/>
+                          </a:solidFill>
+                        </a:defRPr>
+                      </a:pPr>
+                      <a:r>
+                        <a:t>Site dynamic RTO</a:t>
+                      </a:r>
+                    </a:p>
+                  </a:txBody>
+                  <a:tcPr/>
+                </a:tc>
+                <a:tc>
+                  <a:txBody>
+                    <a:bodyPr/>
+                    <a:lstStyle/>
+                    <a:p>
+                      <a:pPr>
+                        <a:defRPr sz="1100" b="0">
+                          <a:solidFill>
+                            <a:srgbClr val="1E293B"/>
+                          </a:solidFill>
+                        </a:defRPr>
+                      </a:pPr>
+                      <a:r>
+                        <a:t>Local RTO silos return</a:t>
+                      </a:r>
+                    </a:p>
+                  </a:txBody>
+                  <a:tcPr/>
+                </a:tc>
+              </a:tr>
+              <a:tr h="320040">
+                <a:tc>
+                  <a:txBody>
+                    <a:bodyPr/>
+                    <a:lstStyle/>
+                    <a:p>
+                      <a:pPr>
+                        <a:defRPr sz="1100" b="0">
+                          <a:solidFill>
+                            <a:srgbClr val="1E293B"/>
+                          </a:solidFill>
+                        </a:defRPr>
+                      </a:pPr>
+                      <a:r>
+                        <a:t>HPDT</a:t>
+                      </a:r>
+                    </a:p>
+                  </a:txBody>
+                  <a:tcPr/>
+                </a:tc>
+                <a:tc>
+                  <a:txBody>
+                    <a:bodyPr/>
+                    <a:lstStyle/>
+                    <a:p>
+                      <a:pPr>
+                        <a:defRPr sz="1100" b="0">
+                          <a:solidFill>
+                            <a:srgbClr val="1E293B"/>
+                          </a:solidFill>
+                        </a:defRPr>
+                      </a:pPr>
+                      <a:r>
+                        <a:t>Model governance &amp; scenarios</a:t>
+                      </a:r>
+                    </a:p>
+                  </a:txBody>
+                  <a:tcPr/>
+                </a:tc>
+                <a:tc>
+                  <a:txBody>
+                    <a:bodyPr/>
+                    <a:lstStyle/>
+                    <a:p>
+                      <a:pPr>
+                        <a:defRPr sz="1100" b="0">
+                          <a:solidFill>
+                            <a:srgbClr val="1E293B"/>
+                          </a:solidFill>
+                        </a:defRPr>
+                      </a:pPr>
+                      <a:r>
+                        <a:t>Stale yields, failed revamps</a:t>
+                      </a:r>
+                    </a:p>
+                  </a:txBody>
+                  <a:tcPr/>
+                </a:tc>
+              </a:tr>
+              <a:tr h="320040">
+                <a:tc>
+                  <a:txBody>
+                    <a:bodyPr/>
+                    <a:lstStyle/>
+                    <a:p>
+                      <a:pPr>
+                        <a:defRPr sz="1100" b="0">
+                          <a:solidFill>
+                            <a:srgbClr val="1E293B"/>
+                          </a:solidFill>
+                        </a:defRPr>
+                      </a:pPr>
+                      <a:r>
+                        <a:t>Blend Optimizer</a:t>
+                      </a:r>
+                    </a:p>
+                  </a:txBody>
+                  <a:tcPr/>
+                </a:tc>
+                <a:tc>
+                  <a:txBody>
+                    <a:bodyPr/>
+                    <a:lstStyle/>
+                    <a:p>
+                      <a:pPr>
+                        <a:defRPr sz="1100" b="0">
+                          <a:solidFill>
+                            <a:srgbClr val="1E293B"/>
+                          </a:solidFill>
+                        </a:defRPr>
+                      </a:pPr>
+                      <a:r>
+                        <a:t>Gate-to-gate quality &amp; inventory</a:t>
+                      </a:r>
+                    </a:p>
+                  </a:txBody>
+                  <a:tcPr/>
+                </a:tc>
+                <a:tc>
+                  <a:txBody>
+                    <a:bodyPr/>
+                    <a:lstStyle/>
+                    <a:p>
+                      <a:pPr>
+                        <a:defRPr sz="1100" b="0">
+                          <a:solidFill>
+                            <a:srgbClr val="1E293B"/>
+                          </a:solidFill>
+                        </a:defRPr>
+                      </a:pPr>
+                      <a:r>
+                        <a:t>Loss at rundown</a:t>
+                      </a:r>
+                    </a:p>
+                  </a:txBody>
+                  <a:tcPr/>
+                </a:tc>
+              </a:tr>
+            </a:tbl>
+          </a:graphicData>
+        </a:graphic>
+      </p:graphicFrame>
+    </p:spTree>
+  </p:cSld>
+  <p:clrMapOvr>
+    <a:masterClrMapping/>
+  </p:clrMapOvr>
+</p:sld>
+</file>
+
+<file path=ppt/slides/slide13.xml><?xml version="1.0" encoding="utf-8"?>
+<p:sld xmlns:a="http://schemas.openxmlformats.org/drawingml/2006/main" xmlns:p="http://schemas.openxmlformats.org/presentationml/2006/main" xmlns:r="http://schemas.openxmlformats.org/officeDocument/2006/relationships">
+  <p:cSld>
+    <p:spTree>
+      <p:nvGrpSpPr>
+        <p:cNvPr id="1" name=""/>
+        <p:cNvGrpSpPr/>
+        <p:nvPr/>
+      </p:nvGrpSpPr>
+      <p:grpSpPr/>
+      <p:sp>
+        <p:nvSpPr>
+          <p:cNvPr id="2" name="Rectangle 1"/>
+          <p:cNvSpPr/>
+          <p:nvPr/>
+        </p:nvSpPr>
+        <p:spPr>
+          <a:xfrm>
+            <a:off x="0" y="0"/>
+            <a:ext cx="12191695" cy="6858000"/>
+          </a:xfrm>
+          <a:prstGeom prst="rect">
+            <a:avLst/>
+          </a:prstGeom>
+          <a:solidFill>
+            <a:srgbClr val="F8FAFC"/>
+          </a:solidFill>
+          <a:ln>
+            <a:noFill/>
+          </a:ln>
+        </p:spPr>
+        <p:style>
+          <a:lnRef idx="1">
+            <a:schemeClr val="accent1"/>
+          </a:lnRef>
+          <a:fillRef idx="3">
+            <a:schemeClr val="accent1"/>
+          </a:fillRef>
+          <a:effectRef idx="2">
+            <a:schemeClr val="accent1"/>
+          </a:effectRef>
+          <a:fontRef idx="minor">
+            <a:schemeClr val="lt1"/>
+          </a:fontRef>
+        </p:style>
+        <p:txBody>
+          <a:bodyPr rtlCol="0" anchor="ctr"/>
+          <a:lstStyle/>
+          <a:p>
+            <a:pPr algn="ctr"/>
+          </a:p>
+        </p:txBody>
+      </p:sp>
+      <p:sp>
+        <p:nvSpPr>
+          <p:cNvPr id="3" name="TextBox 2"/>
+          <p:cNvSpPr txBox="1"/>
+          <p:nvPr/>
+        </p:nvSpPr>
+        <p:spPr>
+          <a:xfrm>
+            <a:off x="502920" y="320040"/>
+            <a:ext cx="10972800" cy="822960"/>
+          </a:xfrm>
+          <a:prstGeom prst="rect">
+            <a:avLst/>
+          </a:prstGeom>
+          <a:noFill/>
+        </p:spPr>
+        <p:txBody>
+          <a:bodyPr wrap="square">
+            <a:spAutoFit/>
+          </a:bodyPr>
+          <a:lstStyle/>
+          <a:p>
+            <a:pPr algn="l">
+              <a:defRPr sz="3200" b="1">
+                <a:solidFill>
+                  <a:srgbClr val="003DA5"/>
+                </a:solidFill>
+              </a:defRPr>
+            </a:pPr>
+            <a:r>
+              <a:t>Proven in refining — relevant to IOCL complexity</a:t>
+            </a:r>
+          </a:p>
+        </p:txBody>
+      </p:sp>
+      <p:sp>
+        <p:nvSpPr>
+          <p:cNvPr id="4" name="Rectangle 3"/>
+          <p:cNvSpPr/>
+          <p:nvPr/>
+        </p:nvSpPr>
+        <p:spPr>
+          <a:xfrm>
+            <a:off x="502920" y="1051560"/>
+            <a:ext cx="1097280" cy="54864"/>
+          </a:xfrm>
+          <a:prstGeom prst="rect">
+            <a:avLst/>
+          </a:prstGeom>
+          <a:solidFill>
+            <a:srgbClr val="F47920"/>
+          </a:solidFill>
+          <a:ln>
+            <a:noFill/>
+          </a:ln>
+        </p:spPr>
+        <p:style>
+          <a:lnRef idx="1">
+            <a:schemeClr val="accent1"/>
+          </a:lnRef>
+          <a:fillRef idx="3">
+            <a:schemeClr val="accent1"/>
+          </a:fillRef>
+          <a:effectRef idx="2">
+            <a:schemeClr val="accent1"/>
+          </a:effectRef>
+          <a:fontRef idx="minor">
+            <a:schemeClr val="lt1"/>
+          </a:fontRef>
+        </p:style>
+        <p:txBody>
+          <a:bodyPr rtlCol="0" anchor="ctr"/>
+          <a:lstStyle/>
+          <a:p>
+            <a:pPr algn="ctr"/>
+          </a:p>
+        </p:txBody>
+      </p:sp>
+      <p:sp>
+        <p:nvSpPr>
+          <p:cNvPr id="5" name="Rounded Rectangle 4"/>
+          <p:cNvSpPr/>
+          <p:nvPr/>
+        </p:nvSpPr>
+        <p:spPr>
+          <a:xfrm>
+            <a:off x="502920" y="1691640"/>
+            <a:ext cx="5486400" cy="1828800"/>
+          </a:xfrm>
+          <a:prstGeom prst="roundRect">
+            <a:avLst/>
+          </a:prstGeom>
+          <a:solidFill>
+            <a:srgbClr val="F5F8FF"/>
+          </a:solidFill>
+          <a:ln w="19050">
+            <a:solidFill>
+              <a:srgbClr val="003DA5"/>
+            </a:solidFill>
+          </a:ln>
+        </p:spPr>
+        <p:style>
+          <a:lnRef idx="1">
+            <a:schemeClr val="accent1"/>
+          </a:lnRef>
+          <a:fillRef idx="3">
+            <a:schemeClr val="accent1"/>
+          </a:fillRef>
+          <a:effectRef idx="2">
+            <a:schemeClr val="accent1"/>
+          </a:effectRef>
+          <a:fontRef idx="minor">
+            <a:schemeClr val="lt1"/>
+          </a:fontRef>
+        </p:style>
+        <p:txBody>
+          <a:bodyPr rtlCol="0" anchor="ctr" lIns="137160" tIns="109728"/>
+          <a:lstStyle/>
+          <a:p>
+            <a:pPr algn="ctr">
+              <a:defRPr sz="1400" b="1">
+                <a:solidFill>
+                  <a:srgbClr val="003DA5"/>
+                </a:solidFill>
+              </a:defRPr>
+            </a:pPr>
+            <a:r>
+              <a:t>Hellenic Petroleum</a:t>
+            </a:r>
+          </a:p>
+          <a:p>
+            <a:pPr>
+              <a:spcBef>
+                <a:spcPts val="600"/>
+              </a:spcBef>
+              <a:defRPr sz="1200">
+                <a:solidFill>
+                  <a:srgbClr val="1E293B"/>
+                </a:solidFill>
+              </a:defRPr>
+            </a:pPr>
+            <a:r>
+              <a:t>Dynamic coordination — payback &lt; 1 year cited; margin improvements.</a:t>
+            </a:r>
+          </a:p>
+        </p:txBody>
+      </p:sp>
+      <p:sp>
+        <p:nvSpPr>
+          <p:cNvPr id="6" name="Rounded Rectangle 5"/>
+          <p:cNvSpPr/>
+          <p:nvPr/>
+        </p:nvSpPr>
+        <p:spPr>
+          <a:xfrm>
+            <a:off x="6355080" y="1691640"/>
+            <a:ext cx="5486400" cy="1828800"/>
+          </a:xfrm>
+          <a:prstGeom prst="roundRect">
+            <a:avLst/>
+          </a:prstGeom>
+          <a:solidFill>
+            <a:srgbClr val="F5F8FF"/>
+          </a:solidFill>
+          <a:ln w="19050">
+            <a:solidFill>
+              <a:srgbClr val="003DA5"/>
+            </a:solidFill>
+          </a:ln>
+        </p:spPr>
+        <p:style>
+          <a:lnRef idx="1">
+            <a:schemeClr val="accent1"/>
+          </a:lnRef>
+          <a:fillRef idx="3">
+            <a:schemeClr val="accent1"/>
+          </a:fillRef>
+          <a:effectRef idx="2">
+            <a:schemeClr val="accent1"/>
+          </a:effectRef>
+          <a:fontRef idx="minor">
+            <a:schemeClr val="lt1"/>
+          </a:fontRef>
+        </p:style>
+        <p:txBody>
+          <a:bodyPr rtlCol="0" anchor="ctr" lIns="137160" tIns="109728"/>
+          <a:lstStyle/>
+          <a:p>
+            <a:pPr algn="ctr">
+              <a:defRPr sz="1400" b="1">
+                <a:solidFill>
+                  <a:srgbClr val="003DA5"/>
+                </a:solidFill>
+              </a:defRPr>
+            </a:pPr>
+            <a:r>
+              <a:t>SECCO (ethylene)</a:t>
+            </a:r>
+          </a:p>
+          <a:p>
+            <a:pPr>
+              <a:spcBef>
+                <a:spcPts val="600"/>
+              </a:spcBef>
+              <a:defRPr sz="1200">
+                <a:solidFill>
+                  <a:srgbClr val="1E293B"/>
+                </a:solidFill>
+              </a:defRPr>
+            </a:pPr>
+            <a:r>
+              <a:t>Reuses APC dynamics; naphtha feed +1.27% after revamp.</a:t>
+            </a:r>
+          </a:p>
+        </p:txBody>
+      </p:sp>
+      <p:sp>
+        <p:nvSpPr>
+          <p:cNvPr id="7" name="Rounded Rectangle 6"/>
+          <p:cNvSpPr/>
+          <p:nvPr/>
+        </p:nvSpPr>
+        <p:spPr>
+          <a:xfrm>
+            <a:off x="502920" y="3840480"/>
+            <a:ext cx="5486400" cy="1828800"/>
+          </a:xfrm>
+          <a:prstGeom prst="roundRect">
+            <a:avLst/>
+          </a:prstGeom>
+          <a:solidFill>
+            <a:srgbClr val="F5F8FF"/>
+          </a:solidFill>
+          <a:ln w="19050">
+            <a:solidFill>
+              <a:srgbClr val="003DA5"/>
+            </a:solidFill>
+          </a:ln>
+        </p:spPr>
+        <p:style>
+          <a:lnRef idx="1">
+            <a:schemeClr val="accent1"/>
+          </a:lnRef>
+          <a:fillRef idx="3">
+            <a:schemeClr val="accent1"/>
+          </a:fillRef>
+          <a:effectRef idx="2">
+            <a:schemeClr val="accent1"/>
+          </a:effectRef>
+          <a:fontRef idx="minor">
+            <a:schemeClr val="lt1"/>
+          </a:fontRef>
+        </p:style>
+        <p:txBody>
+          <a:bodyPr rtlCol="0" anchor="ctr" lIns="137160" tIns="109728"/>
+          <a:lstStyle/>
+          <a:p>
+            <a:pPr algn="ctr">
+              <a:defRPr sz="1400" b="1">
+                <a:solidFill>
+                  <a:srgbClr val="003DA5"/>
+                </a:solidFill>
+              </a:defRPr>
+            </a:pPr>
+            <a:r>
+              <a:t>Literature (FCC DRTO)</a:t>
+            </a:r>
+          </a:p>
+          <a:p>
+            <a:pPr>
+              <a:spcBef>
+                <a:spcPts val="600"/>
+              </a:spcBef>
+              <a:defRPr sz="1200">
+                <a:solidFill>
+                  <a:srgbClr val="1E293B"/>
+                </a:solidFill>
+              </a:defRPr>
+            </a:pPr>
+            <a:r>
+              <a:t>Higher objective during disturbances — IOCL FCC prime candidates.</a:t>
+            </a:r>
+          </a:p>
+        </p:txBody>
+      </p:sp>
+      <p:sp>
+        <p:nvSpPr>
+          <p:cNvPr id="8" name="Rounded Rectangle 7"/>
+          <p:cNvSpPr/>
+          <p:nvPr/>
+        </p:nvSpPr>
+        <p:spPr>
+          <a:xfrm>
+            <a:off x="6355080" y="3840480"/>
+            <a:ext cx="5486400" cy="1828800"/>
+          </a:xfrm>
+          <a:prstGeom prst="roundRect">
+            <a:avLst/>
+          </a:prstGeom>
+          <a:solidFill>
+            <a:srgbClr val="F5F8FF"/>
+          </a:solidFill>
+          <a:ln w="19050">
+            <a:solidFill>
+              <a:srgbClr val="003DA5"/>
+            </a:solidFill>
+          </a:ln>
+        </p:spPr>
+        <p:style>
+          <a:lnRef idx="1">
+            <a:schemeClr val="accent1"/>
+          </a:lnRef>
+          <a:fillRef idx="3">
+            <a:schemeClr val="accent1"/>
+          </a:fillRef>
+          <a:effectRef idx="2">
+            <a:schemeClr val="accent1"/>
+          </a:effectRef>
+          <a:fontRef idx="minor">
+            <a:schemeClr val="lt1"/>
+          </a:fontRef>
+        </p:style>
+        <p:txBody>
+          <a:bodyPr rtlCol="0" anchor="ctr" lIns="137160" tIns="109728"/>
+          <a:lstStyle/>
+          <a:p>
+            <a:pPr algn="ctr">
+              <a:defRPr sz="1400" b="1">
+                <a:solidFill>
+                  <a:srgbClr val="003DA5"/>
+                </a:solidFill>
+              </a:defRPr>
+            </a:pPr>
+            <a:r>
+              <a:t>IOCL opportunity</a:t>
+            </a:r>
+          </a:p>
+          <a:p>
+            <a:pPr>
+              <a:spcBef>
+                <a:spcPts val="600"/>
+              </a:spcBef>
+              <a:defRPr sz="1200">
+                <a:solidFill>
+                  <a:srgbClr val="1E293B"/>
+                </a:solidFill>
+              </a:defRPr>
+            </a:pPr>
+            <a:r>
+              <a:t>Coordinate crude, intermediates, blend once — not per-unit RTO battles.</a:t>
+            </a:r>
+          </a:p>
+        </p:txBody>
+      </p:sp>
+    </p:spTree>
+  </p:cSld>
+  <p:clrMapOvr>
+    <a:masterClrMapping/>
+  </p:clrMapOvr>
+</p:sld>
+</file>
+
+<file path=ppt/slides/slide14.xml><?xml version="1.0" encoding="utf-8"?>
+<p:sld xmlns:a="http://schemas.openxmlformats.org/drawingml/2006/main" xmlns:p="http://schemas.openxmlformats.org/presentationml/2006/main" xmlns:r="http://schemas.openxmlformats.org/officeDocument/2006/relationships">
+  <p:cSld>
+    <p:spTree>
+      <p:nvGrpSpPr>
+        <p:cNvPr id="1" name=""/>
+        <p:cNvGrpSpPr/>
+        <p:nvPr/>
+      </p:nvGrpSpPr>
+      <p:grpSpPr/>
+      <p:sp>
+        <p:nvSpPr>
+          <p:cNvPr id="2" name="Rectangle 1"/>
+          <p:cNvSpPr/>
+          <p:nvPr/>
+        </p:nvSpPr>
+        <p:spPr>
+          <a:xfrm>
+            <a:off x="0" y="0"/>
+            <a:ext cx="12191695" cy="6858000"/>
+          </a:xfrm>
+          <a:prstGeom prst="rect">
+            <a:avLst/>
+          </a:prstGeom>
+          <a:solidFill>
+            <a:srgbClr val="F8FAFC"/>
+          </a:solidFill>
+          <a:ln>
+            <a:noFill/>
+          </a:ln>
+        </p:spPr>
+        <p:style>
+          <a:lnRef idx="1">
+            <a:schemeClr val="accent1"/>
+          </a:lnRef>
+          <a:fillRef idx="3">
+            <a:schemeClr val="accent1"/>
+          </a:fillRef>
+          <a:effectRef idx="2">
+            <a:schemeClr val="accent1"/>
+          </a:effectRef>
+          <a:fontRef idx="minor">
+            <a:schemeClr val="lt1"/>
+          </a:fontRef>
+        </p:style>
+        <p:txBody>
+          <a:bodyPr rtlCol="0" anchor="ctr"/>
+          <a:lstStyle/>
+          <a:p>
+            <a:pPr algn="ctr"/>
+          </a:p>
+        </p:txBody>
+      </p:sp>
+      <p:sp>
+        <p:nvSpPr>
+          <p:cNvPr id="3" name="TextBox 2"/>
+          <p:cNvSpPr txBox="1"/>
+          <p:nvPr/>
+        </p:nvSpPr>
+        <p:spPr>
+          <a:xfrm>
+            <a:off x="502920" y="320040"/>
+            <a:ext cx="10972800" cy="822960"/>
+          </a:xfrm>
+          <a:prstGeom prst="rect">
+            <a:avLst/>
+          </a:prstGeom>
+          <a:noFill/>
+        </p:spPr>
+        <p:txBody>
+          <a:bodyPr wrap="square">
+            <a:spAutoFit/>
+          </a:bodyPr>
+          <a:lstStyle/>
+          <a:p>
+            <a:pPr algn="l">
+              <a:defRPr sz="3200" b="1">
+                <a:solidFill>
+                  <a:srgbClr val="003DA5"/>
+                </a:solidFill>
+              </a:defRPr>
+            </a:pPr>
+            <a:r>
+              <a:t>What IOCL gains with PWO + HPDT</a:t>
+            </a:r>
+          </a:p>
+        </p:txBody>
+      </p:sp>
+      <p:sp>
+        <p:nvSpPr>
+          <p:cNvPr id="4" name="Rectangle 3"/>
+          <p:cNvSpPr/>
+          <p:nvPr/>
+        </p:nvSpPr>
+        <p:spPr>
+          <a:xfrm>
+            <a:off x="502920" y="1051560"/>
+            <a:ext cx="1097280" cy="54864"/>
+          </a:xfrm>
+          <a:prstGeom prst="rect">
+            <a:avLst/>
+          </a:prstGeom>
+          <a:solidFill>
+            <a:srgbClr val="F47920"/>
+          </a:solidFill>
+          <a:ln>
+            <a:noFill/>
+          </a:ln>
+        </p:spPr>
+        <p:style>
+          <a:lnRef idx="1">
+            <a:schemeClr val="accent1"/>
+          </a:lnRef>
+          <a:fillRef idx="3">
+            <a:schemeClr val="accent1"/>
+          </a:fillRef>
+          <a:effectRef idx="2">
+            <a:schemeClr val="accent1"/>
+          </a:effectRef>
+          <a:fontRef idx="minor">
+            <a:schemeClr val="lt1"/>
+          </a:fontRef>
+        </p:style>
+        <p:txBody>
+          <a:bodyPr rtlCol="0" anchor="ctr"/>
+          <a:lstStyle/>
+          <a:p>
+            <a:pPr algn="ctr"/>
+          </a:p>
+        </p:txBody>
+      </p:sp>
+      <p:sp>
+        <p:nvSpPr>
+          <p:cNvPr id="5" name="Rounded Rectangle 4"/>
+          <p:cNvSpPr/>
+          <p:nvPr/>
+        </p:nvSpPr>
+        <p:spPr>
+          <a:xfrm>
+            <a:off x="457200" y="1737360"/>
+            <a:ext cx="3566160" cy="548640"/>
+          </a:xfrm>
+          <a:prstGeom prst="roundRect">
+            <a:avLst/>
+          </a:prstGeom>
+          <a:solidFill>
+            <a:srgbClr val="F47920"/>
+          </a:solidFill>
+          <a:ln>
+            <a:solidFill>
+              <a:srgbClr val="C8C8D2"/>
+            </a:solidFill>
+          </a:ln>
+        </p:spPr>
+        <p:style>
+          <a:lnRef idx="1">
+            <a:schemeClr val="accent1"/>
+          </a:lnRef>
+          <a:fillRef idx="3">
+            <a:schemeClr val="accent1"/>
+          </a:fillRef>
+          <a:effectRef idx="2">
+            <a:schemeClr val="accent1"/>
+          </a:effectRef>
+          <a:fontRef idx="minor">
+            <a:schemeClr val="lt1"/>
+          </a:fontRef>
+        </p:style>
+        <p:txBody>
+          <a:bodyPr rtlCol="0" anchor="ctr"/>
+          <a:lstStyle/>
+          <a:p>
+            <a:pPr algn="ctr">
+              <a:defRPr sz="1000" b="1">
+                <a:solidFill>
+                  <a:srgbClr val="FFFFFF"/>
+                </a:solidFill>
+              </a:defRPr>
+            </a:pPr>
+            <a:r>
+              <a:t>₹ margin per barrel — sustained</a:t>
+            </a:r>
+          </a:p>
+        </p:txBody>
+      </p:sp>
+      <p:sp>
+        <p:nvSpPr>
+          <p:cNvPr id="6" name="Rounded Rectangle 5"/>
+          <p:cNvSpPr/>
+          <p:nvPr/>
+        </p:nvSpPr>
+        <p:spPr>
+          <a:xfrm>
+            <a:off x="4297680" y="1737360"/>
+            <a:ext cx="3566160" cy="548640"/>
+          </a:xfrm>
+          <a:prstGeom prst="roundRect">
+            <a:avLst/>
+          </a:prstGeom>
+          <a:solidFill>
+            <a:srgbClr val="F47920"/>
+          </a:solidFill>
+          <a:ln>
+            <a:solidFill>
+              <a:srgbClr val="C8C8D2"/>
+            </a:solidFill>
+          </a:ln>
+        </p:spPr>
+        <p:style>
+          <a:lnRef idx="1">
+            <a:schemeClr val="accent1"/>
+          </a:lnRef>
+          <a:fillRef idx="3">
+            <a:schemeClr val="accent1"/>
+          </a:fillRef>
+          <a:effectRef idx="2">
+            <a:schemeClr val="accent1"/>
+          </a:effectRef>
+          <a:fontRef idx="minor">
+            <a:schemeClr val="lt1"/>
+          </a:fontRef>
+        </p:style>
+        <p:txBody>
+          <a:bodyPr rtlCol="0" anchor="ctr"/>
+          <a:lstStyle/>
+          <a:p>
+            <a:pPr algn="ctr">
+              <a:defRPr sz="1000" b="1">
+                <a:solidFill>
+                  <a:srgbClr val="FFFFFF"/>
+                </a:solidFill>
+              </a:defRPr>
+            </a:pPr>
+            <a:r>
+              <a:t>Reduced quality giveaway</a:t>
+            </a:r>
+          </a:p>
+        </p:txBody>
+      </p:sp>
+      <p:sp>
+        <p:nvSpPr>
+          <p:cNvPr id="7" name="Rounded Rectangle 6"/>
+          <p:cNvSpPr/>
+          <p:nvPr/>
+        </p:nvSpPr>
+        <p:spPr>
+          <a:xfrm>
+            <a:off x="8138160" y="1737360"/>
+            <a:ext cx="3566160" cy="548640"/>
+          </a:xfrm>
+          <a:prstGeom prst="roundRect">
+            <a:avLst/>
+          </a:prstGeom>
+          <a:solidFill>
+            <a:srgbClr val="F47920"/>
+          </a:solidFill>
+          <a:ln>
+            <a:solidFill>
+              <a:srgbClr val="C8C8D2"/>
+            </a:solidFill>
+          </a:ln>
+        </p:spPr>
+        <p:style>
+          <a:lnRef idx="1">
+            <a:schemeClr val="accent1"/>
+          </a:lnRef>
+          <a:fillRef idx="3">
+            <a:schemeClr val="accent1"/>
+          </a:fillRef>
+          <a:effectRef idx="2">
+            <a:schemeClr val="accent1"/>
+          </a:effectRef>
+          <a:fontRef idx="minor">
+            <a:schemeClr val="lt1"/>
+          </a:fontRef>
+        </p:style>
+        <p:txBody>
+          <a:bodyPr rtlCol="0" anchor="ctr"/>
+          <a:lstStyle/>
+          <a:p>
+            <a:pPr algn="ctr">
+              <a:defRPr sz="1000" b="1">
+                <a:solidFill>
+                  <a:srgbClr val="FFFFFF"/>
+                </a:solidFill>
+              </a:defRPr>
+            </a:pPr>
+            <a:r>
+              <a:t>Faster crude/margin response</a:t>
+            </a:r>
+          </a:p>
+        </p:txBody>
+      </p:sp>
+      <p:sp>
+        <p:nvSpPr>
+          <p:cNvPr id="8" name="Rounded Rectangle 7"/>
+          <p:cNvSpPr/>
+          <p:nvPr/>
+        </p:nvSpPr>
+        <p:spPr>
+          <a:xfrm>
+            <a:off x="457200" y="2514600"/>
+            <a:ext cx="3566160" cy="548640"/>
+          </a:xfrm>
+          <a:prstGeom prst="roundRect">
+            <a:avLst/>
+          </a:prstGeom>
+          <a:solidFill>
+            <a:srgbClr val="F47920"/>
+          </a:solidFill>
+          <a:ln>
+            <a:solidFill>
+              <a:srgbClr val="C8C8D2"/>
+            </a:solidFill>
+          </a:ln>
+        </p:spPr>
+        <p:style>
+          <a:lnRef idx="1">
+            <a:schemeClr val="accent1"/>
+          </a:lnRef>
+          <a:fillRef idx="3">
+            <a:schemeClr val="accent1"/>
+          </a:fillRef>
+          <a:effectRef idx="2">
+            <a:schemeClr val="accent1"/>
+          </a:effectRef>
+          <a:fontRef idx="minor">
+            <a:schemeClr val="lt1"/>
+          </a:fontRef>
+        </p:style>
+        <p:txBody>
+          <a:bodyPr rtlCol="0" anchor="ctr"/>
+          <a:lstStyle/>
+          <a:p>
+            <a:pPr algn="ctr">
+              <a:defRPr sz="1000" b="1">
+                <a:solidFill>
+                  <a:srgbClr val="FFFFFF"/>
+                </a:solidFill>
+              </a:defRPr>
+            </a:pPr>
+            <a:r>
+              <a:t>Lower optimization OPEX</a:t>
+            </a:r>
+          </a:p>
+        </p:txBody>
+      </p:sp>
+      <p:sp>
+        <p:nvSpPr>
+          <p:cNvPr id="9" name="Rounded Rectangle 8"/>
+          <p:cNvSpPr/>
+          <p:nvPr/>
+        </p:nvSpPr>
+        <p:spPr>
+          <a:xfrm>
+            <a:off x="4297680" y="2514600"/>
+            <a:ext cx="3566160" cy="548640"/>
+          </a:xfrm>
+          <a:prstGeom prst="roundRect">
+            <a:avLst/>
+          </a:prstGeom>
+          <a:solidFill>
+            <a:srgbClr val="F47920"/>
+          </a:solidFill>
+          <a:ln>
+            <a:solidFill>
+              <a:srgbClr val="C8C8D2"/>
+            </a:solidFill>
+          </a:ln>
+        </p:spPr>
+        <p:style>
+          <a:lnRef idx="1">
+            <a:schemeClr val="accent1"/>
+          </a:lnRef>
+          <a:fillRef idx="3">
+            <a:schemeClr val="accent1"/>
+          </a:fillRef>
+          <a:effectRef idx="2">
+            <a:schemeClr val="accent1"/>
+          </a:effectRef>
+          <a:fontRef idx="minor">
+            <a:schemeClr val="lt1"/>
+          </a:fontRef>
+        </p:style>
+        <p:txBody>
+          <a:bodyPr rtlCol="0" anchor="ctr"/>
+          <a:lstStyle/>
+          <a:p>
+            <a:pPr algn="ctr">
+              <a:defRPr sz="1000" b="1">
+                <a:solidFill>
+                  <a:srgbClr val="FFFFFF"/>
+                </a:solidFill>
+              </a:defRPr>
+            </a:pPr>
+            <a:r>
+              <a:t>Standard Honeywell delivery playbook</a:t>
+            </a:r>
+          </a:p>
+        </p:txBody>
+      </p:sp>
+      <p:sp>
+        <p:nvSpPr>
+          <p:cNvPr id="10" name="TextBox 9"/>
+          <p:cNvSpPr txBox="1"/>
+          <p:nvPr/>
+        </p:nvSpPr>
+        <p:spPr>
+          <a:xfrm>
+            <a:off x="731520" y="3840480"/>
+            <a:ext cx="10515600" cy="1097280"/>
+          </a:xfrm>
+          <a:prstGeom prst="rect">
+            <a:avLst/>
+          </a:prstGeom>
+          <a:noFill/>
+        </p:spPr>
+        <p:txBody>
+          <a:bodyPr wrap="square">
+            <a:spAutoFit/>
+          </a:bodyPr>
+          <a:lstStyle/>
+          <a:p>
+            <a:pPr algn="ctr">
+              <a:defRPr sz="1600" b="0">
+                <a:solidFill>
+                  <a:srgbClr val="1E293B"/>
+                </a:solidFill>
+              </a:defRPr>
+            </a:pPr>
+            <a:r>
+              <a:t>Replace multiple local RTO capital requests with ONE template-based plantwide program per refinery — integrated with existing Forge APC.</a:t>
+            </a:r>
+          </a:p>
+        </p:txBody>
+      </p:sp>
+    </p:spTree>
+  </p:cSld>
+  <p:clrMapOvr>
+    <a:masterClrMapping/>
+  </p:clrMapOvr>
+</p:sld>
+</file>
+
+<file path=ppt/slides/slide15.xml><?xml version="1.0" encoding="utf-8"?>
+<p:sld xmlns:a="http://schemas.openxmlformats.org/drawingml/2006/main" xmlns:p="http://schemas.openxmlformats.org/presentationml/2006/main" xmlns:r="http://schemas.openxmlformats.org/officeDocument/2006/relationships">
+  <p:cSld>
+    <p:spTree>
+      <p:nvGrpSpPr>
+        <p:cNvPr id="1" name=""/>
+        <p:cNvGrpSpPr/>
+        <p:nvPr/>
+      </p:nvGrpSpPr>
+      <p:grpSpPr/>
+      <p:sp>
+        <p:nvSpPr>
+          <p:cNvPr id="2" name="Rectangle 1"/>
+          <p:cNvSpPr/>
+          <p:nvPr/>
+        </p:nvSpPr>
+        <p:spPr>
+          <a:xfrm>
+            <a:off x="0" y="0"/>
+            <a:ext cx="12191695" cy="6858000"/>
+          </a:xfrm>
+          <a:prstGeom prst="rect">
+            <a:avLst/>
+          </a:prstGeom>
+          <a:solidFill>
+            <a:srgbClr val="0F172A"/>
+          </a:solidFill>
+          <a:ln>
+            <a:noFill/>
+          </a:ln>
+        </p:spPr>
+        <p:style>
+          <a:lnRef idx="1">
+            <a:schemeClr val="accent1"/>
+          </a:lnRef>
+          <a:fillRef idx="3">
+            <a:schemeClr val="accent1"/>
+          </a:fillRef>
+          <a:effectRef idx="2">
+            <a:schemeClr val="accent1"/>
+          </a:effectRef>
+          <a:fontRef idx="minor">
+            <a:schemeClr val="lt1"/>
+          </a:fontRef>
+        </p:style>
+        <p:txBody>
+          <a:bodyPr rtlCol="0" anchor="ctr"/>
+          <a:lstStyle/>
+          <a:p>
+            <a:pPr algn="ctr"/>
+          </a:p>
+        </p:txBody>
+      </p:sp>
+      <p:sp>
+        <p:nvSpPr>
+          <p:cNvPr id="3" name="TextBox 2"/>
+          <p:cNvSpPr txBox="1"/>
+          <p:nvPr/>
+        </p:nvSpPr>
+        <p:spPr>
+          <a:xfrm>
+            <a:off x="502920" y="320040"/>
+            <a:ext cx="10972800" cy="822960"/>
+          </a:xfrm>
+          <a:prstGeom prst="rect">
+            <a:avLst/>
+          </a:prstGeom>
+          <a:noFill/>
+        </p:spPr>
+        <p:txBody>
+          <a:bodyPr wrap="square">
+            <a:spAutoFit/>
+          </a:bodyPr>
+          <a:lstStyle/>
+          <a:p>
+            <a:pPr algn="l">
+              <a:defRPr sz="3200" b="1">
+                <a:solidFill>
+                  <a:srgbClr val="FFFFFF"/>
+                </a:solidFill>
+              </a:defRPr>
+            </a:pPr>
+            <a:r>
+              <a:t>Executive decision framework</a:t>
+            </a:r>
+          </a:p>
+        </p:txBody>
+      </p:sp>
+      <p:sp>
+        <p:nvSpPr>
+          <p:cNvPr id="4" name="Rectangle 3"/>
+          <p:cNvSpPr/>
+          <p:nvPr/>
+        </p:nvSpPr>
+        <p:spPr>
+          <a:xfrm>
+            <a:off x="502920" y="1051560"/>
+            <a:ext cx="1097280" cy="54864"/>
+          </a:xfrm>
+          <a:prstGeom prst="rect">
+            <a:avLst/>
+          </a:prstGeom>
+          <a:solidFill>
+            <a:srgbClr val="F47920"/>
+          </a:solidFill>
+          <a:ln>
+            <a:noFill/>
+          </a:ln>
+        </p:spPr>
+        <p:style>
+          <a:lnRef idx="1">
+            <a:schemeClr val="accent1"/>
+          </a:lnRef>
+          <a:fillRef idx="3">
+            <a:schemeClr val="accent1"/>
+          </a:fillRef>
+          <a:effectRef idx="2">
+            <a:schemeClr val="accent1"/>
+          </a:effectRef>
+          <a:fontRef idx="minor">
+            <a:schemeClr val="lt1"/>
+          </a:fontRef>
+        </p:style>
+        <p:txBody>
+          <a:bodyPr rtlCol="0" anchor="ctr"/>
+          <a:lstStyle/>
+          <a:p>
+            <a:pPr algn="ctr"/>
+          </a:p>
+        </p:txBody>
+      </p:sp>
+      <p:graphicFrame>
+        <p:nvGraphicFramePr>
+          <p:cNvPr id="5" name="Table 4"/>
+          <p:cNvGraphicFramePr>
+            <a:graphicFrameLocks noGrp="1"/>
+          </p:cNvGraphicFramePr>
+          <p:nvPr/>
+        </p:nvGraphicFramePr>
+        <p:xfrm>
+          <a:off x="411480" y="1554480"/>
+          <a:ext cx="11338560" cy="1600200"/>
+        </p:xfrm>
+        <a:graphic>
+          <a:graphicData uri="http://schemas.openxmlformats.org/drawingml/2006/table">
+            <a:tbl>
+              <a:tblPr firstRow="1" bandRow="1">
+                <a:tableStyleId>{5C22544A-7EE6-4342-B048-85BDC9FD1C3A}</a:tableStyleId>
+              </a:tblPr>
+              <a:tblGrid>
+                <a:gridCol w="5669280"/>
+                <a:gridCol w="5669280"/>
+              </a:tblGrid>
+              <a:tr h="320040">
+                <a:tc>
+                  <a:txBody>
+                    <a:bodyPr/>
+                    <a:lstStyle/>
+                    <a:p>
+                      <a:pPr>
+                        <a:defRPr sz="1200" b="1">
+                          <a:solidFill>
+                            <a:srgbClr val="FFFFFF"/>
+                          </a:solidFill>
+                        </a:defRPr>
+                      </a:pPr>
+                      <a:r>
+                        <a:t>Option A — Local RTO proliferation</a:t>
+                      </a:r>
+                    </a:p>
+                  </a:txBody>
+                  <a:tcPr>
+                    <a:solidFill>
+                      <a:srgbClr val="003DA5"/>
+                    </a:solidFill>
+                  </a:tcPr>
+                </a:tc>
+                <a:tc>
+                  <a:txBody>
+                    <a:bodyPr/>
+                    <a:lstStyle/>
+                    <a:p>
+                      <a:pPr>
+                        <a:defRPr sz="1200" b="1">
+                          <a:solidFill>
+                            <a:srgbClr val="FFFFFF"/>
+                          </a:solidFill>
+                        </a:defRPr>
+                      </a:pPr>
+                      <a:r>
+                        <a:t>Option B — Template (PWO + HPDT)</a:t>
+                      </a:r>
+                    </a:p>
+                  </a:txBody>
+                  <a:tcPr>
+                    <a:solidFill>
+                      <a:srgbClr val="003DA5"/>
+                    </a:solidFill>
+                  </a:tcPr>
+                </a:tc>
+              </a:tr>
+              <a:tr h="320040">
+                <a:tc>
+                  <a:txBody>
+                    <a:bodyPr/>
+                    <a:lstStyle/>
+                    <a:p>
+                      <a:pPr>
+                        <a:defRPr sz="1100" b="0">
+                          <a:solidFill>
+                            <a:srgbClr val="1E293B"/>
+                          </a:solidFill>
+                        </a:defRPr>
+                      </a:pPr>
+                      <a:r>
+                        <a:t>High CAPEX per unit, overlapping models</a:t>
+                      </a:r>
+                    </a:p>
+                  </a:txBody>
+                  <a:tcPr/>
+                </a:tc>
+                <a:tc>
+                  <a:txBody>
+                    <a:bodyPr/>
+                    <a:lstStyle/>
+                    <a:p>
+                      <a:pPr>
+                        <a:defRPr sz="1100" b="0">
+                          <a:solidFill>
+                            <a:srgbClr val="1E293B"/>
+                          </a:solidFill>
+                        </a:defRPr>
+                      </a:pPr>
+                      <a:r>
+                        <a:t>✓ Single site optimization layer</a:t>
+                      </a:r>
+                    </a:p>
+                  </a:txBody>
+                  <a:tcPr/>
+                </a:tc>
+              </a:tr>
+              <a:tr h="320040">
+                <a:tc>
+                  <a:txBody>
+                    <a:bodyPr/>
+                    <a:lstStyle/>
+                    <a:p>
+                      <a:pPr>
+                        <a:defRPr sz="1100" b="0">
+                          <a:solidFill>
+                            <a:srgbClr val="1E293B"/>
+                          </a:solidFill>
+                        </a:defRPr>
+                      </a:pPr>
+                      <a:r>
+                        <a:t>Benefits isolated to one train</a:t>
+                      </a:r>
+                    </a:p>
+                  </a:txBody>
+                  <a:tcPr/>
+                </a:tc>
+                <a:tc>
+                  <a:txBody>
+                    <a:bodyPr/>
+                    <a:lstStyle/>
+                    <a:p>
+                      <a:pPr>
+                        <a:defRPr sz="1100" b="0">
+                          <a:solidFill>
+                            <a:srgbClr val="1E293B"/>
+                          </a:solidFill>
+                        </a:defRPr>
+                      </a:pPr>
+                      <a:r>
+                        <a:t>✓ Crude-to-blend coordination</a:t>
+                      </a:r>
+                    </a:p>
+                  </a:txBody>
+                  <a:tcPr/>
+                </a:tc>
+              </a:tr>
+              <a:tr h="320040">
+                <a:tc>
+                  <a:txBody>
+                    <a:bodyPr/>
+                    <a:lstStyle/>
+                    <a:p>
+                      <a:pPr>
+                        <a:defRPr sz="1100" b="0">
+                          <a:solidFill>
+                            <a:srgbClr val="1E293B"/>
+                          </a:solidFill>
+                        </a:defRPr>
+                      </a:pPr>
+                      <a:r>
+                        <a:t>Frequent model OFF</a:t>
+                      </a:r>
+                    </a:p>
+                  </a:txBody>
+                  <a:tcPr/>
+                </a:tc>
+                <a:tc>
+                  <a:txBody>
+                    <a:bodyPr/>
+                    <a:lstStyle/>
+                    <a:p>
+                      <a:pPr>
+                        <a:defRPr sz="1100" b="0">
+                          <a:solidFill>
+                            <a:srgbClr val="1E293B"/>
+                          </a:solidFill>
+                        </a:defRPr>
+                      </a:pPr>
+                      <a:r>
+                        <a:t>✓ Proxy limits + CPA-U</a:t>
+                      </a:r>
+                    </a:p>
+                  </a:txBody>
+                  <a:tcPr/>
+                </a:tc>
+              </a:tr>
+              <a:tr h="320040">
+                <a:tc>
+                  <a:txBody>
+                    <a:bodyPr/>
+                    <a:lstStyle/>
+                    <a:p>
+                      <a:pPr>
+                        <a:defRPr sz="1100" b="0">
+                          <a:solidFill>
+                            <a:srgbClr val="1E293B"/>
+                          </a:solidFill>
+                        </a:defRPr>
+                      </a:pPr>
+                      <a:r>
+                        <a:t>Planner ↔ operations friction</a:t>
+                      </a:r>
+                    </a:p>
+                  </a:txBody>
+                  <a:tcPr/>
+                </a:tc>
+                <a:tc>
+                  <a:txBody>
+                    <a:bodyPr/>
+                    <a:lstStyle/>
+                    <a:p>
+                      <a:pPr>
+                        <a:defRPr sz="1100" b="0">
+                          <a:solidFill>
+                            <a:srgbClr val="1E293B"/>
+                          </a:solidFill>
+                        </a:defRPr>
+                      </a:pPr>
+                      <a:r>
+                        <a:t>✓ LP structure in real time</a:t>
+                      </a:r>
+                    </a:p>
+                  </a:txBody>
+                  <a:tcPr/>
+                </a:tc>
+              </a:tr>
+            </a:tbl>
+          </a:graphicData>
+        </a:graphic>
+      </p:graphicFrame>
+      <p:sp>
+        <p:nvSpPr>
+          <p:cNvPr id="6" name="Rounded Rectangle 5"/>
+          <p:cNvSpPr/>
+          <p:nvPr/>
+        </p:nvSpPr>
+        <p:spPr>
+          <a:xfrm>
+            <a:off x="502920" y="4709160"/>
+            <a:ext cx="11155680" cy="1234440"/>
+          </a:xfrm>
+          <a:prstGeom prst="roundRect">
+            <a:avLst/>
+          </a:prstGeom>
+          <a:solidFill>
+            <a:srgbClr val="003DA5"/>
+          </a:solidFill>
+          <a:ln>
+            <a:noFill/>
+          </a:ln>
+        </p:spPr>
+        <p:style>
+          <a:lnRef idx="1">
+            <a:schemeClr val="accent1"/>
+          </a:lnRef>
+          <a:fillRef idx="3">
+            <a:schemeClr val="accent1"/>
+          </a:fillRef>
+          <a:effectRef idx="2">
+            <a:schemeClr val="accent1"/>
+          </a:effectRef>
+          <a:fontRef idx="minor">
+            <a:schemeClr val="lt1"/>
+          </a:fontRef>
+        </p:style>
+        <p:txBody>
+          <a:bodyPr rtlCol="0" anchor="ctr"/>
+          <a:lstStyle/>
+          <a:p>
+            <a:pPr algn="ctr">
+              <a:defRPr sz="1600" b="1">
+                <a:solidFill>
+                  <a:srgbClr val="FFFFFF"/>
+                </a:solidFill>
+              </a:defRPr>
+            </a:pPr>
+            <a:r>
+              <a:t>Recommendation: Mandate PWO and HPDT as non-optional in IOCL Honeywell Templates.</a:t>
+            </a:r>
+          </a:p>
+          <a:p>
+            <a:pPr algn="ctr">
+              <a:defRPr sz="1200">
+                <a:solidFill>
+                  <a:srgbClr val="C8D7EB"/>
+                </a:solidFill>
+              </a:defRPr>
+            </a:pPr>
+            <a:r>
+              <a:t>Defer standalone local RTO expansions — route investment to plantwide dynamic optimization.</a:t>
+            </a:r>
+          </a:p>
+        </p:txBody>
+      </p:sp>
+    </p:spTree>
+  </p:cSld>
+  <p:clrMapOvr>
+    <a:masterClrMapping/>
+  </p:clrMapOvr>
+</p:sld>
+</file>
+
+<file path=ppt/slides/slide16.xml><?xml version="1.0" encoding="utf-8"?>
+<p:sld xmlns:a="http://schemas.openxmlformats.org/drawingml/2006/main" xmlns:p="http://schemas.openxmlformats.org/presentationml/2006/main" xmlns:r="http://schemas.openxmlformats.org/officeDocument/2006/relationships">
+  <p:cSld>
+    <p:spTree>
+      <p:nvGrpSpPr>
+        <p:cNvPr id="1" name=""/>
+        <p:cNvGrpSpPr/>
+        <p:nvPr/>
+      </p:nvGrpSpPr>
+      <p:grpSpPr/>
+      <p:sp>
+        <p:nvSpPr>
+          <p:cNvPr id="2" name="Rectangle 1"/>
+          <p:cNvSpPr/>
+          <p:nvPr/>
+        </p:nvSpPr>
+        <p:spPr>
+          <a:xfrm>
+            <a:off x="0" y="0"/>
+            <a:ext cx="12191695" cy="6858000"/>
+          </a:xfrm>
+          <a:prstGeom prst="rect">
+            <a:avLst/>
+          </a:prstGeom>
+          <a:solidFill>
+            <a:srgbClr val="F8FAFC"/>
+          </a:solidFill>
+          <a:ln>
+            <a:noFill/>
+          </a:ln>
+        </p:spPr>
+        <p:style>
+          <a:lnRef idx="1">
+            <a:schemeClr val="accent1"/>
+          </a:lnRef>
+          <a:fillRef idx="3">
+            <a:schemeClr val="accent1"/>
+          </a:fillRef>
+          <a:effectRef idx="2">
+            <a:schemeClr val="accent1"/>
+          </a:effectRef>
+          <a:fontRef idx="minor">
+            <a:schemeClr val="lt1"/>
+          </a:fontRef>
+        </p:style>
+        <p:txBody>
+          <a:bodyPr rtlCol="0" anchor="ctr"/>
+          <a:lstStyle/>
+          <a:p>
+            <a:pPr algn="ctr"/>
+          </a:p>
+        </p:txBody>
+      </p:sp>
+      <p:sp>
+        <p:nvSpPr>
+          <p:cNvPr id="3" name="TextBox 2"/>
+          <p:cNvSpPr txBox="1"/>
+          <p:nvPr/>
+        </p:nvSpPr>
+        <p:spPr>
+          <a:xfrm>
+            <a:off x="502920" y="320040"/>
+            <a:ext cx="10972800" cy="822960"/>
+          </a:xfrm>
+          <a:prstGeom prst="rect">
+            <a:avLst/>
+          </a:prstGeom>
+          <a:noFill/>
+        </p:spPr>
+        <p:txBody>
+          <a:bodyPr wrap="square">
+            <a:spAutoFit/>
+          </a:bodyPr>
+          <a:lstStyle/>
+          <a:p>
+            <a:pPr algn="l">
+              <a:defRPr sz="3200" b="1">
+                <a:solidFill>
+                  <a:srgbClr val="003DA5"/>
+                </a:solidFill>
+              </a:defRPr>
+            </a:pPr>
+            <a:r>
+              <a:t>Proposed IOCL rollout (template-based)</a:t>
+            </a:r>
+          </a:p>
+        </p:txBody>
+      </p:sp>
+      <p:sp>
+        <p:nvSpPr>
+          <p:cNvPr id="4" name="Rectangle 3"/>
+          <p:cNvSpPr/>
+          <p:nvPr/>
+        </p:nvSpPr>
+        <p:spPr>
+          <a:xfrm>
+            <a:off x="502920" y="1051560"/>
+            <a:ext cx="1097280" cy="54864"/>
+          </a:xfrm>
+          <a:prstGeom prst="rect">
+            <a:avLst/>
+          </a:prstGeom>
+          <a:solidFill>
+            <a:srgbClr val="F47920"/>
+          </a:solidFill>
+          <a:ln>
+            <a:noFill/>
+          </a:ln>
+        </p:spPr>
+        <p:style>
+          <a:lnRef idx="1">
+            <a:schemeClr val="accent1"/>
+          </a:lnRef>
+          <a:fillRef idx="3">
+            <a:schemeClr val="accent1"/>
+          </a:fillRef>
+          <a:effectRef idx="2">
+            <a:schemeClr val="accent1"/>
+          </a:effectRef>
+          <a:fontRef idx="minor">
+            <a:schemeClr val="lt1"/>
+          </a:fontRef>
+        </p:style>
+        <p:txBody>
+          <a:bodyPr rtlCol="0" anchor="ctr"/>
+          <a:lstStyle/>
+          <a:p>
+            <a:pPr algn="ctr"/>
+          </a:p>
+        </p:txBody>
+      </p:sp>
+      <p:sp>
+        <p:nvSpPr>
+          <p:cNvPr id="5" name="Oval 4"/>
+          <p:cNvSpPr/>
+          <p:nvPr/>
+        </p:nvSpPr>
+        <p:spPr>
+          <a:xfrm>
+            <a:off x="1051560" y="1920240"/>
+            <a:ext cx="411480" cy="411480"/>
+          </a:xfrm>
+          <a:prstGeom prst="ellipse">
+            <a:avLst/>
+          </a:prstGeom>
+          <a:solidFill>
+            <a:srgbClr val="003DA5"/>
+          </a:solidFill>
+          <a:ln>
+            <a:noFill/>
+          </a:ln>
+        </p:spPr>
+        <p:style>
+          <a:lnRef idx="1">
+            <a:schemeClr val="accent1"/>
+          </a:lnRef>
+          <a:fillRef idx="3">
+            <a:schemeClr val="accent1"/>
+          </a:fillRef>
+          <a:effectRef idx="2">
+            <a:schemeClr val="accent1"/>
+          </a:effectRef>
+          <a:fontRef idx="minor">
+            <a:schemeClr val="lt1"/>
+          </a:fontRef>
+        </p:style>
+        <p:txBody>
+          <a:bodyPr rtlCol="0" anchor="ctr"/>
+          <a:lstStyle/>
+          <a:p>
+            <a:pPr algn="ctr"/>
+          </a:p>
+        </p:txBody>
+      </p:sp>
+      <p:sp>
+        <p:nvSpPr>
+          <p:cNvPr id="6" name="TextBox 5"/>
+          <p:cNvSpPr txBox="1"/>
+          <p:nvPr/>
+        </p:nvSpPr>
+        <p:spPr>
+          <a:xfrm>
+            <a:off x="411480" y="2468880"/>
+            <a:ext cx="2011680" cy="365760"/>
+          </a:xfrm>
+          <a:prstGeom prst="rect">
+            <a:avLst/>
+          </a:prstGeom>
+          <a:noFill/>
+        </p:spPr>
+        <p:txBody>
+          <a:bodyPr wrap="square">
+            <a:spAutoFit/>
+          </a:bodyPr>
+          <a:lstStyle/>
+          <a:p>
+            <a:pPr algn="ctr">
+              <a:defRPr sz="1300" b="1">
+                <a:solidFill>
+                  <a:srgbClr val="1E293B"/>
+                </a:solidFill>
+              </a:defRPr>
+            </a:pPr>
+            <a:r>
+              <a:t>Phase 1</a:t>
+            </a:r>
+          </a:p>
+        </p:txBody>
+      </p:sp>
+      <p:sp>
+        <p:nvSpPr>
+          <p:cNvPr id="7" name="TextBox 6"/>
+          <p:cNvSpPr txBox="1"/>
+          <p:nvPr/>
+        </p:nvSpPr>
+        <p:spPr>
+          <a:xfrm>
+            <a:off x="411480" y="2788920"/>
+            <a:ext cx="2011680" cy="731520"/>
+          </a:xfrm>
+          <a:prstGeom prst="rect">
+            <a:avLst/>
+          </a:prstGeom>
+          <a:noFill/>
+        </p:spPr>
+        <p:txBody>
+          <a:bodyPr wrap="square">
+            <a:spAutoFit/>
+          </a:bodyPr>
+          <a:lstStyle/>
+          <a:p>
+            <a:pPr algn="ctr">
+              <a:defRPr sz="1100" b="0">
+                <a:solidFill>
+                  <a:srgbClr val="64748B"/>
+                </a:solidFill>
+              </a:defRPr>
+            </a:pPr>
+            <a:r>
+              <a:t>APC baseline + CPA-U</a:t>
+            </a:r>
+          </a:p>
+        </p:txBody>
+      </p:sp>
+      <p:sp>
+        <p:nvSpPr>
+          <p:cNvPr id="8" name="Oval 7"/>
+          <p:cNvSpPr/>
+          <p:nvPr/>
+        </p:nvSpPr>
+        <p:spPr>
+          <a:xfrm>
+            <a:off x="3337560" y="1920240"/>
+            <a:ext cx="411480" cy="411480"/>
+          </a:xfrm>
+          <a:prstGeom prst="ellipse">
+            <a:avLst/>
+          </a:prstGeom>
+          <a:solidFill>
+            <a:srgbClr val="003DA5"/>
+          </a:solidFill>
+          <a:ln>
+            <a:noFill/>
+          </a:ln>
+        </p:spPr>
+        <p:style>
+          <a:lnRef idx="1">
+            <a:schemeClr val="accent1"/>
+          </a:lnRef>
+          <a:fillRef idx="3">
+            <a:schemeClr val="accent1"/>
+          </a:fillRef>
+          <a:effectRef idx="2">
+            <a:schemeClr val="accent1"/>
+          </a:effectRef>
+          <a:fontRef idx="minor">
+            <a:schemeClr val="lt1"/>
+          </a:fontRef>
+        </p:style>
+        <p:txBody>
+          <a:bodyPr rtlCol="0" anchor="ctr"/>
+          <a:lstStyle/>
+          <a:p>
+            <a:pPr algn="ctr"/>
+          </a:p>
+        </p:txBody>
+      </p:sp>
+      <p:sp>
+        <p:nvSpPr>
+          <p:cNvPr id="9" name="TextBox 8"/>
+          <p:cNvSpPr txBox="1"/>
+          <p:nvPr/>
+        </p:nvSpPr>
+        <p:spPr>
+          <a:xfrm>
+            <a:off x="2697480" y="2468880"/>
+            <a:ext cx="2011680" cy="365760"/>
+          </a:xfrm>
+          <a:prstGeom prst="rect">
+            <a:avLst/>
+          </a:prstGeom>
+          <a:noFill/>
+        </p:spPr>
+        <p:txBody>
+          <a:bodyPr wrap="square">
+            <a:spAutoFit/>
+          </a:bodyPr>
+          <a:lstStyle/>
+          <a:p>
+            <a:pPr algn="ctr">
+              <a:defRPr sz="1300" b="1">
+                <a:solidFill>
+                  <a:srgbClr val="1E293B"/>
+                </a:solidFill>
+              </a:defRPr>
+            </a:pPr>
+            <a:r>
+              <a:t>Phase 2</a:t>
+            </a:r>
+          </a:p>
+        </p:txBody>
+      </p:sp>
+      <p:sp>
+        <p:nvSpPr>
+          <p:cNvPr id="10" name="TextBox 9"/>
+          <p:cNvSpPr txBox="1"/>
+          <p:nvPr/>
+        </p:nvSpPr>
+        <p:spPr>
+          <a:xfrm>
+            <a:off x="2697480" y="2788920"/>
+            <a:ext cx="2011680" cy="731520"/>
+          </a:xfrm>
+          <a:prstGeom prst="rect">
+            <a:avLst/>
+          </a:prstGeom>
+          <a:noFill/>
+        </p:spPr>
+        <p:txBody>
+          <a:bodyPr wrap="square">
+            <a:spAutoFit/>
+          </a:bodyPr>
+          <a:lstStyle/>
+          <a:p>
+            <a:pPr algn="ctr">
+              <a:defRPr sz="1100" b="0">
+                <a:solidFill>
+                  <a:srgbClr val="64748B"/>
+                </a:solidFill>
+              </a:defRPr>
+            </a:pPr>
+            <a:r>
+              <a:t>HPDT model alignment</a:t>
+            </a:r>
+          </a:p>
+        </p:txBody>
+      </p:sp>
+      <p:sp>
+        <p:nvSpPr>
+          <p:cNvPr id="11" name="Oval 10"/>
+          <p:cNvSpPr/>
+          <p:nvPr/>
+        </p:nvSpPr>
+        <p:spPr>
+          <a:xfrm>
+            <a:off x="5623560" y="1920240"/>
+            <a:ext cx="411480" cy="411480"/>
+          </a:xfrm>
+          <a:prstGeom prst="ellipse">
+            <a:avLst/>
+          </a:prstGeom>
+          <a:solidFill>
+            <a:srgbClr val="E60028"/>
+          </a:solidFill>
+          <a:ln>
+            <a:noFill/>
+          </a:ln>
+        </p:spPr>
+        <p:style>
+          <a:lnRef idx="1">
+            <a:schemeClr val="accent1"/>
+          </a:lnRef>
+          <a:fillRef idx="3">
+            <a:schemeClr val="accent1"/>
+          </a:fillRef>
+          <a:effectRef idx="2">
+            <a:schemeClr val="accent1"/>
+          </a:effectRef>
+          <a:fontRef idx="minor">
+            <a:schemeClr val="lt1"/>
+          </a:fontRef>
+        </p:style>
+        <p:txBody>
+          <a:bodyPr rtlCol="0" anchor="ctr"/>
+          <a:lstStyle/>
+          <a:p>
+            <a:pPr algn="ctr"/>
+          </a:p>
+        </p:txBody>
+      </p:sp>
+      <p:sp>
+        <p:nvSpPr>
+          <p:cNvPr id="12" name="TextBox 11"/>
+          <p:cNvSpPr txBox="1"/>
+          <p:nvPr/>
+        </p:nvSpPr>
+        <p:spPr>
+          <a:xfrm>
+            <a:off x="4983480" y="2468880"/>
+            <a:ext cx="2011680" cy="365760"/>
+          </a:xfrm>
+          <a:prstGeom prst="rect">
+            <a:avLst/>
+          </a:prstGeom>
+          <a:noFill/>
+        </p:spPr>
+        <p:txBody>
+          <a:bodyPr wrap="square">
+            <a:spAutoFit/>
+          </a:bodyPr>
+          <a:lstStyle/>
+          <a:p>
+            <a:pPr algn="ctr">
+              <a:defRPr sz="1300" b="1">
+                <a:solidFill>
+                  <a:srgbClr val="1E293B"/>
+                </a:solidFill>
+              </a:defRPr>
+            </a:pPr>
+            <a:r>
+              <a:t>Phase 3</a:t>
+            </a:r>
+          </a:p>
+        </p:txBody>
+      </p:sp>
+      <p:sp>
+        <p:nvSpPr>
+          <p:cNvPr id="13" name="TextBox 12"/>
+          <p:cNvSpPr txBox="1"/>
+          <p:nvPr/>
+        </p:nvSpPr>
+        <p:spPr>
+          <a:xfrm>
+            <a:off x="4983480" y="2788920"/>
+            <a:ext cx="2011680" cy="731520"/>
+          </a:xfrm>
+          <a:prstGeom prst="rect">
+            <a:avLst/>
+          </a:prstGeom>
+          <a:noFill/>
+        </p:spPr>
+        <p:txBody>
+          <a:bodyPr wrap="square">
+            <a:spAutoFit/>
+          </a:bodyPr>
+          <a:lstStyle/>
+          <a:p>
+            <a:pPr algn="ctr">
+              <a:defRPr sz="1100" b="0">
+                <a:solidFill>
+                  <a:srgbClr val="64748B"/>
+                </a:solidFill>
+              </a:defRPr>
+            </a:pPr>
+            <a:r>
+              <a:t>PWO live — 1 refinery</a:t>
+            </a:r>
+          </a:p>
+        </p:txBody>
+      </p:sp>
+      <p:sp>
+        <p:nvSpPr>
+          <p:cNvPr id="14" name="Oval 13"/>
+          <p:cNvSpPr/>
+          <p:nvPr/>
+        </p:nvSpPr>
+        <p:spPr>
+          <a:xfrm>
+            <a:off x="7909560" y="1920240"/>
+            <a:ext cx="411480" cy="411480"/>
+          </a:xfrm>
+          <a:prstGeom prst="ellipse">
+            <a:avLst/>
+          </a:prstGeom>
+          <a:solidFill>
+            <a:srgbClr val="003DA5"/>
+          </a:solidFill>
+          <a:ln>
+            <a:noFill/>
+          </a:ln>
+        </p:spPr>
+        <p:style>
+          <a:lnRef idx="1">
+            <a:schemeClr val="accent1"/>
+          </a:lnRef>
+          <a:fillRef idx="3">
+            <a:schemeClr val="accent1"/>
+          </a:fillRef>
+          <a:effectRef idx="2">
+            <a:schemeClr val="accent1"/>
+          </a:effectRef>
+          <a:fontRef idx="minor">
+            <a:schemeClr val="lt1"/>
+          </a:fontRef>
+        </p:style>
+        <p:txBody>
+          <a:bodyPr rtlCol="0" anchor="ctr"/>
+          <a:lstStyle/>
+          <a:p>
+            <a:pPr algn="ctr"/>
+          </a:p>
+        </p:txBody>
+      </p:sp>
+      <p:sp>
+        <p:nvSpPr>
+          <p:cNvPr id="15" name="TextBox 14"/>
+          <p:cNvSpPr txBox="1"/>
+          <p:nvPr/>
+        </p:nvSpPr>
+        <p:spPr>
+          <a:xfrm>
+            <a:off x="7269480" y="2468880"/>
+            <a:ext cx="2011680" cy="365760"/>
+          </a:xfrm>
+          <a:prstGeom prst="rect">
+            <a:avLst/>
+          </a:prstGeom>
+          <a:noFill/>
+        </p:spPr>
+        <p:txBody>
+          <a:bodyPr wrap="square">
+            <a:spAutoFit/>
+          </a:bodyPr>
+          <a:lstStyle/>
+          <a:p>
+            <a:pPr algn="ctr">
+              <a:defRPr sz="1300" b="1">
+                <a:solidFill>
+                  <a:srgbClr val="1E293B"/>
+                </a:solidFill>
+              </a:defRPr>
+            </a:pPr>
+            <a:r>
+              <a:t>Phase 4</a:t>
+            </a:r>
+          </a:p>
+        </p:txBody>
+      </p:sp>
+      <p:sp>
+        <p:nvSpPr>
+          <p:cNvPr id="16" name="TextBox 15"/>
+          <p:cNvSpPr txBox="1"/>
+          <p:nvPr/>
+        </p:nvSpPr>
+        <p:spPr>
+          <a:xfrm>
+            <a:off x="7269480" y="2788920"/>
+            <a:ext cx="2011680" cy="731520"/>
+          </a:xfrm>
+          <a:prstGeom prst="rect">
+            <a:avLst/>
+          </a:prstGeom>
+          <a:noFill/>
+        </p:spPr>
+        <p:txBody>
+          <a:bodyPr wrap="square">
+            <a:spAutoFit/>
+          </a:bodyPr>
+          <a:lstStyle/>
+          <a:p>
+            <a:pPr algn="ctr">
+              <a:defRPr sz="1100" b="0">
+                <a:solidFill>
+                  <a:srgbClr val="64748B"/>
+                </a:solidFill>
+              </a:defRPr>
+            </a:pPr>
+            <a:r>
+              <a:t>Blend gate-to-gate</a:t>
+            </a:r>
+          </a:p>
+        </p:txBody>
+      </p:sp>
+      <p:sp>
+        <p:nvSpPr>
+          <p:cNvPr id="17" name="Oval 16"/>
+          <p:cNvSpPr/>
+          <p:nvPr/>
+        </p:nvSpPr>
+        <p:spPr>
+          <a:xfrm>
+            <a:off x="10195560" y="1920240"/>
+            <a:ext cx="411480" cy="411480"/>
+          </a:xfrm>
+          <a:prstGeom prst="ellipse">
+            <a:avLst/>
+          </a:prstGeom>
+          <a:solidFill>
+            <a:srgbClr val="00C896"/>
+          </a:solidFill>
+          <a:ln>
+            <a:noFill/>
+          </a:ln>
+        </p:spPr>
+        <p:style>
+          <a:lnRef idx="1">
+            <a:schemeClr val="accent1"/>
+          </a:lnRef>
+          <a:fillRef idx="3">
+            <a:schemeClr val="accent1"/>
+          </a:fillRef>
+          <a:effectRef idx="2">
+            <a:schemeClr val="accent1"/>
+          </a:effectRef>
+          <a:fontRef idx="minor">
+            <a:schemeClr val="lt1"/>
+          </a:fontRef>
+        </p:style>
+        <p:txBody>
+          <a:bodyPr rtlCol="0" anchor="ctr"/>
+          <a:lstStyle/>
+          <a:p>
+            <a:pPr algn="ctr"/>
+          </a:p>
+        </p:txBody>
+      </p:sp>
+      <p:sp>
+        <p:nvSpPr>
+          <p:cNvPr id="18" name="TextBox 17"/>
+          <p:cNvSpPr txBox="1"/>
+          <p:nvPr/>
+        </p:nvSpPr>
+        <p:spPr>
+          <a:xfrm>
+            <a:off x="9555480" y="2468880"/>
+            <a:ext cx="2011680" cy="365760"/>
+          </a:xfrm>
+          <a:prstGeom prst="rect">
+            <a:avLst/>
+          </a:prstGeom>
+          <a:noFill/>
+        </p:spPr>
+        <p:txBody>
+          <a:bodyPr wrap="square">
+            <a:spAutoFit/>
+          </a:bodyPr>
+          <a:lstStyle/>
+          <a:p>
+            <a:pPr algn="ctr">
+              <a:defRPr sz="1300" b="1">
+                <a:solidFill>
+                  <a:srgbClr val="1E293B"/>
+                </a:solidFill>
+              </a:defRPr>
+            </a:pPr>
+            <a:r>
+              <a:t>Phase 5</a:t>
+            </a:r>
+          </a:p>
+        </p:txBody>
+      </p:sp>
+      <p:sp>
+        <p:nvSpPr>
+          <p:cNvPr id="19" name="TextBox 18"/>
+          <p:cNvSpPr txBox="1"/>
+          <p:nvPr/>
+        </p:nvSpPr>
+        <p:spPr>
+          <a:xfrm>
+            <a:off x="9555480" y="2788920"/>
+            <a:ext cx="2011680" cy="731520"/>
+          </a:xfrm>
+          <a:prstGeom prst="rect">
+            <a:avLst/>
+          </a:prstGeom>
+          <a:noFill/>
+        </p:spPr>
+        <p:txBody>
+          <a:bodyPr wrap="square">
+            <a:spAutoFit/>
+          </a:bodyPr>
+          <a:lstStyle/>
+          <a:p>
+            <a:pPr algn="ctr">
+              <a:defRPr sz="1100" b="0">
+                <a:solidFill>
+                  <a:srgbClr val="64748B"/>
+                </a:solidFill>
+              </a:defRPr>
+            </a:pPr>
+            <a:r>
+              <a:t>Replicate nationally</a:t>
+            </a:r>
+          </a:p>
+        </p:txBody>
+      </p:sp>
+      <p:sp>
+        <p:nvSpPr>
+          <p:cNvPr id="20" name="Rectangle 19"/>
+          <p:cNvSpPr/>
+          <p:nvPr/>
+        </p:nvSpPr>
+        <p:spPr>
+          <a:xfrm>
+            <a:off x="1097280" y="2121408"/>
+            <a:ext cx="9601200" cy="36576"/>
+          </a:xfrm>
+          <a:prstGeom prst="rect">
+            <a:avLst/>
+          </a:prstGeom>
+          <a:solidFill>
+            <a:srgbClr val="F47920"/>
+          </a:solidFill>
+          <a:ln>
+            <a:noFill/>
+          </a:ln>
+        </p:spPr>
+        <p:style>
+          <a:lnRef idx="1">
+            <a:schemeClr val="accent1"/>
+          </a:lnRef>
+          <a:fillRef idx="3">
+            <a:schemeClr val="accent1"/>
+          </a:fillRef>
+          <a:effectRef idx="2">
+            <a:schemeClr val="accent1"/>
+          </a:effectRef>
+          <a:fontRef idx="minor">
+            <a:schemeClr val="lt1"/>
+          </a:fontRef>
+        </p:style>
+        <p:txBody>
+          <a:bodyPr rtlCol="0" anchor="ctr"/>
+          <a:lstStyle/>
+          <a:p>
+            <a:pPr algn="ctr"/>
+          </a:p>
+        </p:txBody>
+      </p:sp>
+      <p:sp>
+        <p:nvSpPr>
+          <p:cNvPr id="21" name="TextBox 20"/>
+          <p:cNvSpPr txBox="1"/>
+          <p:nvPr/>
+        </p:nvSpPr>
+        <p:spPr>
+          <a:xfrm>
+            <a:off x="502920" y="4114800"/>
+            <a:ext cx="10972800" cy="731520"/>
+          </a:xfrm>
+          <a:prstGeom prst="rect">
+            <a:avLst/>
+          </a:prstGeom>
+          <a:noFill/>
+        </p:spPr>
+        <p:txBody>
+          <a:bodyPr wrap="square">
+            <a:spAutoFit/>
+          </a:bodyPr>
+          <a:lstStyle/>
+          <a:p>
+            <a:pPr algn="l">
+              <a:defRPr sz="1300" b="0">
+                <a:solidFill>
+                  <a:srgbClr val="1E293B"/>
+                </a:solidFill>
+              </a:defRPr>
+            </a:pPr>
+            <a:r>
+              <a:t>Pilot: highest intermediate-pool complexity + existing Forge APC = fastest time-to-value.</a:t>
+            </a:r>
+          </a:p>
+        </p:txBody>
+      </p:sp>
+    </p:spTree>
+  </p:cSld>
+  <p:clrMapOvr>
+    <a:masterClrMapping/>
+  </p:clrMapOvr>
+</p:sld>
+</file>
+
+<file path=ppt/slides/slide17.xml><?xml version="1.0" encoding="utf-8"?>
+<p:sld xmlns:a="http://schemas.openxmlformats.org/drawingml/2006/main" xmlns:p="http://schemas.openxmlformats.org/presentationml/2006/main" xmlns:r="http://schemas.openxmlformats.org/officeDocument/2006/relationships">
+  <p:cSld>
+    <p:spTree>
+      <p:nvGrpSpPr>
+        <p:cNvPr id="1" name=""/>
+        <p:cNvGrpSpPr/>
+        <p:nvPr/>
+      </p:nvGrpSpPr>
+      <p:grpSpPr/>
+      <p:sp>
+        <p:nvSpPr>
+          <p:cNvPr id="2" name="Rectangle 1"/>
+          <p:cNvSpPr/>
+          <p:nvPr/>
+        </p:nvSpPr>
+        <p:spPr>
+          <a:xfrm>
+            <a:off x="0" y="0"/>
+            <a:ext cx="12191695" cy="6858000"/>
+          </a:xfrm>
+          <a:prstGeom prst="rect">
+            <a:avLst/>
+          </a:prstGeom>
+          <a:solidFill>
+            <a:srgbClr val="003DA5"/>
+          </a:solidFill>
+          <a:ln>
+            <a:noFill/>
+          </a:ln>
+        </p:spPr>
+        <p:style>
+          <a:lnRef idx="1">
+            <a:schemeClr val="accent1"/>
+          </a:lnRef>
+          <a:fillRef idx="3">
+            <a:schemeClr val="accent1"/>
+          </a:fillRef>
+          <a:effectRef idx="2">
+            <a:schemeClr val="accent1"/>
+          </a:effectRef>
+          <a:fontRef idx="minor">
+            <a:schemeClr val="lt1"/>
+          </a:fontRef>
+        </p:style>
+        <p:txBody>
+          <a:bodyPr rtlCol="0" anchor="ctr"/>
+          <a:lstStyle/>
+          <a:p>
+            <a:pPr algn="ctr"/>
+          </a:p>
+        </p:txBody>
+      </p:sp>
+      <p:sp>
+        <p:nvSpPr>
+          <p:cNvPr id="3" name="TextBox 2"/>
+          <p:cNvSpPr txBox="1"/>
+          <p:nvPr/>
+        </p:nvSpPr>
+        <p:spPr>
+          <a:xfrm>
+            <a:off x="731520" y="2011680"/>
+            <a:ext cx="10515600" cy="1371600"/>
+          </a:xfrm>
+          <a:prstGeom prst="rect">
+            <a:avLst/>
+          </a:prstGeom>
+          <a:noFill/>
+        </p:spPr>
+        <p:txBody>
+          <a:bodyPr wrap="square">
+            <a:spAutoFit/>
+          </a:bodyPr>
+          <a:lstStyle/>
+          <a:p>
+            <a:pPr algn="ctr">
+              <a:defRPr sz="4000" b="1">
+                <a:solidFill>
+                  <a:srgbClr val="FFFFFF"/>
+                </a:solidFill>
+              </a:defRPr>
+            </a:pPr>
+            <a:r>
+              <a:t>Optimize the plant,</a:t>
+            </a:r>
+            <a:br/>
+            <a:r>
+              <a:t>not the project portfolio</a:t>
+            </a:r>
+          </a:p>
+        </p:txBody>
+      </p:sp>
+      <p:sp>
+        <p:nvSpPr>
+          <p:cNvPr id="4" name="TextBox 3"/>
+          <p:cNvSpPr txBox="1"/>
+          <p:nvPr/>
+        </p:nvSpPr>
+        <p:spPr>
+          <a:xfrm>
+            <a:off x="731520" y="3657600"/>
+            <a:ext cx="10515600" cy="548640"/>
+          </a:xfrm>
+          <a:prstGeom prst="rect">
+            <a:avLst/>
+          </a:prstGeom>
+          <a:noFill/>
+        </p:spPr>
+        <p:txBody>
+          <a:bodyPr wrap="square">
+            <a:spAutoFit/>
+          </a:bodyPr>
+          <a:lstStyle/>
+          <a:p>
+            <a:pPr algn="ctr">
+              <a:defRPr sz="1800" b="0">
                 <a:solidFill>
                   <a:srgbClr val="F47920"/>
                 </a:solidFill>
               </a:defRPr>
             </a:pPr>
             <a:r>
-              <a:t>Honeywell PWO + HPDT | Executive Briefing</a:t>
+              <a:t>Plantwide Dynamic RTO · Honeywell PWO · HPDT in every IOCL template</a:t>
+            </a:r>
+          </a:p>
+        </p:txBody>
+      </p:sp>
+      <p:sp>
+        <p:nvSpPr>
+          <p:cNvPr id="5" name="TextBox 4"/>
+          <p:cNvSpPr txBox="1"/>
+          <p:nvPr/>
+        </p:nvSpPr>
+        <p:spPr>
+          <a:xfrm>
+            <a:off x="731520" y="4572000"/>
+            <a:ext cx="10515600" cy="457200"/>
+          </a:xfrm>
+          <a:prstGeom prst="rect">
+            <a:avLst/>
+          </a:prstGeom>
+          <a:noFill/>
+        </p:spPr>
+        <p:txBody>
+          <a:bodyPr wrap="square">
+            <a:spAutoFit/>
+          </a:bodyPr>
+          <a:lstStyle/>
+          <a:p>
+            <a:pPr algn="ctr">
+              <a:defRPr sz="1600" b="1">
+                <a:solidFill>
+                  <a:srgbClr val="FFFFFF"/>
+                </a:solidFill>
+              </a:defRPr>
+            </a:pPr>
+            <a:r>
+              <a:t>INDIAN OIL  ·  HONEYWELL PROCESS SOLUTIONS</a:t>
             </a:r>
           </a:p>
         </p:txBody>
@@ -3203,36 +7198,44 @@
       <p:grpSpPr/>
       <p:sp>
         <p:nvSpPr>
-          <p:cNvPr id="2" name="TextBox 1"/>
-          <p:cNvSpPr txBox="1"/>
-          <p:nvPr/>
-        </p:nvSpPr>
-        <p:spPr>
-          <a:xfrm>
-            <a:off x="548640" y="365760"/>
-            <a:ext cx="10972800" cy="914400"/>
+          <p:cNvPr id="2" name="Rectangle 1"/>
+          <p:cNvSpPr/>
+          <p:nvPr/>
+        </p:nvSpPr>
+        <p:spPr>
+          <a:xfrm>
+            <a:off x="0" y="0"/>
+            <a:ext cx="12191695" cy="6858000"/>
           </a:xfrm>
           <a:prstGeom prst="rect">
             <a:avLst/>
           </a:prstGeom>
-          <a:noFill/>
-        </p:spPr>
-        <p:txBody>
-          <a:bodyPr wrap="none">
-            <a:spAutoFit/>
-          </a:bodyPr>
-          <a:lstStyle/>
-          <a:p>
-            <a:pPr>
-              <a:defRPr sz="2800" b="1">
-                <a:solidFill>
-                  <a:srgbClr val="003DA5"/>
-                </a:solidFill>
-              </a:defRPr>
-            </a:pPr>
-            <a:r>
-              <a:t>The gap</a:t>
-            </a:r>
+          <a:solidFill>
+            <a:srgbClr val="F8FAFC"/>
+          </a:solidFill>
+          <a:ln>
+            <a:noFill/>
+          </a:ln>
+        </p:spPr>
+        <p:style>
+          <a:lnRef idx="1">
+            <a:schemeClr val="accent1"/>
+          </a:lnRef>
+          <a:fillRef idx="3">
+            <a:schemeClr val="accent1"/>
+          </a:fillRef>
+          <a:effectRef idx="2">
+            <a:schemeClr val="accent1"/>
+          </a:effectRef>
+          <a:fontRef idx="minor">
+            <a:schemeClr val="lt1"/>
+          </a:fontRef>
+        </p:style>
+        <p:txBody>
+          <a:bodyPr rtlCol="0" anchor="ctr"/>
+          <a:lstStyle/>
+          <a:p>
+            <a:pPr algn="ctr"/>
           </a:p>
         </p:txBody>
       </p:sp>
@@ -3244,8 +7247,8 @@
         </p:nvSpPr>
         <p:spPr>
           <a:xfrm>
-            <a:off x="731520" y="1188720"/>
-            <a:ext cx="10515600" cy="5029200"/>
+            <a:off x="502920" y="320040"/>
+            <a:ext cx="10972800" cy="822960"/>
           </a:xfrm>
           <a:prstGeom prst="rect">
             <a:avLst/>
@@ -3258,27 +7261,309 @@
           </a:bodyPr>
           <a:lstStyle/>
           <a:p>
+            <a:pPr algn="l">
+              <a:defRPr sz="3200" b="1">
+                <a:solidFill>
+                  <a:srgbClr val="003DA5"/>
+                </a:solidFill>
+              </a:defRPr>
+            </a:pPr>
+            <a:r>
+              <a:t>What we will cover</a:t>
+            </a:r>
+          </a:p>
+        </p:txBody>
+      </p:sp>
+      <p:sp>
+        <p:nvSpPr>
+          <p:cNvPr id="4" name="Rectangle 3"/>
+          <p:cNvSpPr/>
+          <p:nvPr/>
+        </p:nvSpPr>
+        <p:spPr>
+          <a:xfrm>
+            <a:off x="502920" y="1051560"/>
+            <a:ext cx="1097280" cy="54864"/>
+          </a:xfrm>
+          <a:prstGeom prst="rect">
+            <a:avLst/>
+          </a:prstGeom>
+          <a:solidFill>
+            <a:srgbClr val="F47920"/>
+          </a:solidFill>
+          <a:ln>
+            <a:noFill/>
+          </a:ln>
+        </p:spPr>
+        <p:style>
+          <a:lnRef idx="1">
+            <a:schemeClr val="accent1"/>
+          </a:lnRef>
+          <a:fillRef idx="3">
+            <a:schemeClr val="accent1"/>
+          </a:fillRef>
+          <a:effectRef idx="2">
+            <a:schemeClr val="accent1"/>
+          </a:effectRef>
+          <a:fontRef idx="minor">
+            <a:schemeClr val="lt1"/>
+          </a:fontRef>
+        </p:style>
+        <p:txBody>
+          <a:bodyPr rtlCol="0" anchor="ctr"/>
+          <a:lstStyle/>
+          <a:p>
+            <a:pPr algn="ctr"/>
+          </a:p>
+        </p:txBody>
+      </p:sp>
+      <p:sp>
+        <p:nvSpPr>
+          <p:cNvPr id="5" name="TextBox 4"/>
+          <p:cNvSpPr txBox="1"/>
+          <p:nvPr/>
+        </p:nvSpPr>
+        <p:spPr>
+          <a:xfrm>
+            <a:off x="502920" y="1554480"/>
+            <a:ext cx="5943600" cy="4572000"/>
+          </a:xfrm>
+          <a:prstGeom prst="rect">
+            <a:avLst/>
+          </a:prstGeom>
+          <a:noFill/>
+        </p:spPr>
+        <p:txBody>
+          <a:bodyPr wrap="square">
+            <a:spAutoFit/>
+          </a:bodyPr>
+          <a:lstStyle/>
+          <a:p>
             <a:pPr>
-              <a:defRPr sz="1800"/>
-            </a:pPr>
-            <a:r>
-              <a:t>LP planning (hours/days) is not synchronized with DCS/APC (minutes).</a:t>
+              <a:spcAft>
+                <a:spcPts val="800"/>
+              </a:spcAft>
+              <a:defRPr sz="1500">
+                <a:solidFill>
+                  <a:srgbClr val="1E293B"/>
+                </a:solidFill>
+              </a:defRPr>
+            </a:pPr>
+            <a:r>
+              <a:t>The profit gap between planning and the control room</a:t>
             </a:r>
           </a:p>
           <a:p>
             <a:pPr>
-              <a:defRPr sz="1800"/>
-            </a:pPr>
-            <a:r>
-              <a:t>Unit-local RTO runs on 2–4 hour steady-state cycles.</a:t>
+              <a:spcAft>
+                <a:spcPts val="800"/>
+              </a:spcAft>
+              <a:defRPr sz="1500">
+                <a:solidFill>
+                  <a:srgbClr val="1E293B"/>
+                </a:solidFill>
+              </a:defRPr>
+            </a:pPr>
+            <a:r>
+              <a:t>Why unit-local RTO under-delivers at IOCL scale</a:t>
             </a:r>
           </a:p>
           <a:p>
             <a:pPr>
-              <a:defRPr sz="1800"/>
-            </a:pPr>
-            <a:r>
-              <a:t>Result: giveaway, off-spec on transients, planner vs operator mismatch.</a:t>
+              <a:spcAft>
+                <a:spcPts val="800"/>
+              </a:spcAft>
+              <a:defRPr sz="1500">
+                <a:solidFill>
+                  <a:srgbClr val="1E293B"/>
+                </a:solidFill>
+              </a:defRPr>
+            </a:pPr>
+            <a:r>
+              <a:t>Honeywell Plantwide Optimizer — Dynamic RTO architecture</a:t>
+            </a:r>
+          </a:p>
+          <a:p>
+            <a:pPr>
+              <a:spcAft>
+                <a:spcPts val="800"/>
+              </a:spcAft>
+              <a:defRPr sz="1500">
+                <a:solidFill>
+                  <a:srgbClr val="1E293B"/>
+                </a:solidFill>
+              </a:defRPr>
+            </a:pPr>
+            <a:r>
+              <a:t>Honeywell Process Digital Twin (HPDT) — model integrity</a:t>
+            </a:r>
+          </a:p>
+          <a:p>
+            <a:pPr>
+              <a:spcAft>
+                <a:spcPts val="800"/>
+              </a:spcAft>
+              <a:defRPr sz="1500">
+                <a:solidFill>
+                  <a:srgbClr val="1E293B"/>
+                </a:solidFill>
+              </a:defRPr>
+            </a:pPr>
+            <a:r>
+              <a:t>Template standard: end-to-end optimization stack</a:t>
+            </a:r>
+          </a:p>
+          <a:p>
+            <a:pPr>
+              <a:spcAft>
+                <a:spcPts val="800"/>
+              </a:spcAft>
+              <a:defRPr sz="1500">
+                <a:solidFill>
+                  <a:srgbClr val="1E293B"/>
+                </a:solidFill>
+              </a:defRPr>
+            </a:pPr>
+            <a:r>
+              <a:t>Investment logic &amp; recommended path for IOCL</a:t>
+            </a:r>
+          </a:p>
+        </p:txBody>
+      </p:sp>
+      <p:sp>
+        <p:nvSpPr>
+          <p:cNvPr id="6" name="Rounded Rectangle 5"/>
+          <p:cNvSpPr/>
+          <p:nvPr/>
+        </p:nvSpPr>
+        <p:spPr>
+          <a:xfrm>
+            <a:off x="6858000" y="1828800"/>
+            <a:ext cx="4572000" cy="1371600"/>
+          </a:xfrm>
+          <a:prstGeom prst="roundRect">
+            <a:avLst/>
+          </a:prstGeom>
+          <a:solidFill>
+            <a:srgbClr val="FFF8F0"/>
+          </a:solidFill>
+          <a:ln w="19050">
+            <a:solidFill>
+              <a:srgbClr val="F47920"/>
+            </a:solidFill>
+          </a:ln>
+        </p:spPr>
+        <p:style>
+          <a:lnRef idx="1">
+            <a:schemeClr val="accent1"/>
+          </a:lnRef>
+          <a:fillRef idx="3">
+            <a:schemeClr val="accent1"/>
+          </a:fillRef>
+          <a:effectRef idx="2">
+            <a:schemeClr val="accent1"/>
+          </a:effectRef>
+          <a:fontRef idx="minor">
+            <a:schemeClr val="lt1"/>
+          </a:fontRef>
+        </p:style>
+        <p:txBody>
+          <a:bodyPr rtlCol="0" anchor="ctr" lIns="137160" tIns="109728"/>
+          <a:lstStyle/>
+          <a:p>
+            <a:pPr algn="ctr">
+              <a:defRPr sz="1400" b="1">
+                <a:solidFill>
+                  <a:srgbClr val="F47920"/>
+                </a:solidFill>
+              </a:defRPr>
+            </a:pPr>
+            <a:r>
+              <a:t>90%</a:t>
+            </a:r>
+          </a:p>
+          <a:p>
+            <a:pPr>
+              <a:spcBef>
+                <a:spcPts val="600"/>
+              </a:spcBef>
+              <a:defRPr sz="1200">
+                <a:solidFill>
+                  <a:srgbClr val="1E293B"/>
+                </a:solidFill>
+              </a:defRPr>
+            </a:pPr>
+            <a:r>
+              <a:t>Of refinery time is NOT steady state — legacy RTO optimizes as if it were.</a:t>
+            </a:r>
+          </a:p>
+        </p:txBody>
+      </p:sp>
+      <p:sp>
+        <p:nvSpPr>
+          <p:cNvPr id="7" name="Rounded Rectangle 6"/>
+          <p:cNvSpPr/>
+          <p:nvPr/>
+        </p:nvSpPr>
+        <p:spPr>
+          <a:xfrm>
+            <a:off x="6858000" y="3474720"/>
+            <a:ext cx="4572000" cy="1371600"/>
+          </a:xfrm>
+          <a:prstGeom prst="roundRect">
+            <a:avLst/>
+          </a:prstGeom>
+          <a:solidFill>
+            <a:srgbClr val="EBF2FF"/>
+          </a:solidFill>
+          <a:ln w="19050">
+            <a:solidFill>
+              <a:srgbClr val="003DA5"/>
+            </a:solidFill>
+          </a:ln>
+        </p:spPr>
+        <p:style>
+          <a:lnRef idx="1">
+            <a:schemeClr val="accent1"/>
+          </a:lnRef>
+          <a:fillRef idx="3">
+            <a:schemeClr val="accent1"/>
+          </a:fillRef>
+          <a:effectRef idx="2">
+            <a:schemeClr val="accent1"/>
+          </a:effectRef>
+          <a:fontRef idx="minor">
+            <a:schemeClr val="lt1"/>
+          </a:fontRef>
+        </p:style>
+        <p:txBody>
+          <a:bodyPr rtlCol="0" anchor="ctr" lIns="137160" tIns="109728"/>
+          <a:lstStyle/>
+          <a:p>
+            <a:pPr algn="ctr">
+              <a:defRPr sz="1400" b="1">
+                <a:solidFill>
+                  <a:srgbClr val="003DA5"/>
+                </a:solidFill>
+              </a:defRPr>
+            </a:pPr>
+            <a:r>
+              <a:t>1 → n</a:t>
+            </a:r>
+          </a:p>
+          <a:p>
+            <a:pPr>
+              <a:spcBef>
+                <a:spcPts val="600"/>
+              </a:spcBef>
+              <a:defRPr sz="1200">
+                <a:solidFill>
+                  <a:srgbClr val="1E293B"/>
+                </a:solidFill>
+              </a:defRPr>
+            </a:pPr>
+            <a:r>
+              <a:t>PWO coordinates the whole site through one dynamic optimization layer.</a:t>
             </a:r>
           </a:p>
         </p:txBody>
@@ -3303,36 +7588,44 @@
       <p:grpSpPr/>
       <p:sp>
         <p:nvSpPr>
-          <p:cNvPr id="2" name="TextBox 1"/>
-          <p:cNvSpPr txBox="1"/>
-          <p:nvPr/>
-        </p:nvSpPr>
-        <p:spPr>
-          <a:xfrm>
-            <a:off x="548640" y="365760"/>
-            <a:ext cx="10972800" cy="914400"/>
+          <p:cNvPr id="2" name="Rectangle 1"/>
+          <p:cNvSpPr/>
+          <p:nvPr/>
+        </p:nvSpPr>
+        <p:spPr>
+          <a:xfrm>
+            <a:off x="0" y="0"/>
+            <a:ext cx="12191695" cy="6858000"/>
           </a:xfrm>
           <a:prstGeom prst="rect">
             <a:avLst/>
           </a:prstGeom>
-          <a:noFill/>
-        </p:spPr>
-        <p:txBody>
-          <a:bodyPr wrap="none">
-            <a:spAutoFit/>
-          </a:bodyPr>
-          <a:lstStyle/>
-          <a:p>
-            <a:pPr>
-              <a:defRPr sz="2800" b="1">
-                <a:solidFill>
-                  <a:srgbClr val="003DA5"/>
-                </a:solidFill>
-              </a:defRPr>
-            </a:pPr>
-            <a:r>
-              <a:t>Why local RTO is poor ROI at IOCL scale</a:t>
-            </a:r>
+          <a:solidFill>
+            <a:srgbClr val="F8FAFC"/>
+          </a:solidFill>
+          <a:ln>
+            <a:noFill/>
+          </a:ln>
+        </p:spPr>
+        <p:style>
+          <a:lnRef idx="1">
+            <a:schemeClr val="accent1"/>
+          </a:lnRef>
+          <a:fillRef idx="3">
+            <a:schemeClr val="accent1"/>
+          </a:fillRef>
+          <a:effectRef idx="2">
+            <a:schemeClr val="accent1"/>
+          </a:effectRef>
+          <a:fontRef idx="minor">
+            <a:schemeClr val="lt1"/>
+          </a:fontRef>
+        </p:style>
+        <p:txBody>
+          <a:bodyPr rtlCol="0" anchor="ctr"/>
+          <a:lstStyle/>
+          <a:p>
+            <a:pPr algn="ctr"/>
           </a:p>
         </p:txBody>
       </p:sp>
@@ -3344,8 +7637,8 @@
         </p:nvSpPr>
         <p:spPr>
           <a:xfrm>
-            <a:off x="731520" y="1188720"/>
-            <a:ext cx="10515600" cy="5029200"/>
+            <a:off x="502920" y="320040"/>
+            <a:ext cx="10972800" cy="822960"/>
           </a:xfrm>
           <a:prstGeom prst="rect">
             <a:avLst/>
@@ -3358,43 +7651,435 @@
           </a:bodyPr>
           <a:lstStyle/>
           <a:p>
-            <a:pPr>
-              <a:defRPr sz="1800"/>
-            </a:pPr>
-            <a:r>
-              <a:t>Duplicate models: RTO + APC + LP — 3× maintenance.</a:t>
-            </a:r>
-          </a:p>
-          <a:p>
-            <a:pPr>
-              <a:defRPr sz="1800"/>
-            </a:pPr>
-            <a:r>
-              <a:t>Single-unit scope ignores FCC/hydro/blend pool tradeoffs.</a:t>
-            </a:r>
-          </a:p>
-          <a:p>
-            <a:pPr>
-              <a:defRPr sz="1800"/>
-            </a:pPr>
-            <a:r>
-              <a:t>Inactive during grade changes (~90% of operating time).</a:t>
-            </a:r>
-          </a:p>
-          <a:p>
-            <a:pPr>
-              <a:defRPr sz="1800"/>
-            </a:pPr>
-            <a:r>
-              <a:t>18–24 month projects; benefits often erode before sustained use.</a:t>
-            </a:r>
-          </a:p>
-          <a:p>
-            <a:pPr>
-              <a:defRPr sz="1800"/>
-            </a:pPr>
-            <a:r>
-              <a:t>Executive view: another local RTO license ≠ optimization strategy.</a:t>
+            <a:pPr algn="l">
+              <a:defRPr sz="3200" b="1">
+                <a:solidFill>
+                  <a:srgbClr val="003DA5"/>
+                </a:solidFill>
+              </a:defRPr>
+            </a:pPr>
+            <a:r>
+              <a:t>IOCL's optimization challenge is enterprise-scale</a:t>
+            </a:r>
+          </a:p>
+        </p:txBody>
+      </p:sp>
+      <p:sp>
+        <p:nvSpPr>
+          <p:cNvPr id="4" name="TextBox 3"/>
+          <p:cNvSpPr txBox="1"/>
+          <p:nvPr/>
+        </p:nvSpPr>
+        <p:spPr>
+          <a:xfrm>
+            <a:off x="502920" y="960120"/>
+            <a:ext cx="10972800" cy="457200"/>
+          </a:xfrm>
+          <a:prstGeom prst="rect">
+            <a:avLst/>
+          </a:prstGeom>
+          <a:noFill/>
+        </p:spPr>
+        <p:txBody>
+          <a:bodyPr wrap="square">
+            <a:spAutoFit/>
+          </a:bodyPr>
+          <a:lstStyle/>
+          <a:p>
+            <a:pPr algn="l">
+              <a:defRPr sz="1400" b="0">
+                <a:solidFill>
+                  <a:srgbClr val="64748B"/>
+                </a:solidFill>
+              </a:defRPr>
+            </a:pPr>
+            <a:r>
+              <a:t>Multiple refineries · molecule management · volatile margins · sustainability</a:t>
+            </a:r>
+          </a:p>
+        </p:txBody>
+      </p:sp>
+      <p:sp>
+        <p:nvSpPr>
+          <p:cNvPr id="5" name="Rectangle 4"/>
+          <p:cNvSpPr/>
+          <p:nvPr/>
+        </p:nvSpPr>
+        <p:spPr>
+          <a:xfrm>
+            <a:off x="502920" y="1325880"/>
+            <a:ext cx="1097280" cy="54864"/>
+          </a:xfrm>
+          <a:prstGeom prst="rect">
+            <a:avLst/>
+          </a:prstGeom>
+          <a:solidFill>
+            <a:srgbClr val="F47920"/>
+          </a:solidFill>
+          <a:ln>
+            <a:noFill/>
+          </a:ln>
+        </p:spPr>
+        <p:style>
+          <a:lnRef idx="1">
+            <a:schemeClr val="accent1"/>
+          </a:lnRef>
+          <a:fillRef idx="3">
+            <a:schemeClr val="accent1"/>
+          </a:fillRef>
+          <a:effectRef idx="2">
+            <a:schemeClr val="accent1"/>
+          </a:effectRef>
+          <a:fontRef idx="minor">
+            <a:schemeClr val="lt1"/>
+          </a:fontRef>
+        </p:style>
+        <p:txBody>
+          <a:bodyPr rtlCol="0" anchor="ctr"/>
+          <a:lstStyle/>
+          <a:p>
+            <a:pPr algn="ctr"/>
+          </a:p>
+        </p:txBody>
+      </p:sp>
+      <p:sp>
+        <p:nvSpPr>
+          <p:cNvPr id="6" name="TextBox 5"/>
+          <p:cNvSpPr txBox="1"/>
+          <p:nvPr/>
+        </p:nvSpPr>
+        <p:spPr>
+          <a:xfrm>
+            <a:off x="502920" y="1508760"/>
+            <a:ext cx="10972800" cy="365760"/>
+          </a:xfrm>
+          <a:prstGeom prst="rect">
+            <a:avLst/>
+          </a:prstGeom>
+          <a:noFill/>
+        </p:spPr>
+        <p:txBody>
+          <a:bodyPr wrap="square">
+            <a:spAutoFit/>
+          </a:bodyPr>
+          <a:lstStyle/>
+          <a:p>
+            <a:pPr algn="l">
+              <a:defRPr sz="1200" b="0">
+                <a:solidFill>
+                  <a:srgbClr val="1E293B"/>
+                </a:solidFill>
+              </a:defRPr>
+            </a:pPr>
+            <a:r>
+              <a:t>LP / PIMS (hours–days)   →   GAP   →   Unit APC (minutes)   |   Local RTO (2–4 hr)</a:t>
+            </a:r>
+          </a:p>
+        </p:txBody>
+      </p:sp>
+      <p:sp>
+        <p:nvSpPr>
+          <p:cNvPr id="7" name="Rounded Rectangle 6"/>
+          <p:cNvSpPr/>
+          <p:nvPr/>
+        </p:nvSpPr>
+        <p:spPr>
+          <a:xfrm>
+            <a:off x="548640" y="2103120"/>
+            <a:ext cx="2011680" cy="1005840"/>
+          </a:xfrm>
+          <a:prstGeom prst="roundRect">
+            <a:avLst/>
+          </a:prstGeom>
+          <a:solidFill>
+            <a:srgbClr val="003DA5"/>
+          </a:solidFill>
+          <a:ln>
+            <a:solidFill>
+              <a:srgbClr val="C8C8D2"/>
+            </a:solidFill>
+          </a:ln>
+        </p:spPr>
+        <p:style>
+          <a:lnRef idx="1">
+            <a:schemeClr val="accent1"/>
+          </a:lnRef>
+          <a:fillRef idx="3">
+            <a:schemeClr val="accent1"/>
+          </a:fillRef>
+          <a:effectRef idx="2">
+            <a:schemeClr val="accent1"/>
+          </a:effectRef>
+          <a:fontRef idx="minor">
+            <a:schemeClr val="lt1"/>
+          </a:fontRef>
+        </p:style>
+        <p:txBody>
+          <a:bodyPr rtlCol="0" anchor="ctr"/>
+          <a:lstStyle/>
+          <a:p>
+            <a:pPr algn="ctr">
+              <a:defRPr sz="1100" b="1">
+                <a:solidFill>
+                  <a:srgbClr val="FFFFFF"/>
+                </a:solidFill>
+              </a:defRPr>
+            </a:pPr>
+            <a:r>
+              <a:t>Business LP</a:t>
+            </a:r>
+          </a:p>
+          <a:p>
+            <a:pPr algn="ctr">
+              <a:defRPr sz="900">
+                <a:solidFill>
+                  <a:srgbClr val="DCE6F0"/>
+                </a:solidFill>
+              </a:defRPr>
+            </a:pPr>
+            <a:r>
+              <a:t>Weekly plan</a:t>
+            </a:r>
+          </a:p>
+        </p:txBody>
+      </p:sp>
+      <p:sp>
+        <p:nvSpPr>
+          <p:cNvPr id="8" name="Rounded Rectangle 7"/>
+          <p:cNvSpPr/>
+          <p:nvPr/>
+        </p:nvSpPr>
+        <p:spPr>
+          <a:xfrm>
+            <a:off x="3017520" y="1920240"/>
+            <a:ext cx="2377440" cy="1371600"/>
+          </a:xfrm>
+          <a:prstGeom prst="roundRect">
+            <a:avLst/>
+          </a:prstGeom>
+          <a:solidFill>
+            <a:srgbClr val="FF4757"/>
+          </a:solidFill>
+          <a:ln>
+            <a:solidFill>
+              <a:srgbClr val="C8C8D2"/>
+            </a:solidFill>
+          </a:ln>
+        </p:spPr>
+        <p:style>
+          <a:lnRef idx="1">
+            <a:schemeClr val="accent1"/>
+          </a:lnRef>
+          <a:fillRef idx="3">
+            <a:schemeClr val="accent1"/>
+          </a:fillRef>
+          <a:effectRef idx="2">
+            <a:schemeClr val="accent1"/>
+          </a:effectRef>
+          <a:fontRef idx="minor">
+            <a:schemeClr val="lt1"/>
+          </a:fontRef>
+        </p:style>
+        <p:txBody>
+          <a:bodyPr rtlCol="0" anchor="ctr"/>
+          <a:lstStyle/>
+          <a:p>
+            <a:pPr algn="ctr">
+              <a:defRPr sz="1100" b="1">
+                <a:solidFill>
+                  <a:srgbClr val="FFFFFF"/>
+                </a:solidFill>
+              </a:defRPr>
+            </a:pPr>
+            <a:r>
+              <a:t>Disconnected</a:t>
+            </a:r>
+          </a:p>
+          <a:p>
+            <a:pPr algn="ctr">
+              <a:defRPr sz="900">
+                <a:solidFill>
+                  <a:srgbClr val="DCE6F0"/>
+                </a:solidFill>
+              </a:defRPr>
+            </a:pPr>
+            <a:r>
+              <a:t>Local RTO islands</a:t>
+            </a:r>
+            <a:br/>
+            <a:r>
+              <a:t>Duplicate models</a:t>
+            </a:r>
+          </a:p>
+        </p:txBody>
+      </p:sp>
+      <p:sp>
+        <p:nvSpPr>
+          <p:cNvPr id="9" name="Rounded Rectangle 8"/>
+          <p:cNvSpPr/>
+          <p:nvPr/>
+        </p:nvSpPr>
+        <p:spPr>
+          <a:xfrm>
+            <a:off x="6217920" y="2103120"/>
+            <a:ext cx="2011680" cy="1005840"/>
+          </a:xfrm>
+          <a:prstGeom prst="roundRect">
+            <a:avLst/>
+          </a:prstGeom>
+          <a:solidFill>
+            <a:srgbClr val="334155"/>
+          </a:solidFill>
+          <a:ln>
+            <a:solidFill>
+              <a:srgbClr val="C8C8D2"/>
+            </a:solidFill>
+          </a:ln>
+        </p:spPr>
+        <p:style>
+          <a:lnRef idx="1">
+            <a:schemeClr val="accent1"/>
+          </a:lnRef>
+          <a:fillRef idx="3">
+            <a:schemeClr val="accent1"/>
+          </a:fillRef>
+          <a:effectRef idx="2">
+            <a:schemeClr val="accent1"/>
+          </a:effectRef>
+          <a:fontRef idx="minor">
+            <a:schemeClr val="lt1"/>
+          </a:fontRef>
+        </p:style>
+        <p:txBody>
+          <a:bodyPr rtlCol="0" anchor="ctr"/>
+          <a:lstStyle/>
+          <a:p>
+            <a:pPr algn="ctr">
+              <a:defRPr sz="1100" b="1">
+                <a:solidFill>
+                  <a:srgbClr val="FFFFFF"/>
+                </a:solidFill>
+              </a:defRPr>
+            </a:pPr>
+            <a:r>
+              <a:t>DCS / APC</a:t>
+            </a:r>
+          </a:p>
+          <a:p>
+            <a:pPr algn="ctr">
+              <a:defRPr sz="900">
+                <a:solidFill>
+                  <a:srgbClr val="DCE6F0"/>
+                </a:solidFill>
+              </a:defRPr>
+            </a:pPr>
+            <a:r>
+              <a:t>Real time</a:t>
+            </a:r>
+          </a:p>
+        </p:txBody>
+      </p:sp>
+      <p:cxnSp>
+        <p:nvCxnSpPr>
+          <p:cNvPr id="10" name="Connector 9"/>
+          <p:cNvCxnSpPr/>
+          <p:nvPr/>
+        </p:nvCxnSpPr>
+        <p:spPr>
+          <a:xfrm>
+            <a:off x="2560320" y="2606040"/>
+            <a:ext cx="457200" cy="0"/>
+          </a:xfrm>
+          <a:prstGeom prst="line">
+            <a:avLst/>
+          </a:prstGeom>
+          <a:ln w="25400">
+            <a:solidFill>
+              <a:srgbClr val="F47920"/>
+            </a:solidFill>
+          </a:ln>
+        </p:spPr>
+        <p:style>
+          <a:lnRef idx="2">
+            <a:schemeClr val="accent1"/>
+          </a:lnRef>
+          <a:fillRef idx="0">
+            <a:schemeClr val="accent1"/>
+          </a:fillRef>
+          <a:effectRef idx="1">
+            <a:schemeClr val="accent1"/>
+          </a:effectRef>
+          <a:fontRef idx="minor">
+            <a:schemeClr val="tx1"/>
+          </a:fontRef>
+        </p:style>
+      </p:cxnSp>
+      <p:cxnSp>
+        <p:nvCxnSpPr>
+          <p:cNvPr id="11" name="Connector 10"/>
+          <p:cNvCxnSpPr/>
+          <p:nvPr/>
+        </p:nvCxnSpPr>
+        <p:spPr>
+          <a:xfrm>
+            <a:off x="5394960" y="2606040"/>
+            <a:ext cx="822960" cy="0"/>
+          </a:xfrm>
+          <a:prstGeom prst="line">
+            <a:avLst/>
+          </a:prstGeom>
+          <a:ln w="25400">
+            <a:solidFill>
+              <a:srgbClr val="F47920"/>
+            </a:solidFill>
+          </a:ln>
+        </p:spPr>
+        <p:style>
+          <a:lnRef idx="2">
+            <a:schemeClr val="accent1"/>
+          </a:lnRef>
+          <a:fillRef idx="0">
+            <a:schemeClr val="accent1"/>
+          </a:fillRef>
+          <a:effectRef idx="1">
+            <a:schemeClr val="accent1"/>
+          </a:effectRef>
+          <a:fontRef idx="minor">
+            <a:schemeClr val="tx1"/>
+          </a:fontRef>
+        </p:style>
+      </p:cxnSp>
+      <p:sp>
+        <p:nvSpPr>
+          <p:cNvPr id="12" name="TextBox 11"/>
+          <p:cNvSpPr txBox="1"/>
+          <p:nvPr/>
+        </p:nvSpPr>
+        <p:spPr>
+          <a:xfrm>
+            <a:off x="502920" y="3840480"/>
+            <a:ext cx="10972800" cy="548640"/>
+          </a:xfrm>
+          <a:prstGeom prst="rect">
+            <a:avLst/>
+          </a:prstGeom>
+          <a:noFill/>
+        </p:spPr>
+        <p:txBody>
+          <a:bodyPr wrap="square">
+            <a:spAutoFit/>
+          </a:bodyPr>
+          <a:lstStyle/>
+          <a:p>
+            <a:pPr algn="ctr">
+              <a:defRPr sz="1400" b="1">
+                <a:solidFill>
+                  <a:srgbClr val="F47920"/>
+                </a:solidFill>
+              </a:defRPr>
+            </a:pPr>
+            <a:r>
+              <a:t>Result: quality giveaway, off-spec during moves, planner vs operator mismatch</a:t>
             </a:r>
           </a:p>
         </p:txBody>
@@ -3419,36 +8104,44 @@
       <p:grpSpPr/>
       <p:sp>
         <p:nvSpPr>
-          <p:cNvPr id="2" name="TextBox 1"/>
-          <p:cNvSpPr txBox="1"/>
-          <p:nvPr/>
-        </p:nvSpPr>
-        <p:spPr>
-          <a:xfrm>
-            <a:off x="548640" y="365760"/>
-            <a:ext cx="10972800" cy="914400"/>
+          <p:cNvPr id="2" name="Rectangle 1"/>
+          <p:cNvSpPr/>
+          <p:nvPr/>
+        </p:nvSpPr>
+        <p:spPr>
+          <a:xfrm>
+            <a:off x="0" y="0"/>
+            <a:ext cx="12191695" cy="6858000"/>
           </a:xfrm>
           <a:prstGeom prst="rect">
             <a:avLst/>
           </a:prstGeom>
-          <a:noFill/>
-        </p:spPr>
-        <p:txBody>
-          <a:bodyPr wrap="none">
-            <a:spAutoFit/>
-          </a:bodyPr>
-          <a:lstStyle/>
-          <a:p>
-            <a:pPr>
-              <a:defRPr sz="2800" b="1">
-                <a:solidFill>
-                  <a:srgbClr val="003DA5"/>
-                </a:solidFill>
-              </a:defRPr>
-            </a:pPr>
-            <a:r>
-              <a:t>Honeywell Plantwide Optimizer (Dynamic RTO)</a:t>
-            </a:r>
+          <a:solidFill>
+            <a:srgbClr val="F8FAFC"/>
+          </a:solidFill>
+          <a:ln>
+            <a:noFill/>
+          </a:ln>
+        </p:spPr>
+        <p:style>
+          <a:lnRef idx="1">
+            <a:schemeClr val="accent1"/>
+          </a:lnRef>
+          <a:fillRef idx="3">
+            <a:schemeClr val="accent1"/>
+          </a:fillRef>
+          <a:effectRef idx="2">
+            <a:schemeClr val="accent1"/>
+          </a:effectRef>
+          <a:fontRef idx="minor">
+            <a:schemeClr val="lt1"/>
+          </a:fontRef>
+        </p:style>
+        <p:txBody>
+          <a:bodyPr rtlCol="0" anchor="ctr"/>
+          <a:lstStyle/>
+          <a:p>
+            <a:pPr algn="ctr"/>
           </a:p>
         </p:txBody>
       </p:sp>
@@ -3460,8 +8153,8 @@
         </p:nvSpPr>
         <p:spPr>
           <a:xfrm>
-            <a:off x="731520" y="1188720"/>
-            <a:ext cx="10515600" cy="5029200"/>
+            <a:off x="502920" y="320040"/>
+            <a:ext cx="10972800" cy="822960"/>
           </a:xfrm>
           <a:prstGeom prst="rect">
             <a:avLst/>
@@ -3474,35 +8167,210 @@
           </a:bodyPr>
           <a:lstStyle/>
           <a:p>
+            <a:pPr algn="l">
+              <a:defRPr sz="3200" b="1">
+                <a:solidFill>
+                  <a:srgbClr val="003DA5"/>
+                </a:solidFill>
+              </a:defRPr>
+            </a:pPr>
+            <a:r>
+              <a:t>Traditional steady-state RTO — how it was built to work</a:t>
+            </a:r>
+          </a:p>
+        </p:txBody>
+      </p:sp>
+      <p:sp>
+        <p:nvSpPr>
+          <p:cNvPr id="4" name="Rectangle 3"/>
+          <p:cNvSpPr/>
+          <p:nvPr/>
+        </p:nvSpPr>
+        <p:spPr>
+          <a:xfrm>
+            <a:off x="502920" y="1051560"/>
+            <a:ext cx="1097280" cy="54864"/>
+          </a:xfrm>
+          <a:prstGeom prst="rect">
+            <a:avLst/>
+          </a:prstGeom>
+          <a:solidFill>
+            <a:srgbClr val="F47920"/>
+          </a:solidFill>
+          <a:ln>
+            <a:noFill/>
+          </a:ln>
+        </p:spPr>
+        <p:style>
+          <a:lnRef idx="1">
+            <a:schemeClr val="accent1"/>
+          </a:lnRef>
+          <a:fillRef idx="3">
+            <a:schemeClr val="accent1"/>
+          </a:fillRef>
+          <a:effectRef idx="2">
+            <a:schemeClr val="accent1"/>
+          </a:effectRef>
+          <a:fontRef idx="minor">
+            <a:schemeClr val="lt1"/>
+          </a:fontRef>
+        </p:style>
+        <p:txBody>
+          <a:bodyPr rtlCol="0" anchor="ctr"/>
+          <a:lstStyle/>
+          <a:p>
+            <a:pPr algn="ctr"/>
+          </a:p>
+        </p:txBody>
+      </p:sp>
+      <p:sp>
+        <p:nvSpPr>
+          <p:cNvPr id="5" name="TextBox 4"/>
+          <p:cNvSpPr txBox="1"/>
+          <p:nvPr/>
+        </p:nvSpPr>
+        <p:spPr>
+          <a:xfrm>
+            <a:off x="502920" y="1600200"/>
+            <a:ext cx="5669280" cy="4114800"/>
+          </a:xfrm>
+          <a:prstGeom prst="rect">
+            <a:avLst/>
+          </a:prstGeom>
+          <a:noFill/>
+        </p:spPr>
+        <p:txBody>
+          <a:bodyPr wrap="square">
+            <a:spAutoFit/>
+          </a:bodyPr>
+          <a:lstStyle/>
+          <a:p>
             <a:pPr>
-              <a:defRPr sz="1800"/>
-            </a:pPr>
-            <a:r>
-              <a:t>1→n MPC cascade: site optimizer over unit Forge APC applications.</a:t>
+              <a:spcAft>
+                <a:spcPts val="800"/>
+              </a:spcAft>
+              <a:defRPr sz="1600">
+                <a:solidFill>
+                  <a:srgbClr val="1E293B"/>
+                </a:solidFill>
+              </a:defRPr>
+            </a:pPr>
+            <a:r>
+              <a:t>Large first-principles or rigorous simulation model per unit</a:t>
             </a:r>
           </a:p>
           <a:p>
             <a:pPr>
-              <a:defRPr sz="1800"/>
-            </a:pPr>
-            <a:r>
-              <a:t>Dynamic models — execute ~every minute, not only at steady state.</a:t>
+              <a:spcAft>
+                <a:spcPts val="800"/>
+              </a:spcAft>
+              <a:defRPr sz="1600">
+                <a:solidFill>
+                  <a:srgbClr val="1E293B"/>
+                </a:solidFill>
+              </a:defRPr>
+            </a:pPr>
+            <a:r>
+              <a:t>Solve economic optimum assuming steady state</a:t>
             </a:r>
           </a:p>
           <a:p>
             <a:pPr>
-              <a:defRPr sz="1800"/>
-            </a:pPr>
-            <a:r>
-              <a:t>Inherits planning yield model &amp; economics; proxy limits from APC.</a:t>
+              <a:spcAft>
+                <a:spcPts val="800"/>
+              </a:spcAft>
+              <a:defRPr sz="1600">
+                <a:solidFill>
+                  <a:srgbClr val="1E293B"/>
+                </a:solidFill>
+              </a:defRPr>
+            </a:pPr>
+            <a:r>
+              <a:t>Execute every 2–4 hours; push setpoints / bounds to MPC</a:t>
             </a:r>
           </a:p>
           <a:p>
             <a:pPr>
-              <a:defRPr sz="1800"/>
-            </a:pPr>
-            <a:r>
-              <a:t>HP 2022 Best Automation Technology; gate-to-gate with Blend Optimizer.</a:t>
+              <a:spcAft>
+                <a:spcPts val="800"/>
+              </a:spcAft>
+              <a:defRPr sz="1600">
+                <a:solidFill>
+                  <a:srgbClr val="1E293B"/>
+                </a:solidFill>
+              </a:defRPr>
+            </a:pPr>
+            <a:r>
+              <a:t>Separate model team, APC team, and planner</a:t>
+            </a:r>
+          </a:p>
+        </p:txBody>
+      </p:sp>
+      <p:sp>
+        <p:nvSpPr>
+          <p:cNvPr id="6" name="Rounded Rectangle 5"/>
+          <p:cNvSpPr/>
+          <p:nvPr/>
+        </p:nvSpPr>
+        <p:spPr>
+          <a:xfrm>
+            <a:off x="6583680" y="2011680"/>
+            <a:ext cx="5029200" cy="2011680"/>
+          </a:xfrm>
+          <a:prstGeom prst="roundRect">
+            <a:avLst/>
+          </a:prstGeom>
+          <a:solidFill>
+            <a:srgbClr val="FFF0F2"/>
+          </a:solidFill>
+          <a:ln w="19050">
+            <a:solidFill>
+              <a:srgbClr val="FF4757"/>
+            </a:solidFill>
+          </a:ln>
+        </p:spPr>
+        <p:style>
+          <a:lnRef idx="1">
+            <a:schemeClr val="accent1"/>
+          </a:lnRef>
+          <a:fillRef idx="3">
+            <a:schemeClr val="accent1"/>
+          </a:fillRef>
+          <a:effectRef idx="2">
+            <a:schemeClr val="accent1"/>
+          </a:effectRef>
+          <a:fontRef idx="minor">
+            <a:schemeClr val="lt1"/>
+          </a:fontRef>
+        </p:style>
+        <p:txBody>
+          <a:bodyPr rtlCol="0" anchor="ctr" lIns="137160" tIns="109728"/>
+          <a:lstStyle/>
+          <a:p>
+            <a:pPr algn="ctr">
+              <a:defRPr sz="1400" b="1">
+                <a:solidFill>
+                  <a:srgbClr val="FF4757"/>
+                </a:solidFill>
+              </a:defRPr>
+            </a:pPr>
+            <a:r>
+              <a:t>Designed for the 1990s operating model</a:t>
+            </a:r>
+          </a:p>
+          <a:p>
+            <a:pPr>
+              <a:spcBef>
+                <a:spcPts val="600"/>
+              </a:spcBef>
+              <a:defRPr sz="1200">
+                <a:solidFill>
+                  <a:srgbClr val="1E293B"/>
+                </a:solidFill>
+              </a:defRPr>
+            </a:pPr>
+            <a:r>
+              <a:t>Plants ran longer on stable feeds; optimization was a periodic advisory layer — not continuous profit execution.</a:t>
             </a:r>
           </a:p>
         </p:txBody>
@@ -3527,36 +8395,44 @@
       <p:grpSpPr/>
       <p:sp>
         <p:nvSpPr>
-          <p:cNvPr id="2" name="TextBox 1"/>
-          <p:cNvSpPr txBox="1"/>
-          <p:nvPr/>
-        </p:nvSpPr>
-        <p:spPr>
-          <a:xfrm>
-            <a:off x="548640" y="365760"/>
-            <a:ext cx="10972800" cy="914400"/>
+          <p:cNvPr id="2" name="Rectangle 1"/>
+          <p:cNvSpPr/>
+          <p:nvPr/>
+        </p:nvSpPr>
+        <p:spPr>
+          <a:xfrm>
+            <a:off x="0" y="0"/>
+            <a:ext cx="12191695" cy="6858000"/>
           </a:xfrm>
           <a:prstGeom prst="rect">
             <a:avLst/>
           </a:prstGeom>
-          <a:noFill/>
-        </p:spPr>
-        <p:txBody>
-          <a:bodyPr wrap="none">
-            <a:spAutoFit/>
-          </a:bodyPr>
-          <a:lstStyle/>
-          <a:p>
-            <a:pPr>
-              <a:defRPr sz="2800" b="1">
-                <a:solidFill>
-                  <a:srgbClr val="003DA5"/>
-                </a:solidFill>
-              </a:defRPr>
-            </a:pPr>
-            <a:r>
-              <a:t>HPDT + Honeywell Template</a:t>
-            </a:r>
+          <a:solidFill>
+            <a:srgbClr val="23141C"/>
+          </a:solidFill>
+          <a:ln>
+            <a:noFill/>
+          </a:ln>
+        </p:spPr>
+        <p:style>
+          <a:lnRef idx="1">
+            <a:schemeClr val="accent1"/>
+          </a:lnRef>
+          <a:fillRef idx="3">
+            <a:schemeClr val="accent1"/>
+          </a:fillRef>
+          <a:effectRef idx="2">
+            <a:schemeClr val="accent1"/>
+          </a:effectRef>
+          <a:fontRef idx="minor">
+            <a:schemeClr val="lt1"/>
+          </a:fontRef>
+        </p:style>
+        <p:txBody>
+          <a:bodyPr rtlCol="0" anchor="ctr"/>
+          <a:lstStyle/>
+          <a:p>
+            <a:pPr algn="ctr"/>
           </a:p>
         </p:txBody>
       </p:sp>
@@ -3568,8 +8444,8 @@
         </p:nvSpPr>
         <p:spPr>
           <a:xfrm>
-            <a:off x="731520" y="1188720"/>
-            <a:ext cx="10515600" cy="5029200"/>
+            <a:off x="502920" y="320040"/>
+            <a:ext cx="10972800" cy="822960"/>
           </a:xfrm>
           <a:prstGeom prst="rect">
             <a:avLst/>
@@ -3582,35 +8458,367 @@
           </a:bodyPr>
           <a:lstStyle/>
           <a:p>
-            <a:pPr>
-              <a:defRPr sz="1800"/>
-            </a:pPr>
-            <a:r>
-              <a:t>HPDT: online digital twin — align LP yields with actual unit capability.</a:t>
-            </a:r>
-          </a:p>
-          <a:p>
-            <a:pPr>
-              <a:defRPr sz="1800"/>
-            </a:pPr>
-            <a:r>
-              <a:t>Template must-haves: Forge APC → PWO → HPDT → Blend → CPA-U.</a:t>
-            </a:r>
-          </a:p>
-          <a:p>
-            <a:pPr>
-              <a:defRPr sz="1800"/>
-            </a:pPr>
-            <a:r>
-              <a:t>Mandate PWO + HPDT; defer standalone local RTO expansions.</a:t>
-            </a:r>
-          </a:p>
-          <a:p>
-            <a:pPr>
-              <a:defRPr sz="1800"/>
-            </a:pPr>
-            <a:r>
-              <a:t>Phased rollout: APC baseline → HPDT → PWO pilot → national replicate.</a:t>
+            <a:pPr algn="l">
+              <a:defRPr sz="3200" b="1">
+                <a:solidFill>
+                  <a:srgbClr val="FFFFFF"/>
+                </a:solidFill>
+              </a:defRPr>
+            </a:pPr>
+            <a:r>
+              <a:t>Unit-local RTO at IOCL: diminishing returns</a:t>
+            </a:r>
+          </a:p>
+        </p:txBody>
+      </p:sp>
+      <p:sp>
+        <p:nvSpPr>
+          <p:cNvPr id="4" name="Rectangle 3"/>
+          <p:cNvSpPr/>
+          <p:nvPr/>
+        </p:nvSpPr>
+        <p:spPr>
+          <a:xfrm>
+            <a:off x="502920" y="1051560"/>
+            <a:ext cx="1097280" cy="54864"/>
+          </a:xfrm>
+          <a:prstGeom prst="rect">
+            <a:avLst/>
+          </a:prstGeom>
+          <a:solidFill>
+            <a:srgbClr val="F47920"/>
+          </a:solidFill>
+          <a:ln>
+            <a:noFill/>
+          </a:ln>
+        </p:spPr>
+        <p:style>
+          <a:lnRef idx="1">
+            <a:schemeClr val="accent1"/>
+          </a:lnRef>
+          <a:fillRef idx="3">
+            <a:schemeClr val="accent1"/>
+          </a:fillRef>
+          <a:effectRef idx="2">
+            <a:schemeClr val="accent1"/>
+          </a:effectRef>
+          <a:fontRef idx="minor">
+            <a:schemeClr val="lt1"/>
+          </a:fontRef>
+        </p:style>
+        <p:txBody>
+          <a:bodyPr rtlCol="0" anchor="ctr"/>
+          <a:lstStyle/>
+          <a:p>
+            <a:pPr algn="ctr"/>
+          </a:p>
+        </p:txBody>
+      </p:sp>
+      <p:graphicFrame>
+        <p:nvGraphicFramePr>
+          <p:cNvPr id="5" name="Table 4"/>
+          <p:cNvGraphicFramePr>
+            <a:graphicFrameLocks noGrp="1"/>
+          </p:cNvGraphicFramePr>
+          <p:nvPr/>
+        </p:nvGraphicFramePr>
+        <p:xfrm>
+          <a:off x="457200" y="1600200"/>
+          <a:ext cx="11247120" cy="1920239"/>
+        </p:xfrm>
+        <a:graphic>
+          <a:graphicData uri="http://schemas.openxmlformats.org/drawingml/2006/table">
+            <a:tbl>
+              <a:tblPr firstRow="1" bandRow="1">
+                <a:tableStyleId>{5C22544A-7EE6-4342-B048-85BDC9FD1C3A}</a:tableStyleId>
+              </a:tblPr>
+              <a:tblGrid>
+                <a:gridCol w="5669280"/>
+                <a:gridCol w="5577840"/>
+              </a:tblGrid>
+              <a:tr h="320039">
+                <a:tc>
+                  <a:txBody>
+                    <a:bodyPr/>
+                    <a:lstStyle/>
+                    <a:p>
+                      <a:pPr>
+                        <a:defRPr sz="1200" b="1">
+                          <a:solidFill>
+                            <a:srgbClr val="FFFFFF"/>
+                          </a:solidFill>
+                        </a:defRPr>
+                      </a:pPr>
+                      <a:r>
+                        <a:t>Typical local RTO reality</a:t>
+                      </a:r>
+                    </a:p>
+                  </a:txBody>
+                  <a:tcPr>
+                    <a:solidFill>
+                      <a:srgbClr val="003DA5"/>
+                    </a:solidFill>
+                  </a:tcPr>
+                </a:tc>
+                <a:tc>
+                  <a:txBody>
+                    <a:bodyPr/>
+                    <a:lstStyle/>
+                    <a:p>
+                      <a:pPr>
+                        <a:defRPr sz="1200" b="1">
+                          <a:solidFill>
+                            <a:srgbClr val="FFFFFF"/>
+                          </a:solidFill>
+                        </a:defRPr>
+                      </a:pPr>
+                      <a:r>
+                        <a:t>Business impact</a:t>
+                      </a:r>
+                    </a:p>
+                  </a:txBody>
+                  <a:tcPr>
+                    <a:solidFill>
+                      <a:srgbClr val="003DA5"/>
+                    </a:solidFill>
+                  </a:tcPr>
+                </a:tc>
+              </a:tr>
+              <a:tr h="320039">
+                <a:tc>
+                  <a:txBody>
+                    <a:bodyPr/>
+                    <a:lstStyle/>
+                    <a:p>
+                      <a:pPr>
+                        <a:defRPr sz="1100" b="0">
+                          <a:solidFill>
+                            <a:srgbClr val="1E293B"/>
+                          </a:solidFill>
+                        </a:defRPr>
+                      </a:pPr>
+                      <a:r>
+                        <a:t>Duplicate models (RTO + APC + LP)</a:t>
+                      </a:r>
+                    </a:p>
+                  </a:txBody>
+                  <a:tcPr/>
+                </a:tc>
+                <a:tc>
+                  <a:txBody>
+                    <a:bodyPr/>
+                    <a:lstStyle/>
+                    <a:p>
+                      <a:pPr>
+                        <a:defRPr sz="1100" b="0">
+                          <a:solidFill>
+                            <a:srgbClr val="1E293B"/>
+                          </a:solidFill>
+                        </a:defRPr>
+                      </a:pPr>
+                      <a:r>
+                        <a:t>3× engineering &amp; maintenance cost</a:t>
+                      </a:r>
+                    </a:p>
+                  </a:txBody>
+                  <a:tcPr/>
+                </a:tc>
+              </a:tr>
+              <a:tr h="320039">
+                <a:tc>
+                  <a:txBody>
+                    <a:bodyPr/>
+                    <a:lstStyle/>
+                    <a:p>
+                      <a:pPr>
+                        <a:defRPr sz="1100" b="0">
+                          <a:solidFill>
+                            <a:srgbClr val="1E293B"/>
+                          </a:solidFill>
+                        </a:defRPr>
+                      </a:pPr>
+                      <a:r>
+                        <a:t>Optimizes one unit, ignores site balances</a:t>
+                      </a:r>
+                    </a:p>
+                  </a:txBody>
+                  <a:tcPr/>
+                </a:tc>
+                <a:tc>
+                  <a:txBody>
+                    <a:bodyPr/>
+                    <a:lstStyle/>
+                    <a:p>
+                      <a:pPr>
+                        <a:defRPr sz="1100" b="0">
+                          <a:solidFill>
+                            <a:srgbClr val="1E293B"/>
+                          </a:solidFill>
+                        </a:defRPr>
+                      </a:pPr>
+                      <a:r>
+                        <a:t>FCC vs hydrocracker vs blend conflicts</a:t>
+                      </a:r>
+                    </a:p>
+                  </a:txBody>
+                  <a:tcPr/>
+                </a:tc>
+              </a:tr>
+              <a:tr h="320039">
+                <a:tc>
+                  <a:txBody>
+                    <a:bodyPr/>
+                    <a:lstStyle/>
+                    <a:p>
+                      <a:pPr>
+                        <a:defRPr sz="1100" b="0">
+                          <a:solidFill>
+                            <a:srgbClr val="1E293B"/>
+                          </a:solidFill>
+                        </a:defRPr>
+                      </a:pPr>
+                      <a:r>
+                        <a:t>Inactive during transients &amp; grade changes</a:t>
+                      </a:r>
+                    </a:p>
+                  </a:txBody>
+                  <a:tcPr/>
+                </a:tc>
+                <a:tc>
+                  <a:txBody>
+                    <a:bodyPr/>
+                    <a:lstStyle/>
+                    <a:p>
+                      <a:pPr>
+                        <a:defRPr sz="1100" b="0">
+                          <a:solidFill>
+                            <a:srgbClr val="1E293B"/>
+                          </a:solidFill>
+                        </a:defRPr>
+                      </a:pPr>
+                      <a:r>
+                        <a:t>Off-spec on ~90% of operating time</a:t>
+                      </a:r>
+                    </a:p>
+                  </a:txBody>
+                  <a:tcPr/>
+                </a:tc>
+              </a:tr>
+              <a:tr h="320039">
+                <a:tc>
+                  <a:txBody>
+                    <a:bodyPr/>
+                    <a:lstStyle/>
+                    <a:p>
+                      <a:pPr>
+                        <a:defRPr sz="1100" b="0">
+                          <a:solidFill>
+                            <a:srgbClr val="1E293B"/>
+                          </a:solidFill>
+                        </a:defRPr>
+                      </a:pPr>
+                      <a:r>
+                        <a:t>18–24 month projects</a:t>
+                      </a:r>
+                    </a:p>
+                  </a:txBody>
+                  <a:tcPr/>
+                </a:tc>
+                <a:tc>
+                  <a:txBody>
+                    <a:bodyPr/>
+                    <a:lstStyle/>
+                    <a:p>
+                      <a:pPr>
+                        <a:defRPr sz="1100" b="0">
+                          <a:solidFill>
+                            <a:srgbClr val="1E293B"/>
+                          </a:solidFill>
+                        </a:defRPr>
+                      </a:pPr>
+                      <a:r>
+                        <a:t>Benefits erode before payback</a:t>
+                      </a:r>
+                    </a:p>
+                  </a:txBody>
+                  <a:tcPr/>
+                </a:tc>
+              </a:tr>
+              <a:tr h="320044">
+                <a:tc>
+                  <a:txBody>
+                    <a:bodyPr/>
+                    <a:lstStyle/>
+                    <a:p>
+                      <a:pPr>
+                        <a:defRPr sz="1100" b="0">
+                          <a:solidFill>
+                            <a:srgbClr val="1E293B"/>
+                          </a:solidFill>
+                        </a:defRPr>
+                      </a:pPr>
+                      <a:r>
+                        <a:t>Often OFF in operations</a:t>
+                      </a:r>
+                    </a:p>
+                  </a:txBody>
+                  <a:tcPr/>
+                </a:tc>
+                <a:tc>
+                  <a:txBody>
+                    <a:bodyPr/>
+                    <a:lstStyle/>
+                    <a:p>
+                      <a:pPr>
+                        <a:defRPr sz="1100" b="0">
+                          <a:solidFill>
+                            <a:srgbClr val="1E293B"/>
+                          </a:solidFill>
+                        </a:defRPr>
+                      </a:pPr>
+                      <a:r>
+                        <a:t>Sunk CAPEX, no sustained margin lift</a:t>
+                      </a:r>
+                    </a:p>
+                  </a:txBody>
+                  <a:tcPr/>
+                </a:tc>
+              </a:tr>
+            </a:tbl>
+          </a:graphicData>
+        </a:graphic>
+      </p:graphicFrame>
+      <p:sp>
+        <p:nvSpPr>
+          <p:cNvPr id="6" name="TextBox 5"/>
+          <p:cNvSpPr txBox="1"/>
+          <p:nvPr/>
+        </p:nvSpPr>
+        <p:spPr>
+          <a:xfrm>
+            <a:off x="502920" y="5029200"/>
+            <a:ext cx="10972800" cy="731520"/>
+          </a:xfrm>
+          <a:prstGeom prst="rect">
+            <a:avLst/>
+          </a:prstGeom>
+          <a:noFill/>
+        </p:spPr>
+        <p:txBody>
+          <a:bodyPr wrap="square">
+            <a:spAutoFit/>
+          </a:bodyPr>
+          <a:lstStyle/>
+          <a:p>
+            <a:pPr algn="l">
+              <a:defRPr sz="1400" b="1">
+                <a:solidFill>
+                  <a:srgbClr val="F47920"/>
+                </a:solidFill>
+              </a:defRPr>
+            </a:pPr>
+            <a:r>
+              <a:t>Executive view: Another local RTO without plantwide coordination is optimization SPEND, not optimization STRATEGY.</a:t>
             </a:r>
           </a:p>
         </p:txBody>
@@ -3648,7 +8856,7 @@
             <a:avLst/>
           </a:prstGeom>
           <a:solidFill>
-            <a:srgbClr val="0F2744"/>
+            <a:srgbClr val="F8FAFC"/>
           </a:solidFill>
           <a:ln>
             <a:noFill/>
@@ -3684,8 +8892,8 @@
         </p:nvSpPr>
         <p:spPr>
           <a:xfrm>
-            <a:off x="731520" y="2011680"/>
-            <a:ext cx="10515600" cy="1828800"/>
+            <a:off x="502920" y="320040"/>
+            <a:ext cx="10972800" cy="822960"/>
           </a:xfrm>
           <a:prstGeom prst="rect">
             <a:avLst/>
@@ -3693,32 +8901,2198 @@
           <a:noFill/>
         </p:spPr>
         <p:txBody>
-          <a:bodyPr wrap="none">
+          <a:bodyPr wrap="square">
             <a:spAutoFit/>
           </a:bodyPr>
           <a:lstStyle/>
           <a:p>
+            <a:pPr algn="l">
+              <a:defRPr sz="3200" b="1">
+                <a:solidFill>
+                  <a:srgbClr val="003DA5"/>
+                </a:solidFill>
+              </a:defRPr>
+            </a:pPr>
+            <a:r>
+              <a:t>Total cost of ownership: local RTO vs PWO stack</a:t>
+            </a:r>
+          </a:p>
+        </p:txBody>
+      </p:sp>
+      <p:sp>
+        <p:nvSpPr>
+          <p:cNvPr id="4" name="TextBox 3"/>
+          <p:cNvSpPr txBox="1"/>
+          <p:nvPr/>
+        </p:nvSpPr>
+        <p:spPr>
+          <a:xfrm>
+            <a:off x="502920" y="960120"/>
+            <a:ext cx="10972800" cy="457200"/>
+          </a:xfrm>
+          <a:prstGeom prst="rect">
+            <a:avLst/>
+          </a:prstGeom>
+          <a:noFill/>
+        </p:spPr>
+        <p:txBody>
+          <a:bodyPr wrap="square">
+            <a:spAutoFit/>
+          </a:bodyPr>
+          <a:lstStyle/>
+          <a:p>
+            <a:pPr algn="l">
+              <a:defRPr sz="1400" b="0">
+                <a:solidFill>
+                  <a:srgbClr val="64748B"/>
+                </a:solidFill>
+              </a:defRPr>
+            </a:pPr>
+            <a:r>
+              <a:t>Illustrative index — traditional per-unit RTO normalized to 100</a:t>
+            </a:r>
+          </a:p>
+        </p:txBody>
+      </p:sp>
+      <p:sp>
+        <p:nvSpPr>
+          <p:cNvPr id="5" name="Rectangle 4"/>
+          <p:cNvSpPr/>
+          <p:nvPr/>
+        </p:nvSpPr>
+        <p:spPr>
+          <a:xfrm>
+            <a:off x="502920" y="1325880"/>
+            <a:ext cx="1097280" cy="54864"/>
+          </a:xfrm>
+          <a:prstGeom prst="rect">
+            <a:avLst/>
+          </a:prstGeom>
+          <a:solidFill>
+            <a:srgbClr val="F47920"/>
+          </a:solidFill>
+          <a:ln>
+            <a:noFill/>
+          </a:ln>
+        </p:spPr>
+        <p:style>
+          <a:lnRef idx="1">
+            <a:schemeClr val="accent1"/>
+          </a:lnRef>
+          <a:fillRef idx="3">
+            <a:schemeClr val="accent1"/>
+          </a:fillRef>
+          <a:effectRef idx="2">
+            <a:schemeClr val="accent1"/>
+          </a:effectRef>
+          <a:fontRef idx="minor">
+            <a:schemeClr val="lt1"/>
+          </a:fontRef>
+        </p:style>
+        <p:txBody>
+          <a:bodyPr rtlCol="0" anchor="ctr"/>
+          <a:lstStyle/>
+          <a:p>
+            <a:pPr algn="ctr"/>
+          </a:p>
+        </p:txBody>
+      </p:sp>
+      <p:sp>
+        <p:nvSpPr>
+          <p:cNvPr id="6" name="TextBox 5"/>
+          <p:cNvSpPr txBox="1"/>
+          <p:nvPr/>
+        </p:nvSpPr>
+        <p:spPr>
+          <a:xfrm>
+            <a:off x="640080" y="2011680"/>
+            <a:ext cx="5029200" cy="320040"/>
+          </a:xfrm>
+          <a:prstGeom prst="rect">
+            <a:avLst/>
+          </a:prstGeom>
+          <a:noFill/>
+        </p:spPr>
+        <p:txBody>
+          <a:bodyPr wrap="square">
+            <a:spAutoFit/>
+          </a:bodyPr>
+          <a:lstStyle/>
+          <a:p>
+            <a:pPr algn="l">
+              <a:defRPr sz="1300" b="1">
+                <a:solidFill>
+                  <a:srgbClr val="1E293B"/>
+                </a:solidFill>
+              </a:defRPr>
+            </a:pPr>
+            <a:r>
+              <a:t>Traditional local RTO (per major unit)</a:t>
+            </a:r>
+          </a:p>
+        </p:txBody>
+      </p:sp>
+      <p:sp>
+        <p:nvSpPr>
+          <p:cNvPr id="7" name="Rounded Rectangle 6"/>
+          <p:cNvSpPr/>
+          <p:nvPr/>
+        </p:nvSpPr>
+        <p:spPr>
+          <a:xfrm>
+            <a:off x="640080" y="2359152"/>
+            <a:ext cx="5029200" cy="256032"/>
+          </a:xfrm>
+          <a:prstGeom prst="roundRect">
+            <a:avLst/>
+          </a:prstGeom>
+          <a:solidFill>
+            <a:srgbClr val="DCDCE1"/>
+          </a:solidFill>
+          <a:ln>
+            <a:noFill/>
+          </a:ln>
+        </p:spPr>
+        <p:style>
+          <a:lnRef idx="1">
+            <a:schemeClr val="accent1"/>
+          </a:lnRef>
+          <a:fillRef idx="3">
+            <a:schemeClr val="accent1"/>
+          </a:fillRef>
+          <a:effectRef idx="2">
+            <a:schemeClr val="accent1"/>
+          </a:effectRef>
+          <a:fontRef idx="minor">
+            <a:schemeClr val="lt1"/>
+          </a:fontRef>
+        </p:style>
+        <p:txBody>
+          <a:bodyPr rtlCol="0" anchor="ctr"/>
+          <a:lstStyle/>
+          <a:p>
+            <a:pPr algn="ctr"/>
+          </a:p>
+        </p:txBody>
+      </p:sp>
+      <p:sp>
+        <p:nvSpPr>
+          <p:cNvPr id="8" name="Rounded Rectangle 7"/>
+          <p:cNvSpPr/>
+          <p:nvPr/>
+        </p:nvSpPr>
+        <p:spPr>
+          <a:xfrm>
+            <a:off x="640080" y="2359152"/>
+            <a:ext cx="5029200" cy="256032"/>
+          </a:xfrm>
+          <a:prstGeom prst="roundRect">
+            <a:avLst/>
+          </a:prstGeom>
+          <a:solidFill>
+            <a:srgbClr val="FF4757"/>
+          </a:solidFill>
+          <a:ln>
+            <a:noFill/>
+          </a:ln>
+        </p:spPr>
+        <p:style>
+          <a:lnRef idx="1">
+            <a:schemeClr val="accent1"/>
+          </a:lnRef>
+          <a:fillRef idx="3">
+            <a:schemeClr val="accent1"/>
+          </a:fillRef>
+          <a:effectRef idx="2">
+            <a:schemeClr val="accent1"/>
+          </a:effectRef>
+          <a:fontRef idx="minor">
+            <a:schemeClr val="lt1"/>
+          </a:fontRef>
+        </p:style>
+        <p:txBody>
+          <a:bodyPr rtlCol="0" anchor="ctr"/>
+          <a:lstStyle/>
+          <a:p>
+            <a:pPr algn="ctr"/>
+          </a:p>
+        </p:txBody>
+      </p:sp>
+      <p:sp>
+        <p:nvSpPr>
+          <p:cNvPr id="9" name="TextBox 8"/>
+          <p:cNvSpPr txBox="1"/>
+          <p:nvPr/>
+        </p:nvSpPr>
+        <p:spPr>
+          <a:xfrm>
+            <a:off x="5212080" y="2313432"/>
+            <a:ext cx="457200" cy="274320"/>
+          </a:xfrm>
+          <a:prstGeom prst="rect">
+            <a:avLst/>
+          </a:prstGeom>
+          <a:noFill/>
+        </p:spPr>
+        <p:txBody>
+          <a:bodyPr wrap="square">
+            <a:spAutoFit/>
+          </a:bodyPr>
+          <a:lstStyle/>
+          <a:p>
+            <a:pPr algn="r">
+              <a:defRPr sz="1200" b="1">
+                <a:solidFill>
+                  <a:srgbClr val="1E293B"/>
+                </a:solidFill>
+              </a:defRPr>
+            </a:pPr>
+            <a:r>
+              <a:t>100%</a:t>
+            </a:r>
+          </a:p>
+        </p:txBody>
+      </p:sp>
+      <p:sp>
+        <p:nvSpPr>
+          <p:cNvPr id="10" name="TextBox 9"/>
+          <p:cNvSpPr txBox="1"/>
+          <p:nvPr/>
+        </p:nvSpPr>
+        <p:spPr>
+          <a:xfrm>
+            <a:off x="640080" y="2834640"/>
+            <a:ext cx="5029200" cy="1828800"/>
+          </a:xfrm>
+          <a:prstGeom prst="rect">
+            <a:avLst/>
+          </a:prstGeom>
+          <a:noFill/>
+        </p:spPr>
+        <p:txBody>
+          <a:bodyPr wrap="square">
+            <a:spAutoFit/>
+          </a:bodyPr>
+          <a:lstStyle/>
+          <a:p>
             <a:pPr>
-              <a:defRPr sz="3600" b="1">
+              <a:spcAft>
+                <a:spcPts val="800"/>
+              </a:spcAft>
+              <a:defRPr sz="1200">
+                <a:solidFill>
+                  <a:srgbClr val="1E293B"/>
+                </a:solidFill>
+              </a:defRPr>
+            </a:pPr>
+            <a:r>
+              <a:t>Rigorous model build &amp; validation</a:t>
+            </a:r>
+          </a:p>
+          <a:p>
+            <a:pPr>
+              <a:spcAft>
+                <a:spcPts val="800"/>
+              </a:spcAft>
+              <a:defRPr sz="1200">
+                <a:solidFill>
+                  <a:srgbClr val="1E293B"/>
+                </a:solidFill>
+              </a:defRPr>
+            </a:pPr>
+            <a:r>
+              <a:t>Ongoing mismatch with APC</a:t>
+            </a:r>
+          </a:p>
+          <a:p>
+            <a:pPr>
+              <a:spcAft>
+                <a:spcPts val="800"/>
+              </a:spcAft>
+              <a:defRPr sz="1200">
+                <a:solidFill>
+                  <a:srgbClr val="1E293B"/>
+                </a:solidFill>
+              </a:defRPr>
+            </a:pPr>
+            <a:r>
+              <a:t>Limited cross-unit coordination</a:t>
+            </a:r>
+          </a:p>
+        </p:txBody>
+      </p:sp>
+      <p:sp>
+        <p:nvSpPr>
+          <p:cNvPr id="11" name="TextBox 10"/>
+          <p:cNvSpPr txBox="1"/>
+          <p:nvPr/>
+        </p:nvSpPr>
+        <p:spPr>
+          <a:xfrm>
+            <a:off x="6400800" y="2011680"/>
+            <a:ext cx="5029200" cy="320040"/>
+          </a:xfrm>
+          <a:prstGeom prst="rect">
+            <a:avLst/>
+          </a:prstGeom>
+          <a:noFill/>
+        </p:spPr>
+        <p:txBody>
+          <a:bodyPr wrap="square">
+            <a:spAutoFit/>
+          </a:bodyPr>
+          <a:lstStyle/>
+          <a:p>
+            <a:pPr algn="l">
+              <a:defRPr sz="1300" b="1">
+                <a:solidFill>
+                  <a:srgbClr val="1E293B"/>
+                </a:solidFill>
+              </a:defRPr>
+            </a:pPr>
+            <a:r>
+              <a:t>PWO dynamic layer (site scope)</a:t>
+            </a:r>
+          </a:p>
+        </p:txBody>
+      </p:sp>
+      <p:sp>
+        <p:nvSpPr>
+          <p:cNvPr id="12" name="Rounded Rectangle 11"/>
+          <p:cNvSpPr/>
+          <p:nvPr/>
+        </p:nvSpPr>
+        <p:spPr>
+          <a:xfrm>
+            <a:off x="6400800" y="2359152"/>
+            <a:ext cx="5029200" cy="256032"/>
+          </a:xfrm>
+          <a:prstGeom prst="roundRect">
+            <a:avLst/>
+          </a:prstGeom>
+          <a:solidFill>
+            <a:srgbClr val="DCDCE1"/>
+          </a:solidFill>
+          <a:ln>
+            <a:noFill/>
+          </a:ln>
+        </p:spPr>
+        <p:style>
+          <a:lnRef idx="1">
+            <a:schemeClr val="accent1"/>
+          </a:lnRef>
+          <a:fillRef idx="3">
+            <a:schemeClr val="accent1"/>
+          </a:fillRef>
+          <a:effectRef idx="2">
+            <a:schemeClr val="accent1"/>
+          </a:effectRef>
+          <a:fontRef idx="minor">
+            <a:schemeClr val="lt1"/>
+          </a:fontRef>
+        </p:style>
+        <p:txBody>
+          <a:bodyPr rtlCol="0" anchor="ctr"/>
+          <a:lstStyle/>
+          <a:p>
+            <a:pPr algn="ctr"/>
+          </a:p>
+        </p:txBody>
+      </p:sp>
+      <p:sp>
+        <p:nvSpPr>
+          <p:cNvPr id="13" name="Rounded Rectangle 12"/>
+          <p:cNvSpPr/>
+          <p:nvPr/>
+        </p:nvSpPr>
+        <p:spPr>
+          <a:xfrm>
+            <a:off x="6400800" y="2359152"/>
+            <a:ext cx="1760220" cy="256032"/>
+          </a:xfrm>
+          <a:prstGeom prst="roundRect">
+            <a:avLst/>
+          </a:prstGeom>
+          <a:solidFill>
+            <a:srgbClr val="00C896"/>
+          </a:solidFill>
+          <a:ln>
+            <a:noFill/>
+          </a:ln>
+        </p:spPr>
+        <p:style>
+          <a:lnRef idx="1">
+            <a:schemeClr val="accent1"/>
+          </a:lnRef>
+          <a:fillRef idx="3">
+            <a:schemeClr val="accent1"/>
+          </a:fillRef>
+          <a:effectRef idx="2">
+            <a:schemeClr val="accent1"/>
+          </a:effectRef>
+          <a:fontRef idx="minor">
+            <a:schemeClr val="lt1"/>
+          </a:fontRef>
+        </p:style>
+        <p:txBody>
+          <a:bodyPr rtlCol="0" anchor="ctr"/>
+          <a:lstStyle/>
+          <a:p>
+            <a:pPr algn="ctr"/>
+          </a:p>
+        </p:txBody>
+      </p:sp>
+      <p:sp>
+        <p:nvSpPr>
+          <p:cNvPr id="14" name="TextBox 13"/>
+          <p:cNvSpPr txBox="1"/>
+          <p:nvPr/>
+        </p:nvSpPr>
+        <p:spPr>
+          <a:xfrm>
+            <a:off x="10972800" y="2313432"/>
+            <a:ext cx="457200" cy="274320"/>
+          </a:xfrm>
+          <a:prstGeom prst="rect">
+            <a:avLst/>
+          </a:prstGeom>
+          <a:noFill/>
+        </p:spPr>
+        <p:txBody>
+          <a:bodyPr wrap="square">
+            <a:spAutoFit/>
+          </a:bodyPr>
+          <a:lstStyle/>
+          <a:p>
+            <a:pPr algn="r">
+              <a:defRPr sz="1200" b="1">
+                <a:solidFill>
+                  <a:srgbClr val="1E293B"/>
+                </a:solidFill>
+              </a:defRPr>
+            </a:pPr>
+            <a:r>
+              <a:t>35%</a:t>
+            </a:r>
+          </a:p>
+        </p:txBody>
+      </p:sp>
+      <p:sp>
+        <p:nvSpPr>
+          <p:cNvPr id="15" name="TextBox 14"/>
+          <p:cNvSpPr txBox="1"/>
+          <p:nvPr/>
+        </p:nvSpPr>
+        <p:spPr>
+          <a:xfrm>
+            <a:off x="6400800" y="2834640"/>
+            <a:ext cx="5029200" cy="1828800"/>
+          </a:xfrm>
+          <a:prstGeom prst="rect">
+            <a:avLst/>
+          </a:prstGeom>
+          <a:noFill/>
+        </p:spPr>
+        <p:txBody>
+          <a:bodyPr wrap="square">
+            <a:spAutoFit/>
+          </a:bodyPr>
+          <a:lstStyle/>
+          <a:p>
+            <a:pPr>
+              <a:spcAft>
+                <a:spcPts val="800"/>
+              </a:spcAft>
+              <a:defRPr sz="1200">
+                <a:solidFill>
+                  <a:srgbClr val="1E293B"/>
+                </a:solidFill>
+              </a:defRPr>
+            </a:pPr>
+            <a:r>
+              <a:t>Reuses APC dynamics &amp; planning yields</a:t>
+            </a:r>
+          </a:p>
+          <a:p>
+            <a:pPr>
+              <a:spcAft>
+                <a:spcPts val="800"/>
+              </a:spcAft>
+              <a:defRPr sz="1200">
+                <a:solidFill>
+                  <a:srgbClr val="1E293B"/>
+                </a:solidFill>
+              </a:defRPr>
+            </a:pPr>
+            <a:r>
+              <a:t>Proxy limits — no duplicate constraints</a:t>
+            </a:r>
+          </a:p>
+          <a:p>
+            <a:pPr>
+              <a:spcAft>
+                <a:spcPts val="800"/>
+              </a:spcAft>
+              <a:defRPr sz="1200">
+                <a:solidFill>
+                  <a:srgbClr val="1E293B"/>
+                </a:solidFill>
+              </a:defRPr>
+            </a:pPr>
+            <a:r>
+              <a:t>One optimization narrative for operations</a:t>
+            </a:r>
+          </a:p>
+        </p:txBody>
+      </p:sp>
+      <p:sp>
+        <p:nvSpPr>
+          <p:cNvPr id="16" name="TextBox 15"/>
+          <p:cNvSpPr txBox="1"/>
+          <p:nvPr/>
+        </p:nvSpPr>
+        <p:spPr>
+          <a:xfrm>
+            <a:off x="502920" y="4754880"/>
+            <a:ext cx="10972800" cy="822960"/>
+          </a:xfrm>
+          <a:prstGeom prst="rect">
+            <a:avLst/>
+          </a:prstGeom>
+          <a:noFill/>
+        </p:spPr>
+        <p:txBody>
+          <a:bodyPr wrap="square">
+            <a:spAutoFit/>
+          </a:bodyPr>
+          <a:lstStyle/>
+          <a:p>
+            <a:pPr algn="l">
+              <a:defRPr sz="1300" b="0">
+                <a:solidFill>
+                  <a:srgbClr val="1E293B"/>
+                </a:solidFill>
+              </a:defRPr>
+            </a:pPr>
+            <a:r>
+              <a:t>Honeywell evidence: dynamic optimization delivers traditional RTO economics with dramatically lower modeling effort.</a:t>
+            </a:r>
+          </a:p>
+        </p:txBody>
+      </p:sp>
+    </p:spTree>
+  </p:cSld>
+  <p:clrMapOvr>
+    <a:masterClrMapping/>
+  </p:clrMapOvr>
+</p:sld>
+</file>
+
+<file path=ppt/slides/slide7.xml><?xml version="1.0" encoding="utf-8"?>
+<p:sld xmlns:a="http://schemas.openxmlformats.org/drawingml/2006/main" xmlns:p="http://schemas.openxmlformats.org/presentationml/2006/main" xmlns:r="http://schemas.openxmlformats.org/officeDocument/2006/relationships">
+  <p:cSld>
+    <p:spTree>
+      <p:nvGrpSpPr>
+        <p:cNvPr id="1" name=""/>
+        <p:cNvGrpSpPr/>
+        <p:nvPr/>
+      </p:nvGrpSpPr>
+      <p:grpSpPr/>
+      <p:sp>
+        <p:nvSpPr>
+          <p:cNvPr id="2" name="Rectangle 1"/>
+          <p:cNvSpPr/>
+          <p:nvPr/>
+        </p:nvSpPr>
+        <p:spPr>
+          <a:xfrm>
+            <a:off x="0" y="0"/>
+            <a:ext cx="12191695" cy="6858000"/>
+          </a:xfrm>
+          <a:prstGeom prst="rect">
+            <a:avLst/>
+          </a:prstGeom>
+          <a:solidFill>
+            <a:srgbClr val="E60028"/>
+          </a:solidFill>
+          <a:ln>
+            <a:noFill/>
+          </a:ln>
+        </p:spPr>
+        <p:style>
+          <a:lnRef idx="1">
+            <a:schemeClr val="accent1"/>
+          </a:lnRef>
+          <a:fillRef idx="3">
+            <a:schemeClr val="accent1"/>
+          </a:fillRef>
+          <a:effectRef idx="2">
+            <a:schemeClr val="accent1"/>
+          </a:effectRef>
+          <a:fontRef idx="minor">
+            <a:schemeClr val="lt1"/>
+          </a:fontRef>
+        </p:style>
+        <p:txBody>
+          <a:bodyPr rtlCol="0" anchor="ctr"/>
+          <a:lstStyle/>
+          <a:p>
+            <a:pPr algn="ctr"/>
+          </a:p>
+        </p:txBody>
+      </p:sp>
+      <p:sp>
+        <p:nvSpPr>
+          <p:cNvPr id="3" name="TextBox 2"/>
+          <p:cNvSpPr txBox="1"/>
+          <p:nvPr/>
+        </p:nvSpPr>
+        <p:spPr>
+          <a:xfrm>
+            <a:off x="731520" y="731520"/>
+            <a:ext cx="10058400" cy="457200"/>
+          </a:xfrm>
+          <a:prstGeom prst="rect">
+            <a:avLst/>
+          </a:prstGeom>
+          <a:noFill/>
+        </p:spPr>
+        <p:txBody>
+          <a:bodyPr wrap="square">
+            <a:spAutoFit/>
+          </a:bodyPr>
+          <a:lstStyle/>
+          <a:p>
+            <a:pPr algn="l">
+              <a:defRPr sz="1100" b="1">
                 <a:solidFill>
                   <a:srgbClr val="FFFFFF"/>
                 </a:solidFill>
               </a:defRPr>
             </a:pPr>
             <a:r>
-              <a:t>Optimize the plant, not the project portfolio</a:t>
+              <a:t>Hydrocarbon Processing 2022 — Best Automation Technology</a:t>
+            </a:r>
+          </a:p>
+        </p:txBody>
+      </p:sp>
+      <p:sp>
+        <p:nvSpPr>
+          <p:cNvPr id="4" name="TextBox 3"/>
+          <p:cNvSpPr txBox="1"/>
+          <p:nvPr/>
+        </p:nvSpPr>
+        <p:spPr>
+          <a:xfrm>
+            <a:off x="731520" y="1463040"/>
+            <a:ext cx="10515600" cy="1097280"/>
+          </a:xfrm>
+          <a:prstGeom prst="rect">
+            <a:avLst/>
+          </a:prstGeom>
+          <a:noFill/>
+        </p:spPr>
+        <p:txBody>
+          <a:bodyPr wrap="square">
+            <a:spAutoFit/>
+          </a:bodyPr>
+          <a:lstStyle/>
+          <a:p>
+            <a:pPr algn="l">
+              <a:defRPr sz="4400" b="1">
+                <a:solidFill>
+                  <a:srgbClr val="FFFFFF"/>
+                </a:solidFill>
+              </a:defRPr>
+            </a:pPr>
+            <a:r>
+              <a:t>Honeywell Plantwide Optimizer</a:t>
+            </a:r>
+          </a:p>
+        </p:txBody>
+      </p:sp>
+      <p:sp>
+        <p:nvSpPr>
+          <p:cNvPr id="5" name="TextBox 4"/>
+          <p:cNvSpPr txBox="1"/>
+          <p:nvPr/>
+        </p:nvSpPr>
+        <p:spPr>
+          <a:xfrm>
+            <a:off x="731520" y="2651760"/>
+            <a:ext cx="10058400" cy="914400"/>
+          </a:xfrm>
+          <a:prstGeom prst="rect">
+            <a:avLst/>
+          </a:prstGeom>
+          <a:noFill/>
+        </p:spPr>
+        <p:txBody>
+          <a:bodyPr wrap="square">
+            <a:spAutoFit/>
+          </a:bodyPr>
+          <a:lstStyle/>
+          <a:p>
+            <a:pPr algn="l">
+              <a:defRPr sz="1800" b="0">
+                <a:solidFill>
+                  <a:srgbClr val="FFE6E6"/>
+                </a:solidFill>
+              </a:defRPr>
+            </a:pPr>
+            <a:r>
+              <a:t>Dynamic Real-Time Optimization — a different control architecture, not a bigger steady-state model</a:t>
+            </a:r>
+          </a:p>
+        </p:txBody>
+      </p:sp>
+      <p:sp>
+        <p:nvSpPr>
+          <p:cNvPr id="6" name="Rounded Rectangle 5"/>
+          <p:cNvSpPr/>
+          <p:nvPr/>
+        </p:nvSpPr>
+        <p:spPr>
+          <a:xfrm>
+            <a:off x="731520" y="4114800"/>
+            <a:ext cx="2606040" cy="594360"/>
+          </a:xfrm>
+          <a:prstGeom prst="roundRect">
+            <a:avLst/>
+          </a:prstGeom>
+          <a:solidFill>
+            <a:srgbClr val="B4001E"/>
+          </a:solidFill>
+          <a:ln>
+            <a:solidFill>
+              <a:srgbClr val="C8C8D2"/>
+            </a:solidFill>
+          </a:ln>
+        </p:spPr>
+        <p:style>
+          <a:lnRef idx="1">
+            <a:schemeClr val="accent1"/>
+          </a:lnRef>
+          <a:fillRef idx="3">
+            <a:schemeClr val="accent1"/>
+          </a:fillRef>
+          <a:effectRef idx="2">
+            <a:schemeClr val="accent1"/>
+          </a:effectRef>
+          <a:fontRef idx="minor">
+            <a:schemeClr val="lt1"/>
+          </a:fontRef>
+        </p:style>
+        <p:txBody>
+          <a:bodyPr rtlCol="0" anchor="ctr"/>
+          <a:lstStyle/>
+          <a:p>
+            <a:pPr algn="ctr">
+              <a:defRPr sz="1100" b="1">
+                <a:solidFill>
+                  <a:srgbClr val="FFFFFF"/>
+                </a:solidFill>
+              </a:defRPr>
+            </a:pPr>
+            <a:r>
+              <a:t>Runs ~every minute</a:t>
+            </a:r>
+          </a:p>
+        </p:txBody>
+      </p:sp>
+      <p:sp>
+        <p:nvSpPr>
+          <p:cNvPr id="7" name="Rounded Rectangle 6"/>
+          <p:cNvSpPr/>
+          <p:nvPr/>
+        </p:nvSpPr>
+        <p:spPr>
+          <a:xfrm>
+            <a:off x="3520439" y="4114800"/>
+            <a:ext cx="2606040" cy="594360"/>
+          </a:xfrm>
+          <a:prstGeom prst="roundRect">
+            <a:avLst/>
+          </a:prstGeom>
+          <a:solidFill>
+            <a:srgbClr val="B4001E"/>
+          </a:solidFill>
+          <a:ln>
+            <a:solidFill>
+              <a:srgbClr val="C8C8D2"/>
+            </a:solidFill>
+          </a:ln>
+        </p:spPr>
+        <p:style>
+          <a:lnRef idx="1">
+            <a:schemeClr val="accent1"/>
+          </a:lnRef>
+          <a:fillRef idx="3">
+            <a:schemeClr val="accent1"/>
+          </a:fillRef>
+          <a:effectRef idx="2">
+            <a:schemeClr val="accent1"/>
+          </a:effectRef>
+          <a:fontRef idx="minor">
+            <a:schemeClr val="lt1"/>
+          </a:fontRef>
+        </p:style>
+        <p:txBody>
+          <a:bodyPr rtlCol="0" anchor="ctr"/>
+          <a:lstStyle/>
+          <a:p>
+            <a:pPr algn="ctr">
+              <a:defRPr sz="1100" b="1">
+                <a:solidFill>
+                  <a:srgbClr val="FFFFFF"/>
+                </a:solidFill>
+              </a:defRPr>
+            </a:pPr>
+            <a:r>
+              <a:t>Dynamic models</a:t>
+            </a:r>
+          </a:p>
+        </p:txBody>
+      </p:sp>
+      <p:sp>
+        <p:nvSpPr>
+          <p:cNvPr id="8" name="Rounded Rectangle 7"/>
+          <p:cNvSpPr/>
+          <p:nvPr/>
+        </p:nvSpPr>
+        <p:spPr>
+          <a:xfrm>
+            <a:off x="6309359" y="4114800"/>
+            <a:ext cx="2606040" cy="594360"/>
+          </a:xfrm>
+          <a:prstGeom prst="roundRect">
+            <a:avLst/>
+          </a:prstGeom>
+          <a:solidFill>
+            <a:srgbClr val="B4001E"/>
+          </a:solidFill>
+          <a:ln>
+            <a:solidFill>
+              <a:srgbClr val="C8C8D2"/>
+            </a:solidFill>
+          </a:ln>
+        </p:spPr>
+        <p:style>
+          <a:lnRef idx="1">
+            <a:schemeClr val="accent1"/>
+          </a:lnRef>
+          <a:fillRef idx="3">
+            <a:schemeClr val="accent1"/>
+          </a:fillRef>
+          <a:effectRef idx="2">
+            <a:schemeClr val="accent1"/>
+          </a:effectRef>
+          <a:fontRef idx="minor">
+            <a:schemeClr val="lt1"/>
+          </a:fontRef>
+        </p:style>
+        <p:txBody>
+          <a:bodyPr rtlCol="0" anchor="ctr"/>
+          <a:lstStyle/>
+          <a:p>
+            <a:pPr algn="ctr">
+              <a:defRPr sz="1100" b="1">
+                <a:solidFill>
+                  <a:srgbClr val="FFFFFF"/>
+                </a:solidFill>
+              </a:defRPr>
+            </a:pPr>
+            <a:r>
+              <a:t>Planning-aligned economics</a:t>
+            </a:r>
+          </a:p>
+        </p:txBody>
+      </p:sp>
+      <p:sp>
+        <p:nvSpPr>
+          <p:cNvPr id="9" name="Rounded Rectangle 8"/>
+          <p:cNvSpPr/>
+          <p:nvPr/>
+        </p:nvSpPr>
+        <p:spPr>
+          <a:xfrm>
+            <a:off x="9098280" y="4114800"/>
+            <a:ext cx="2606040" cy="594360"/>
+          </a:xfrm>
+          <a:prstGeom prst="roundRect">
+            <a:avLst/>
+          </a:prstGeom>
+          <a:solidFill>
+            <a:srgbClr val="B4001E"/>
+          </a:solidFill>
+          <a:ln>
+            <a:solidFill>
+              <a:srgbClr val="C8C8D2"/>
+            </a:solidFill>
+          </a:ln>
+        </p:spPr>
+        <p:style>
+          <a:lnRef idx="1">
+            <a:schemeClr val="accent1"/>
+          </a:lnRef>
+          <a:fillRef idx="3">
+            <a:schemeClr val="accent1"/>
+          </a:fillRef>
+          <a:effectRef idx="2">
+            <a:schemeClr val="accent1"/>
+          </a:effectRef>
+          <a:fontRef idx="minor">
+            <a:schemeClr val="lt1"/>
+          </a:fontRef>
+        </p:style>
+        <p:txBody>
+          <a:bodyPr rtlCol="0" anchor="ctr"/>
+          <a:lstStyle/>
+          <a:p>
+            <a:pPr algn="ctr">
+              <a:defRPr sz="1100" b="1">
+                <a:solidFill>
+                  <a:srgbClr val="FFFFFF"/>
+                </a:solidFill>
+              </a:defRPr>
+            </a:pPr>
+            <a:r>
+              <a:t>Proxy limits</a:t>
+            </a:r>
+          </a:p>
+        </p:txBody>
+      </p:sp>
+    </p:spTree>
+  </p:cSld>
+  <p:clrMapOvr>
+    <a:masterClrMapping/>
+  </p:clrMapOvr>
+</p:sld>
+</file>
+
+<file path=ppt/slides/slide8.xml><?xml version="1.0" encoding="utf-8"?>
+<p:sld xmlns:a="http://schemas.openxmlformats.org/drawingml/2006/main" xmlns:p="http://schemas.openxmlformats.org/presentationml/2006/main" xmlns:r="http://schemas.openxmlformats.org/officeDocument/2006/relationships">
+  <p:cSld>
+    <p:spTree>
+      <p:nvGrpSpPr>
+        <p:cNvPr id="1" name=""/>
+        <p:cNvGrpSpPr/>
+        <p:nvPr/>
+      </p:nvGrpSpPr>
+      <p:grpSpPr/>
+      <p:sp>
+        <p:nvSpPr>
+          <p:cNvPr id="2" name="Rectangle 1"/>
+          <p:cNvSpPr/>
+          <p:nvPr/>
+        </p:nvSpPr>
+        <p:spPr>
+          <a:xfrm>
+            <a:off x="0" y="0"/>
+            <a:ext cx="12191695" cy="6858000"/>
+          </a:xfrm>
+          <a:prstGeom prst="rect">
+            <a:avLst/>
+          </a:prstGeom>
+          <a:solidFill>
+            <a:srgbClr val="F8FAFC"/>
+          </a:solidFill>
+          <a:ln>
+            <a:noFill/>
+          </a:ln>
+        </p:spPr>
+        <p:style>
+          <a:lnRef idx="1">
+            <a:schemeClr val="accent1"/>
+          </a:lnRef>
+          <a:fillRef idx="3">
+            <a:schemeClr val="accent1"/>
+          </a:fillRef>
+          <a:effectRef idx="2">
+            <a:schemeClr val="accent1"/>
+          </a:effectRef>
+          <a:fontRef idx="minor">
+            <a:schemeClr val="lt1"/>
+          </a:fontRef>
+        </p:style>
+        <p:txBody>
+          <a:bodyPr rtlCol="0" anchor="ctr"/>
+          <a:lstStyle/>
+          <a:p>
+            <a:pPr algn="ctr"/>
+          </a:p>
+        </p:txBody>
+      </p:sp>
+      <p:sp>
+        <p:nvSpPr>
+          <p:cNvPr id="3" name="TextBox 2"/>
+          <p:cNvSpPr txBox="1"/>
+          <p:nvPr/>
+        </p:nvSpPr>
+        <p:spPr>
+          <a:xfrm>
+            <a:off x="502920" y="320040"/>
+            <a:ext cx="10972800" cy="822960"/>
+          </a:xfrm>
+          <a:prstGeom prst="rect">
+            <a:avLst/>
+          </a:prstGeom>
+          <a:noFill/>
+        </p:spPr>
+        <p:txBody>
+          <a:bodyPr wrap="square">
+            <a:spAutoFit/>
+          </a:bodyPr>
+          <a:lstStyle/>
+          <a:p>
+            <a:pPr algn="l">
+              <a:defRPr sz="3200" b="1">
+                <a:solidFill>
+                  <a:srgbClr val="003DA5"/>
+                </a:solidFill>
+              </a:defRPr>
+            </a:pPr>
+            <a:r>
+              <a:t>PWO architecture: 1 primary MPC → n unit APCs</a:t>
+            </a:r>
+          </a:p>
+        </p:txBody>
+      </p:sp>
+      <p:sp>
+        <p:nvSpPr>
+          <p:cNvPr id="4" name="Rectangle 3"/>
+          <p:cNvSpPr/>
+          <p:nvPr/>
+        </p:nvSpPr>
+        <p:spPr>
+          <a:xfrm>
+            <a:off x="502920" y="1051560"/>
+            <a:ext cx="1097280" cy="54864"/>
+          </a:xfrm>
+          <a:prstGeom prst="rect">
+            <a:avLst/>
+          </a:prstGeom>
+          <a:solidFill>
+            <a:srgbClr val="F47920"/>
+          </a:solidFill>
+          <a:ln>
+            <a:noFill/>
+          </a:ln>
+        </p:spPr>
+        <p:style>
+          <a:lnRef idx="1">
+            <a:schemeClr val="accent1"/>
+          </a:lnRef>
+          <a:fillRef idx="3">
+            <a:schemeClr val="accent1"/>
+          </a:fillRef>
+          <a:effectRef idx="2">
+            <a:schemeClr val="accent1"/>
+          </a:effectRef>
+          <a:fontRef idx="minor">
+            <a:schemeClr val="lt1"/>
+          </a:fontRef>
+        </p:style>
+        <p:txBody>
+          <a:bodyPr rtlCol="0" anchor="ctr"/>
+          <a:lstStyle/>
+          <a:p>
+            <a:pPr algn="ctr"/>
+          </a:p>
+        </p:txBody>
+      </p:sp>
+      <p:sp>
+        <p:nvSpPr>
+          <p:cNvPr id="5" name="Rounded Rectangle 4"/>
+          <p:cNvSpPr/>
+          <p:nvPr/>
+        </p:nvSpPr>
+        <p:spPr>
+          <a:xfrm>
+            <a:off x="457200" y="1737360"/>
+            <a:ext cx="1828800" cy="685800"/>
+          </a:xfrm>
+          <a:prstGeom prst="roundRect">
+            <a:avLst/>
+          </a:prstGeom>
+          <a:solidFill>
+            <a:srgbClr val="003DA5"/>
+          </a:solidFill>
+          <a:ln>
+            <a:solidFill>
+              <a:srgbClr val="C8C8D2"/>
+            </a:solidFill>
+          </a:ln>
+        </p:spPr>
+        <p:style>
+          <a:lnRef idx="1">
+            <a:schemeClr val="accent1"/>
+          </a:lnRef>
+          <a:fillRef idx="3">
+            <a:schemeClr val="accent1"/>
+          </a:fillRef>
+          <a:effectRef idx="2">
+            <a:schemeClr val="accent1"/>
+          </a:effectRef>
+          <a:fontRef idx="minor">
+            <a:schemeClr val="lt1"/>
+          </a:fontRef>
+        </p:style>
+        <p:txBody>
+          <a:bodyPr rtlCol="0" anchor="ctr"/>
+          <a:lstStyle/>
+          <a:p>
+            <a:pPr algn="ctr">
+              <a:defRPr sz="1000" b="1">
+                <a:solidFill>
+                  <a:srgbClr val="FFFFFF"/>
+                </a:solidFill>
+              </a:defRPr>
+            </a:pPr>
+            <a:r>
+              <a:t>LP / PIMS</a:t>
+            </a:r>
+          </a:p>
+          <a:p>
+            <a:pPr algn="ctr">
+              <a:defRPr sz="900">
+                <a:solidFill>
+                  <a:srgbClr val="DCE6F0"/>
+                </a:solidFill>
+              </a:defRPr>
+            </a:pPr>
+            <a:r>
+              <a:t>Economics &amp; yields</a:t>
+            </a:r>
+          </a:p>
+        </p:txBody>
+      </p:sp>
+      <p:sp>
+        <p:nvSpPr>
+          <p:cNvPr id="6" name="Rounded Rectangle 5"/>
+          <p:cNvSpPr/>
+          <p:nvPr/>
+        </p:nvSpPr>
+        <p:spPr>
+          <a:xfrm>
+            <a:off x="3474720" y="1600200"/>
+            <a:ext cx="5212080" cy="868680"/>
+          </a:xfrm>
+          <a:prstGeom prst="roundRect">
+            <a:avLst/>
+          </a:prstGeom>
+          <a:solidFill>
+            <a:srgbClr val="E60028"/>
+          </a:solidFill>
+          <a:ln>
+            <a:solidFill>
+              <a:srgbClr val="C8C8D2"/>
+            </a:solidFill>
+          </a:ln>
+        </p:spPr>
+        <p:style>
+          <a:lnRef idx="1">
+            <a:schemeClr val="accent1"/>
+          </a:lnRef>
+          <a:fillRef idx="3">
+            <a:schemeClr val="accent1"/>
+          </a:fillRef>
+          <a:effectRef idx="2">
+            <a:schemeClr val="accent1"/>
+          </a:effectRef>
+          <a:fontRef idx="minor">
+            <a:schemeClr val="lt1"/>
+          </a:fontRef>
+        </p:style>
+        <p:txBody>
+          <a:bodyPr rtlCol="0" anchor="ctr"/>
+          <a:lstStyle/>
+          <a:p>
+            <a:pPr algn="ctr">
+              <a:defRPr sz="1200" b="1">
+                <a:solidFill>
+                  <a:srgbClr val="FFFFFF"/>
+                </a:solidFill>
+              </a:defRPr>
+            </a:pPr>
+            <a:r>
+              <a:t>PLANTWIDE OPTIMIZER (Dynamic RTO)</a:t>
+            </a:r>
+          </a:p>
+          <a:p>
+            <a:pPr algn="ctr">
+              <a:defRPr sz="900">
+                <a:solidFill>
+                  <a:srgbClr val="DCE6F0"/>
+                </a:solidFill>
+              </a:defRPr>
+            </a:pPr>
+            <a:r>
+              <a:t>Planning yields · site balances · inventories · quality</a:t>
+            </a:r>
+          </a:p>
+        </p:txBody>
+      </p:sp>
+      <p:cxnSp>
+        <p:nvCxnSpPr>
+          <p:cNvPr id="7" name="Connector 6"/>
+          <p:cNvCxnSpPr/>
+          <p:nvPr/>
+        </p:nvCxnSpPr>
+        <p:spPr>
+          <a:xfrm>
+            <a:off x="2286000" y="1920240"/>
+            <a:ext cx="1188720" cy="0"/>
+          </a:xfrm>
+          <a:prstGeom prst="line">
+            <a:avLst/>
+          </a:prstGeom>
+          <a:ln w="25400">
+            <a:solidFill>
+              <a:srgbClr val="F47920"/>
+            </a:solidFill>
+          </a:ln>
+        </p:spPr>
+        <p:style>
+          <a:lnRef idx="2">
+            <a:schemeClr val="accent1"/>
+          </a:lnRef>
+          <a:fillRef idx="0">
+            <a:schemeClr val="accent1"/>
+          </a:fillRef>
+          <a:effectRef idx="1">
+            <a:schemeClr val="accent1"/>
+          </a:effectRef>
+          <a:fontRef idx="minor">
+            <a:schemeClr val="tx1"/>
+          </a:fontRef>
+        </p:style>
+      </p:cxnSp>
+      <p:sp>
+        <p:nvSpPr>
+          <p:cNvPr id="8" name="Rounded Rectangle 7"/>
+          <p:cNvSpPr/>
+          <p:nvPr/>
+        </p:nvSpPr>
+        <p:spPr>
+          <a:xfrm>
+            <a:off x="731520" y="3017520"/>
+            <a:ext cx="3200400" cy="822960"/>
+          </a:xfrm>
+          <a:prstGeom prst="roundRect">
+            <a:avLst/>
+          </a:prstGeom>
+          <a:solidFill>
+            <a:srgbClr val="334155"/>
+          </a:solidFill>
+          <a:ln>
+            <a:solidFill>
+              <a:srgbClr val="C8C8D2"/>
+            </a:solidFill>
+          </a:ln>
+        </p:spPr>
+        <p:style>
+          <a:lnRef idx="1">
+            <a:schemeClr val="accent1"/>
+          </a:lnRef>
+          <a:fillRef idx="3">
+            <a:schemeClr val="accent1"/>
+          </a:fillRef>
+          <a:effectRef idx="2">
+            <a:schemeClr val="accent1"/>
+          </a:effectRef>
+          <a:fontRef idx="minor">
+            <a:schemeClr val="lt1"/>
+          </a:fontRef>
+        </p:style>
+        <p:txBody>
+          <a:bodyPr rtlCol="0" anchor="ctr"/>
+          <a:lstStyle/>
+          <a:p>
+            <a:pPr algn="ctr">
+              <a:defRPr sz="1000" b="1">
+                <a:solidFill>
+                  <a:srgbClr val="FFFFFF"/>
+                </a:solidFill>
+              </a:defRPr>
+            </a:pPr>
+            <a:r>
+              <a:t>CDU / VDU APC</a:t>
+            </a:r>
+          </a:p>
+          <a:p>
+            <a:pPr algn="ctr">
+              <a:defRPr sz="900">
+                <a:solidFill>
+                  <a:srgbClr val="DCE6F0"/>
+                </a:solidFill>
+              </a:defRPr>
+            </a:pPr>
+            <a:r>
+              <a:t>Proxy limits</a:t>
+            </a:r>
+          </a:p>
+        </p:txBody>
+      </p:sp>
+      <p:cxnSp>
+        <p:nvCxnSpPr>
+          <p:cNvPr id="9" name="Connector 8"/>
+          <p:cNvCxnSpPr/>
+          <p:nvPr/>
+        </p:nvCxnSpPr>
+        <p:spPr>
+          <a:xfrm flipH="1">
+            <a:off x="1874519" y="2468880"/>
+            <a:ext cx="4206241" cy="548640"/>
+          </a:xfrm>
+          <a:prstGeom prst="line">
+            <a:avLst/>
+          </a:prstGeom>
+          <a:ln w="25400">
+            <a:solidFill>
+              <a:srgbClr val="F47920"/>
+            </a:solidFill>
+          </a:ln>
+        </p:spPr>
+        <p:style>
+          <a:lnRef idx="2">
+            <a:schemeClr val="accent1"/>
+          </a:lnRef>
+          <a:fillRef idx="0">
+            <a:schemeClr val="accent1"/>
+          </a:fillRef>
+          <a:effectRef idx="1">
+            <a:schemeClr val="accent1"/>
+          </a:effectRef>
+          <a:fontRef idx="minor">
+            <a:schemeClr val="tx1"/>
+          </a:fontRef>
+        </p:style>
+      </p:cxnSp>
+      <p:sp>
+        <p:nvSpPr>
+          <p:cNvPr id="10" name="Rounded Rectangle 9"/>
+          <p:cNvSpPr/>
+          <p:nvPr/>
+        </p:nvSpPr>
+        <p:spPr>
+          <a:xfrm>
+            <a:off x="4480559" y="3017520"/>
+            <a:ext cx="3200400" cy="822960"/>
+          </a:xfrm>
+          <a:prstGeom prst="roundRect">
+            <a:avLst/>
+          </a:prstGeom>
+          <a:solidFill>
+            <a:srgbClr val="334155"/>
+          </a:solidFill>
+          <a:ln>
+            <a:solidFill>
+              <a:srgbClr val="C8C8D2"/>
+            </a:solidFill>
+          </a:ln>
+        </p:spPr>
+        <p:style>
+          <a:lnRef idx="1">
+            <a:schemeClr val="accent1"/>
+          </a:lnRef>
+          <a:fillRef idx="3">
+            <a:schemeClr val="accent1"/>
+          </a:fillRef>
+          <a:effectRef idx="2">
+            <a:schemeClr val="accent1"/>
+          </a:effectRef>
+          <a:fontRef idx="minor">
+            <a:schemeClr val="lt1"/>
+          </a:fontRef>
+        </p:style>
+        <p:txBody>
+          <a:bodyPr rtlCol="0" anchor="ctr"/>
+          <a:lstStyle/>
+          <a:p>
+            <a:pPr algn="ctr">
+              <a:defRPr sz="1000" b="1">
+                <a:solidFill>
+                  <a:srgbClr val="FFFFFF"/>
+                </a:solidFill>
+              </a:defRPr>
+            </a:pPr>
+            <a:r>
+              <a:t>FCC / Coker APC</a:t>
+            </a:r>
+          </a:p>
+          <a:p>
+            <a:pPr algn="ctr">
+              <a:defRPr sz="900">
+                <a:solidFill>
+                  <a:srgbClr val="DCE6F0"/>
+                </a:solidFill>
+              </a:defRPr>
+            </a:pPr>
+            <a:r>
+              <a:t>Proxy limits</a:t>
+            </a:r>
+          </a:p>
+        </p:txBody>
+      </p:sp>
+      <p:cxnSp>
+        <p:nvCxnSpPr>
+          <p:cNvPr id="11" name="Connector 10"/>
+          <p:cNvCxnSpPr/>
+          <p:nvPr/>
+        </p:nvCxnSpPr>
+        <p:spPr>
+          <a:xfrm flipH="1">
+            <a:off x="5623559" y="2468880"/>
+            <a:ext cx="457201" cy="548640"/>
+          </a:xfrm>
+          <a:prstGeom prst="line">
+            <a:avLst/>
+          </a:prstGeom>
+          <a:ln w="25400">
+            <a:solidFill>
+              <a:srgbClr val="F47920"/>
+            </a:solidFill>
+          </a:ln>
+        </p:spPr>
+        <p:style>
+          <a:lnRef idx="2">
+            <a:schemeClr val="accent1"/>
+          </a:lnRef>
+          <a:fillRef idx="0">
+            <a:schemeClr val="accent1"/>
+          </a:fillRef>
+          <a:effectRef idx="1">
+            <a:schemeClr val="accent1"/>
+          </a:effectRef>
+          <a:fontRef idx="minor">
+            <a:schemeClr val="tx1"/>
+          </a:fontRef>
+        </p:style>
+      </p:cxnSp>
+      <p:sp>
+        <p:nvSpPr>
+          <p:cNvPr id="12" name="Rounded Rectangle 11"/>
+          <p:cNvSpPr/>
+          <p:nvPr/>
+        </p:nvSpPr>
+        <p:spPr>
+          <a:xfrm>
+            <a:off x="8229600" y="3017520"/>
+            <a:ext cx="3200400" cy="822960"/>
+          </a:xfrm>
+          <a:prstGeom prst="roundRect">
+            <a:avLst/>
+          </a:prstGeom>
+          <a:solidFill>
+            <a:srgbClr val="334155"/>
+          </a:solidFill>
+          <a:ln>
+            <a:solidFill>
+              <a:srgbClr val="C8C8D2"/>
+            </a:solidFill>
+          </a:ln>
+        </p:spPr>
+        <p:style>
+          <a:lnRef idx="1">
+            <a:schemeClr val="accent1"/>
+          </a:lnRef>
+          <a:fillRef idx="3">
+            <a:schemeClr val="accent1"/>
+          </a:fillRef>
+          <a:effectRef idx="2">
+            <a:schemeClr val="accent1"/>
+          </a:effectRef>
+          <a:fontRef idx="minor">
+            <a:schemeClr val="lt1"/>
+          </a:fontRef>
+        </p:style>
+        <p:txBody>
+          <a:bodyPr rtlCol="0" anchor="ctr"/>
+          <a:lstStyle/>
+          <a:p>
+            <a:pPr algn="ctr">
+              <a:defRPr sz="1000" b="1">
+                <a:solidFill>
+                  <a:srgbClr val="FFFFFF"/>
+                </a:solidFill>
+              </a:defRPr>
+            </a:pPr>
+            <a:r>
+              <a:t>Hydro / Reforming</a:t>
+            </a:r>
+          </a:p>
+          <a:p>
+            <a:pPr algn="ctr">
+              <a:defRPr sz="900">
+                <a:solidFill>
+                  <a:srgbClr val="DCE6F0"/>
+                </a:solidFill>
+              </a:defRPr>
+            </a:pPr>
+            <a:r>
+              <a:t>Proxy limits</a:t>
+            </a:r>
+          </a:p>
+        </p:txBody>
+      </p:sp>
+      <p:cxnSp>
+        <p:nvCxnSpPr>
+          <p:cNvPr id="13" name="Connector 12"/>
+          <p:cNvCxnSpPr/>
+          <p:nvPr/>
+        </p:nvCxnSpPr>
+        <p:spPr>
+          <a:xfrm>
+            <a:off x="6080760" y="2468880"/>
+            <a:ext cx="3291840" cy="548640"/>
+          </a:xfrm>
+          <a:prstGeom prst="line">
+            <a:avLst/>
+          </a:prstGeom>
+          <a:ln w="25400">
+            <a:solidFill>
+              <a:srgbClr val="F47920"/>
+            </a:solidFill>
+          </a:ln>
+        </p:spPr>
+        <p:style>
+          <a:lnRef idx="2">
+            <a:schemeClr val="accent1"/>
+          </a:lnRef>
+          <a:fillRef idx="0">
+            <a:schemeClr val="accent1"/>
+          </a:fillRef>
+          <a:effectRef idx="1">
+            <a:schemeClr val="accent1"/>
+          </a:effectRef>
+          <a:fontRef idx="minor">
+            <a:schemeClr val="tx1"/>
+          </a:fontRef>
+        </p:style>
+      </p:cxnSp>
+      <p:sp>
+        <p:nvSpPr>
+          <p:cNvPr id="14" name="Rounded Rectangle 13"/>
+          <p:cNvSpPr/>
+          <p:nvPr/>
+        </p:nvSpPr>
+        <p:spPr>
+          <a:xfrm>
+            <a:off x="2286000" y="4206240"/>
+            <a:ext cx="7589520" cy="685800"/>
+          </a:xfrm>
+          <a:prstGeom prst="roundRect">
+            <a:avLst/>
+          </a:prstGeom>
+          <a:solidFill>
+            <a:srgbClr val="475569"/>
+          </a:solidFill>
+          <a:ln>
+            <a:solidFill>
+              <a:srgbClr val="C8C8D2"/>
+            </a:solidFill>
+          </a:ln>
+        </p:spPr>
+        <p:style>
+          <a:lnRef idx="1">
+            <a:schemeClr val="accent1"/>
+          </a:lnRef>
+          <a:fillRef idx="3">
+            <a:schemeClr val="accent1"/>
+          </a:fillRef>
+          <a:effectRef idx="2">
+            <a:schemeClr val="accent1"/>
+          </a:effectRef>
+          <a:fontRef idx="minor">
+            <a:schemeClr val="lt1"/>
+          </a:fontRef>
+        </p:style>
+        <p:txBody>
+          <a:bodyPr rtlCol="0" anchor="ctr"/>
+          <a:lstStyle/>
+          <a:p>
+            <a:pPr algn="ctr">
+              <a:defRPr sz="1200" b="1">
+                <a:solidFill>
+                  <a:srgbClr val="FFFFFF"/>
+                </a:solidFill>
+              </a:defRPr>
+            </a:pPr>
+            <a:r>
+              <a:t>DCS · Blend Optimizer · Analyzers</a:t>
+            </a:r>
+          </a:p>
+        </p:txBody>
+      </p:sp>
+      <p:sp>
+        <p:nvSpPr>
+          <p:cNvPr id="15" name="TextBox 14"/>
+          <p:cNvSpPr txBox="1"/>
+          <p:nvPr/>
+        </p:nvSpPr>
+        <p:spPr>
+          <a:xfrm>
+            <a:off x="502920" y="5120640"/>
+            <a:ext cx="10972800" cy="640080"/>
+          </a:xfrm>
+          <a:prstGeom prst="rect">
+            <a:avLst/>
+          </a:prstGeom>
+          <a:noFill/>
+        </p:spPr>
+        <p:txBody>
+          <a:bodyPr wrap="square">
+            <a:spAutoFit/>
+          </a:bodyPr>
+          <a:lstStyle/>
+          <a:p>
+            <a:pPr algn="l">
+              <a:defRPr sz="1200" b="0">
+                <a:solidFill>
+                  <a:srgbClr val="1E293B"/>
+                </a:solidFill>
+              </a:defRPr>
+            </a:pPr>
+            <a:r>
+              <a:t>PWO inherits the planner's structure; APC retains constraint fidelity — no need to replicate every valve at site level.</a:t>
+            </a:r>
+          </a:p>
+        </p:txBody>
+      </p:sp>
+    </p:spTree>
+  </p:cSld>
+  <p:clrMapOvr>
+    <a:masterClrMapping/>
+  </p:clrMapOvr>
+</p:sld>
+</file>
+
+<file path=ppt/slides/slide9.xml><?xml version="1.0" encoding="utf-8"?>
+<p:sld xmlns:a="http://schemas.openxmlformats.org/drawingml/2006/main" xmlns:p="http://schemas.openxmlformats.org/presentationml/2006/main" xmlns:r="http://schemas.openxmlformats.org/officeDocument/2006/relationships">
+  <p:cSld>
+    <p:spTree>
+      <p:nvGrpSpPr>
+        <p:cNvPr id="1" name=""/>
+        <p:cNvGrpSpPr/>
+        <p:nvPr/>
+      </p:nvGrpSpPr>
+      <p:grpSpPr/>
+      <p:sp>
+        <p:nvSpPr>
+          <p:cNvPr id="2" name="Rectangle 1"/>
+          <p:cNvSpPr/>
+          <p:nvPr/>
+        </p:nvSpPr>
+        <p:spPr>
+          <a:xfrm>
+            <a:off x="0" y="0"/>
+            <a:ext cx="12191695" cy="6858000"/>
+          </a:xfrm>
+          <a:prstGeom prst="rect">
+            <a:avLst/>
+          </a:prstGeom>
+          <a:solidFill>
+            <a:srgbClr val="F8FAFC"/>
+          </a:solidFill>
+          <a:ln>
+            <a:noFill/>
+          </a:ln>
+        </p:spPr>
+        <p:style>
+          <a:lnRef idx="1">
+            <a:schemeClr val="accent1"/>
+          </a:lnRef>
+          <a:fillRef idx="3">
+            <a:schemeClr val="accent1"/>
+          </a:fillRef>
+          <a:effectRef idx="2">
+            <a:schemeClr val="accent1"/>
+          </a:effectRef>
+          <a:fontRef idx="minor">
+            <a:schemeClr val="lt1"/>
+          </a:fontRef>
+        </p:style>
+        <p:txBody>
+          <a:bodyPr rtlCol="0" anchor="ctr"/>
+          <a:lstStyle/>
+          <a:p>
+            <a:pPr algn="ctr"/>
+          </a:p>
+        </p:txBody>
+      </p:sp>
+      <p:sp>
+        <p:nvSpPr>
+          <p:cNvPr id="3" name="TextBox 2"/>
+          <p:cNvSpPr txBox="1"/>
+          <p:nvPr/>
+        </p:nvSpPr>
+        <p:spPr>
+          <a:xfrm>
+            <a:off x="502920" y="320040"/>
+            <a:ext cx="10972800" cy="822960"/>
+          </a:xfrm>
+          <a:prstGeom prst="rect">
+            <a:avLst/>
+          </a:prstGeom>
+          <a:noFill/>
+        </p:spPr>
+        <p:txBody>
+          <a:bodyPr wrap="square">
+            <a:spAutoFit/>
+          </a:bodyPr>
+          <a:lstStyle/>
+          <a:p>
+            <a:pPr algn="l">
+              <a:defRPr sz="3200" b="1">
+                <a:solidFill>
+                  <a:srgbClr val="003DA5"/>
+                </a:solidFill>
+              </a:defRPr>
+            </a:pPr>
+            <a:r>
+              <a:t>Dynamic RTO vs traditional RTO</a:t>
+            </a:r>
+          </a:p>
+        </p:txBody>
+      </p:sp>
+      <p:sp>
+        <p:nvSpPr>
+          <p:cNvPr id="4" name="Rectangle 3"/>
+          <p:cNvSpPr/>
+          <p:nvPr/>
+        </p:nvSpPr>
+        <p:spPr>
+          <a:xfrm>
+            <a:off x="502920" y="1051560"/>
+            <a:ext cx="1097280" cy="54864"/>
+          </a:xfrm>
+          <a:prstGeom prst="rect">
+            <a:avLst/>
+          </a:prstGeom>
+          <a:solidFill>
+            <a:srgbClr val="F47920"/>
+          </a:solidFill>
+          <a:ln>
+            <a:noFill/>
+          </a:ln>
+        </p:spPr>
+        <p:style>
+          <a:lnRef idx="1">
+            <a:schemeClr val="accent1"/>
+          </a:lnRef>
+          <a:fillRef idx="3">
+            <a:schemeClr val="accent1"/>
+          </a:fillRef>
+          <a:effectRef idx="2">
+            <a:schemeClr val="accent1"/>
+          </a:effectRef>
+          <a:fontRef idx="minor">
+            <a:schemeClr val="lt1"/>
+          </a:fontRef>
+        </p:style>
+        <p:txBody>
+          <a:bodyPr rtlCol="0" anchor="ctr"/>
+          <a:lstStyle/>
+          <a:p>
+            <a:pPr algn="ctr"/>
+          </a:p>
+        </p:txBody>
+      </p:sp>
+      <p:sp>
+        <p:nvSpPr>
+          <p:cNvPr id="5" name="Rounded Rectangle 4"/>
+          <p:cNvSpPr/>
+          <p:nvPr/>
+        </p:nvSpPr>
+        <p:spPr>
+          <a:xfrm>
+            <a:off x="457200" y="1691640"/>
+            <a:ext cx="5029200" cy="2926080"/>
+          </a:xfrm>
+          <a:prstGeom prst="roundRect">
+            <a:avLst/>
+          </a:prstGeom>
+          <a:solidFill>
+            <a:srgbClr val="FFF5F5"/>
+          </a:solidFill>
+          <a:ln w="19050">
+            <a:solidFill>
+              <a:srgbClr val="FF4757"/>
+            </a:solidFill>
+          </a:ln>
+        </p:spPr>
+        <p:style>
+          <a:lnRef idx="1">
+            <a:schemeClr val="accent1"/>
+          </a:lnRef>
+          <a:fillRef idx="3">
+            <a:schemeClr val="accent1"/>
+          </a:fillRef>
+          <a:effectRef idx="2">
+            <a:schemeClr val="accent1"/>
+          </a:effectRef>
+          <a:fontRef idx="minor">
+            <a:schemeClr val="lt1"/>
+          </a:fontRef>
+        </p:style>
+        <p:txBody>
+          <a:bodyPr rtlCol="0" anchor="ctr" lIns="137160" tIns="109728"/>
+          <a:lstStyle/>
+          <a:p>
+            <a:pPr algn="ctr">
+              <a:defRPr sz="1400" b="1">
+                <a:solidFill>
+                  <a:srgbClr val="FF4757"/>
+                </a:solidFill>
+              </a:defRPr>
+            </a:pPr>
+            <a:r>
+              <a:t>Traditional RTO</a:t>
             </a:r>
           </a:p>
           <a:p>
             <a:pPr>
-              <a:defRPr sz="2000">
-                <a:solidFill>
-                  <a:srgbClr val="F47920"/>
-                </a:solidFill>
-              </a:defRPr>
-            </a:pPr>
-            <a:r>
-              <a:t>Contact Honeywell Process Solutions</a:t>
+              <a:spcBef>
+                <a:spcPts val="600"/>
+              </a:spcBef>
+              <a:defRPr sz="1200">
+                <a:solidFill>
+                  <a:srgbClr val="1E293B"/>
+                </a:solidFill>
+              </a:defRPr>
+            </a:pPr>
+          </a:p>
+        </p:txBody>
+      </p:sp>
+      <p:sp>
+        <p:nvSpPr>
+          <p:cNvPr id="6" name="TextBox 5"/>
+          <p:cNvSpPr txBox="1"/>
+          <p:nvPr/>
+        </p:nvSpPr>
+        <p:spPr>
+          <a:xfrm>
+            <a:off x="640080" y="2148840"/>
+            <a:ext cx="4572000" cy="2286000"/>
+          </a:xfrm>
+          <a:prstGeom prst="rect">
+            <a:avLst/>
+          </a:prstGeom>
+          <a:noFill/>
+        </p:spPr>
+        <p:txBody>
+          <a:bodyPr wrap="square">
+            <a:spAutoFit/>
+          </a:bodyPr>
+          <a:lstStyle/>
+          <a:p>
+            <a:pPr>
+              <a:spcAft>
+                <a:spcPts val="800"/>
+              </a:spcAft>
+              <a:defRPr sz="1400">
+                <a:solidFill>
+                  <a:srgbClr val="1E293B"/>
+                </a:solidFill>
+              </a:defRPr>
+            </a:pPr>
+            <a:r>
+              <a:t>Wait for steady state</a:t>
+            </a:r>
+          </a:p>
+          <a:p>
+            <a:pPr>
+              <a:spcAft>
+                <a:spcPts val="800"/>
+              </a:spcAft>
+              <a:defRPr sz="1400">
+                <a:solidFill>
+                  <a:srgbClr val="1E293B"/>
+                </a:solidFill>
+              </a:defRPr>
+            </a:pPr>
+            <a:r>
+              <a:t>2–4 hour execution cycle</a:t>
+            </a:r>
+          </a:p>
+          <a:p>
+            <a:pPr>
+              <a:spcAft>
+                <a:spcPts val="800"/>
+              </a:spcAft>
+              <a:defRPr sz="1400">
+                <a:solidFill>
+                  <a:srgbClr val="1E293B"/>
+                </a:solidFill>
+              </a:defRPr>
+            </a:pPr>
+            <a:r>
+              <a:t>Steady-state simulation core</a:t>
+            </a:r>
+          </a:p>
+          <a:p>
+            <a:pPr>
+              <a:spcAft>
+                <a:spcPts val="800"/>
+              </a:spcAft>
+              <a:defRPr sz="1400">
+                <a:solidFill>
+                  <a:srgbClr val="1E293B"/>
+                </a:solidFill>
+              </a:defRPr>
+            </a:pPr>
+            <a:r>
+              <a:t>Per-unit scope</a:t>
+            </a:r>
+          </a:p>
+          <a:p>
+            <a:pPr>
+              <a:spcAft>
+                <a:spcPts val="800"/>
+              </a:spcAft>
+              <a:defRPr sz="1400">
+                <a:solidFill>
+                  <a:srgbClr val="1E293B"/>
+                </a:solidFill>
+              </a:defRPr>
+            </a:pPr>
+            <a:r>
+              <a:t>Heavy model maintenance</a:t>
+            </a:r>
+          </a:p>
+        </p:txBody>
+      </p:sp>
+      <p:sp>
+        <p:nvSpPr>
+          <p:cNvPr id="7" name="TextBox 6"/>
+          <p:cNvSpPr txBox="1"/>
+          <p:nvPr/>
+        </p:nvSpPr>
+        <p:spPr>
+          <a:xfrm>
+            <a:off x="5669280" y="2743200"/>
+            <a:ext cx="731520" cy="548640"/>
+          </a:xfrm>
+          <a:prstGeom prst="rect">
+            <a:avLst/>
+          </a:prstGeom>
+          <a:noFill/>
+        </p:spPr>
+        <p:txBody>
+          <a:bodyPr wrap="square">
+            <a:spAutoFit/>
+          </a:bodyPr>
+          <a:lstStyle/>
+          <a:p>
+            <a:pPr algn="ctr">
+              <a:defRPr sz="2800" b="1">
+                <a:solidFill>
+                  <a:srgbClr val="64748B"/>
+                </a:solidFill>
+              </a:defRPr>
+            </a:pPr>
+            <a:r>
+              <a:t>VS</a:t>
+            </a:r>
+          </a:p>
+        </p:txBody>
+      </p:sp>
+      <p:sp>
+        <p:nvSpPr>
+          <p:cNvPr id="8" name="Rounded Rectangle 7"/>
+          <p:cNvSpPr/>
+          <p:nvPr/>
+        </p:nvSpPr>
+        <p:spPr>
+          <a:xfrm>
+            <a:off x="6400800" y="1691640"/>
+            <a:ext cx="5303520" cy="2926080"/>
+          </a:xfrm>
+          <a:prstGeom prst="roundRect">
+            <a:avLst/>
+          </a:prstGeom>
+          <a:solidFill>
+            <a:srgbClr val="E6FFF8"/>
+          </a:solidFill>
+          <a:ln w="19050">
+            <a:solidFill>
+              <a:srgbClr val="00C896"/>
+            </a:solidFill>
+          </a:ln>
+        </p:spPr>
+        <p:style>
+          <a:lnRef idx="1">
+            <a:schemeClr val="accent1"/>
+          </a:lnRef>
+          <a:fillRef idx="3">
+            <a:schemeClr val="accent1"/>
+          </a:fillRef>
+          <a:effectRef idx="2">
+            <a:schemeClr val="accent1"/>
+          </a:effectRef>
+          <a:fontRef idx="minor">
+            <a:schemeClr val="lt1"/>
+          </a:fontRef>
+        </p:style>
+        <p:txBody>
+          <a:bodyPr rtlCol="0" anchor="ctr" lIns="137160" tIns="109728"/>
+          <a:lstStyle/>
+          <a:p>
+            <a:pPr algn="ctr">
+              <a:defRPr sz="1400" b="1">
+                <a:solidFill>
+                  <a:srgbClr val="00C896"/>
+                </a:solidFill>
+              </a:defRPr>
+            </a:pPr>
+            <a:r>
+              <a:t>PWO Dynamic RTO</a:t>
+            </a:r>
+          </a:p>
+          <a:p>
+            <a:pPr>
+              <a:spcBef>
+                <a:spcPts val="600"/>
+              </a:spcBef>
+              <a:defRPr sz="1200">
+                <a:solidFill>
+                  <a:srgbClr val="1E293B"/>
+                </a:solidFill>
+              </a:defRPr>
+            </a:pPr>
+          </a:p>
+        </p:txBody>
+      </p:sp>
+      <p:sp>
+        <p:nvSpPr>
+          <p:cNvPr id="9" name="TextBox 8"/>
+          <p:cNvSpPr txBox="1"/>
+          <p:nvPr/>
+        </p:nvSpPr>
+        <p:spPr>
+          <a:xfrm>
+            <a:off x="6583680" y="2148840"/>
+            <a:ext cx="4846320" cy="2286000"/>
+          </a:xfrm>
+          <a:prstGeom prst="rect">
+            <a:avLst/>
+          </a:prstGeom>
+          <a:noFill/>
+        </p:spPr>
+        <p:txBody>
+          <a:bodyPr wrap="square">
+            <a:spAutoFit/>
+          </a:bodyPr>
+          <a:lstStyle/>
+          <a:p>
+            <a:pPr>
+              <a:spcAft>
+                <a:spcPts val="800"/>
+              </a:spcAft>
+              <a:defRPr sz="1400">
+                <a:solidFill>
+                  <a:srgbClr val="1E293B"/>
+                </a:solidFill>
+              </a:defRPr>
+            </a:pPr>
+            <a:r>
+              <a:t>Optimize during moves &amp; disturbances</a:t>
+            </a:r>
+          </a:p>
+          <a:p>
+            <a:pPr>
+              <a:spcAft>
+                <a:spcPts val="800"/>
+              </a:spcAft>
+              <a:defRPr sz="1400">
+                <a:solidFill>
+                  <a:srgbClr val="1E293B"/>
+                </a:solidFill>
+              </a:defRPr>
+            </a:pPr>
+            <a:r>
+              <a:t>~1 minute coordination cycle</a:t>
+            </a:r>
+          </a:p>
+          <a:p>
+            <a:pPr>
+              <a:spcAft>
+                <a:spcPts val="800"/>
+              </a:spcAft>
+              <a:defRPr sz="1400">
+                <a:solidFill>
+                  <a:srgbClr val="1E293B"/>
+                </a:solidFill>
+              </a:defRPr>
+            </a:pPr>
+            <a:r>
+              <a:t>Leverages live APC dynamic models</a:t>
+            </a:r>
+          </a:p>
+          <a:p>
+            <a:pPr>
+              <a:spcAft>
+                <a:spcPts val="800"/>
+              </a:spcAft>
+              <a:defRPr sz="1400">
+                <a:solidFill>
+                  <a:srgbClr val="1E293B"/>
+                </a:solidFill>
+              </a:defRPr>
+            </a:pPr>
+            <a:r>
+              <a:t>Full site / train scope</a:t>
+            </a:r>
+          </a:p>
+          <a:p>
+            <a:pPr>
+              <a:spcAft>
+                <a:spcPts val="800"/>
+              </a:spcAft>
+              <a:defRPr sz="1400">
+                <a:solidFill>
+                  <a:srgbClr val="1E293B"/>
+                </a:solidFill>
+              </a:defRPr>
+            </a:pPr>
+            <a:r>
+              <a:t>Gain matrix from plan + history</a:t>
+            </a:r>
+          </a:p>
+        </p:txBody>
+      </p:sp>
+      <p:sp>
+        <p:nvSpPr>
+          <p:cNvPr id="10" name="TextBox 9"/>
+          <p:cNvSpPr txBox="1"/>
+          <p:nvPr/>
+        </p:nvSpPr>
+        <p:spPr>
+          <a:xfrm>
+            <a:off x="502920" y="4846320"/>
+            <a:ext cx="10972800" cy="548640"/>
+          </a:xfrm>
+          <a:prstGeom prst="rect">
+            <a:avLst/>
+          </a:prstGeom>
+          <a:noFill/>
+        </p:spPr>
+        <p:txBody>
+          <a:bodyPr wrap="square">
+            <a:spAutoFit/>
+          </a:bodyPr>
+          <a:lstStyle/>
+          <a:p>
+            <a:pPr algn="l">
+              <a:defRPr sz="1300" b="1">
+                <a:solidFill>
+                  <a:srgbClr val="003DA5"/>
+                </a:solidFill>
+              </a:defRPr>
+            </a:pPr>
+            <a:r>
+              <a:t>~50% reduction in off-spec during transients (literature &amp; Honeywell deployments)</a:t>
             </a:r>
           </a:p>
         </p:txBody>
